--- a/docs/public/course-assets/course-pptx/ag-003.pptx
+++ b/docs/public/course-assets/course-pptx/ag-003.pptx
@@ -2,24 +2,24 @@
 <file path=ppt/presentation.xml><?xml version="1.0" encoding="utf-8"?>
 <p:presentation xmlns:p="http://schemas.openxmlformats.org/presentationml/2006/main">
   <p:sldMasterIdLst>
-    <p:sldMasterId xmlns:r="http://schemas.openxmlformats.org/officeDocument/2006/relationships" id="2147483648" r:id="Rf2482f9d32954d5d"/>
+    <p:sldMasterId xmlns:r="http://schemas.openxmlformats.org/officeDocument/2006/relationships" id="2147483648" r:id="R6c6093b14c6e4aa1"/>
   </p:sldMasterIdLst>
   <p:notesMasterIdLst>
-    <p:notesMasterId xmlns:r="http://schemas.openxmlformats.org/officeDocument/2006/relationships" r:id="R77b4cfda317446c3"/>
+    <p:notesMasterId xmlns:r="http://schemas.openxmlformats.org/officeDocument/2006/relationships" r:id="R7f2c4e4229134f03"/>
   </p:notesMasterIdLst>
   <p:sldIdLst>
-    <p:sldId xmlns:r="http://schemas.openxmlformats.org/officeDocument/2006/relationships" id="256" r:id="R10b1bd15462a45b0"/>
-    <p:sldId xmlns:r="http://schemas.openxmlformats.org/officeDocument/2006/relationships" id="257" r:id="Rfe7dc65854444deb"/>
-    <p:sldId xmlns:r="http://schemas.openxmlformats.org/officeDocument/2006/relationships" id="258" r:id="R8b5bb7da6c6b450c"/>
-    <p:sldId xmlns:r="http://schemas.openxmlformats.org/officeDocument/2006/relationships" id="259" r:id="Red36d45472194a5a"/>
-    <p:sldId xmlns:r="http://schemas.openxmlformats.org/officeDocument/2006/relationships" id="260" r:id="R37a8838219424265"/>
-    <p:sldId xmlns:r="http://schemas.openxmlformats.org/officeDocument/2006/relationships" id="261" r:id="R2fc1a7bd1d894c6e"/>
-    <p:sldId xmlns:r="http://schemas.openxmlformats.org/officeDocument/2006/relationships" id="262" r:id="Ra924960b93ee4ee8"/>
-    <p:sldId xmlns:r="http://schemas.openxmlformats.org/officeDocument/2006/relationships" id="263" r:id="Rf778d3c7fbbd4536"/>
-    <p:sldId xmlns:r="http://schemas.openxmlformats.org/officeDocument/2006/relationships" id="264" r:id="Rb86a3f45004644a0"/>
-    <p:sldId xmlns:r="http://schemas.openxmlformats.org/officeDocument/2006/relationships" id="265" r:id="Rc69fd75c71b0458e"/>
-    <p:sldId xmlns:r="http://schemas.openxmlformats.org/officeDocument/2006/relationships" id="266" r:id="Rd85652c0fd434569"/>
-    <p:sldId xmlns:r="http://schemas.openxmlformats.org/officeDocument/2006/relationships" id="267" r:id="R2dd7dce8e67e446a"/>
+    <p:sldId xmlns:r="http://schemas.openxmlformats.org/officeDocument/2006/relationships" id="256" r:id="R02a187e4c2624809"/>
+    <p:sldId xmlns:r="http://schemas.openxmlformats.org/officeDocument/2006/relationships" id="257" r:id="R2ee19947611944c9"/>
+    <p:sldId xmlns:r="http://schemas.openxmlformats.org/officeDocument/2006/relationships" id="258" r:id="R16e7d896206f4bc5"/>
+    <p:sldId xmlns:r="http://schemas.openxmlformats.org/officeDocument/2006/relationships" id="259" r:id="R26b9f14b298c4ca9"/>
+    <p:sldId xmlns:r="http://schemas.openxmlformats.org/officeDocument/2006/relationships" id="260" r:id="R0b5635dfddc441d0"/>
+    <p:sldId xmlns:r="http://schemas.openxmlformats.org/officeDocument/2006/relationships" id="261" r:id="R3cef0627a37d4e5e"/>
+    <p:sldId xmlns:r="http://schemas.openxmlformats.org/officeDocument/2006/relationships" id="262" r:id="Rd2721ddac8da4f0e"/>
+    <p:sldId xmlns:r="http://schemas.openxmlformats.org/officeDocument/2006/relationships" id="263" r:id="R04398e2dadec45db"/>
+    <p:sldId xmlns:r="http://schemas.openxmlformats.org/officeDocument/2006/relationships" id="264" r:id="R54a840600a05487c"/>
+    <p:sldId xmlns:r="http://schemas.openxmlformats.org/officeDocument/2006/relationships" id="265" r:id="Rf7ce7a2264434697"/>
+    <p:sldId xmlns:r="http://schemas.openxmlformats.org/officeDocument/2006/relationships" id="266" r:id="Rf459d9fa4db545c6"/>
+    <p:sldId xmlns:r="http://schemas.openxmlformats.org/officeDocument/2006/relationships" id="267" r:id="R709f356cc86e4bee"/>
   </p:sldIdLst>
   <p:sldSz cx="12192000" cy="6858000"/>
   <p:notesSz cx="6858000" cy="9144000"/>
@@ -1338,7 +1338,7 @@
   </p:cSld>
   <p:clrMap bg1="lt1" tx1="dk1" bg2="lt2" tx2="dk2" accent1="accent1" accent2="accent2" accent3="accent3" accent4="accent4" accent5="accent5" accent6="accent6" hlink="hlink" folHlink="folHlink"/>
   <p:sldLayoutIdLst>
-    <p:sldLayoutId xmlns:r="http://schemas.openxmlformats.org/officeDocument/2006/relationships" id="2147483649" r:id="Rec9b184c1d454a49"/>
+    <p:sldLayoutId xmlns:r="http://schemas.openxmlformats.org/officeDocument/2006/relationships" id="2147483649" r:id="R8f89250c97a34718"/>
   </p:sldLayoutIdLst>
   <p:txStyles>
     <p:titleStyle>
@@ -1889,7 +1889,7 @@
           <p:cNvPr id="1" name="cover-rule">
             <a:extLst xmlns:a="http://schemas.openxmlformats.org/drawingml/2006/main">
               <a:ext uri="{FF2B5EF4-FFF2-40B4-BE49-F238E27FC236}">
-                <a16:creationId xmlns:a16="http://schemas.microsoft.com/office/drawing/2014/main" id="{FD30616F-34D1-4ED2-9229-E8BB350EBC5B}"/>
+                <a16:creationId xmlns:a16="http://schemas.microsoft.com/office/drawing/2014/main" id="{EB51D5CE-9995-47E1-B258-023B23FBA01D}"/>
               </a:ext>
             </a:extLst>
           </p:cNvPr>
@@ -1922,7 +1922,7 @@
           <p:cNvPr id="2" name="cover-ring-1">
             <a:extLst xmlns:a="http://schemas.openxmlformats.org/drawingml/2006/main">
               <a:ext uri="{FF2B5EF4-FFF2-40B4-BE49-F238E27FC236}">
-                <a16:creationId xmlns:a16="http://schemas.microsoft.com/office/drawing/2014/main" id="{7F551D9F-6C83-47FA-9FB5-5760F0FD1968}"/>
+                <a16:creationId xmlns:a16="http://schemas.microsoft.com/office/drawing/2014/main" id="{5B7E147C-5573-4571-8FFE-BF52D49077F7}"/>
               </a:ext>
             </a:extLst>
           </p:cNvPr>
@@ -1953,7 +1953,7 @@
           <p:cNvPr id="3" name="cover-ring-2">
             <a:extLst xmlns:a="http://schemas.openxmlformats.org/drawingml/2006/main">
               <a:ext uri="{FF2B5EF4-FFF2-40B4-BE49-F238E27FC236}">
-                <a16:creationId xmlns:a16="http://schemas.microsoft.com/office/drawing/2014/main" id="{DD869DD3-8551-4452-8401-56B645F08C11}"/>
+                <a16:creationId xmlns:a16="http://schemas.microsoft.com/office/drawing/2014/main" id="{C38F460E-F9C1-4EF7-997F-91C7A809DA84}"/>
               </a:ext>
             </a:extLst>
           </p:cNvPr>
@@ -1984,7 +1984,7 @@
           <p:cNvPr id="4" name="cover-core">
             <a:extLst xmlns:a="http://schemas.openxmlformats.org/drawingml/2006/main">
               <a:ext uri="{FF2B5EF4-FFF2-40B4-BE49-F238E27FC236}">
-                <a16:creationId xmlns:a16="http://schemas.microsoft.com/office/drawing/2014/main" id="{3A8B475F-C263-4F99-AC66-2755078C7ECF}"/>
+                <a16:creationId xmlns:a16="http://schemas.microsoft.com/office/drawing/2014/main" id="{A1827D90-10FF-4139-91FE-4E43B9875A24}"/>
               </a:ext>
             </a:extLst>
           </p:cNvPr>
@@ -2017,7 +2017,7 @@
           <p:cNvPr id="5" name="cover-line-1">
             <a:extLst xmlns:a="http://schemas.openxmlformats.org/drawingml/2006/main">
               <a:ext uri="{FF2B5EF4-FFF2-40B4-BE49-F238E27FC236}">
-                <a16:creationId xmlns:a16="http://schemas.microsoft.com/office/drawing/2014/main" id="{929B51C4-39F7-4248-B2C6-32E1ED39C05C}"/>
+                <a16:creationId xmlns:a16="http://schemas.microsoft.com/office/drawing/2014/main" id="{103C39C0-D187-4B2C-BF87-81BD11520E3C}"/>
               </a:ext>
             </a:extLst>
           </p:cNvPr>
@@ -2048,7 +2048,7 @@
           <p:cNvPr id="6" name="cover-line-2">
             <a:extLst xmlns:a="http://schemas.openxmlformats.org/drawingml/2006/main">
               <a:ext uri="{FF2B5EF4-FFF2-40B4-BE49-F238E27FC236}">
-                <a16:creationId xmlns:a16="http://schemas.microsoft.com/office/drawing/2014/main" id="{7619062B-B066-439F-9BC6-5F306BCCDA15}"/>
+                <a16:creationId xmlns:a16="http://schemas.microsoft.com/office/drawing/2014/main" id="{9C6E4AF8-C2DF-4C5A-9A4B-B08285FBA805}"/>
               </a:ext>
             </a:extLst>
           </p:cNvPr>
@@ -2079,7 +2079,7 @@
           <p:cNvPr id="7" name="cover-eyebrow">
             <a:extLst xmlns:a="http://schemas.openxmlformats.org/drawingml/2006/main">
               <a:ext uri="{FF2B5EF4-FFF2-40B4-BE49-F238E27FC236}">
-                <a16:creationId xmlns:a16="http://schemas.microsoft.com/office/drawing/2014/main" id="{57064100-9E5A-43C0-8E26-D9402E68478B}"/>
+                <a16:creationId xmlns:a16="http://schemas.microsoft.com/office/drawing/2014/main" id="{AD146D94-8DE9-4A1F-A54F-C421CC495C17}"/>
               </a:ext>
             </a:extLst>
           </p:cNvPr>
@@ -2137,7 +2137,7 @@
           <p:cNvPr id="8" name="cover-title">
             <a:extLst xmlns:a="http://schemas.openxmlformats.org/drawingml/2006/main">
               <a:ext uri="{FF2B5EF4-FFF2-40B4-BE49-F238E27FC236}">
-                <a16:creationId xmlns:a16="http://schemas.microsoft.com/office/drawing/2014/main" id="{A6F115B4-7C2E-473E-AAAA-A6AC5D6BF6EC}"/>
+                <a16:creationId xmlns:a16="http://schemas.microsoft.com/office/drawing/2014/main" id="{C5BB205B-01E1-4ED5-AB4A-E1F75A3BAD57}"/>
               </a:ext>
             </a:extLst>
           </p:cNvPr>
@@ -2195,7 +2195,7 @@
           <p:cNvPr id="9" name="cover-subtitle">
             <a:extLst xmlns:a="http://schemas.openxmlformats.org/drawingml/2006/main">
               <a:ext uri="{FF2B5EF4-FFF2-40B4-BE49-F238E27FC236}">
-                <a16:creationId xmlns:a16="http://schemas.microsoft.com/office/drawing/2014/main" id="{DD621BC4-5669-4606-B412-EE5D6F637DDB}"/>
+                <a16:creationId xmlns:a16="http://schemas.microsoft.com/office/drawing/2014/main" id="{DD86F398-6768-49A8-9266-1D24E9ECBCFD}"/>
               </a:ext>
             </a:extLst>
           </p:cNvPr>
@@ -2257,7 +2257,7 @@
           <p:cNvPr id="10" name="cover-lead">
             <a:extLst xmlns:a="http://schemas.openxmlformats.org/drawingml/2006/main">
               <a:ext uri="{FF2B5EF4-FFF2-40B4-BE49-F238E27FC236}">
-                <a16:creationId xmlns:a16="http://schemas.microsoft.com/office/drawing/2014/main" id="{5693737A-2210-4D72-8335-986CF9A49669}"/>
+                <a16:creationId xmlns:a16="http://schemas.microsoft.com/office/drawing/2014/main" id="{88616479-E170-4E63-9890-08EC8AA7912E}"/>
               </a:ext>
             </a:extLst>
           </p:cNvPr>
@@ -2305,7 +2305,7 @@
                 <a:ea typeface="PingFang SC"/>
                 <a:cs typeface="PingFang SC"/>
               </a:rPr>
-              <a:t>当一个任务同时包含检索、分析、实现、测试和审阅时，把工作分给多个智能体似乎很自然。并行确实可能缩短时间，专业角色也可能提高局部质量。但多一个智能体，就多一份上下文、一次通信…</a:t>
+              <a:t>当一个任务同时包含检索、分析、实现、测试和审阅时；把工作分给多个智能体似乎很自然；并行确实可能缩短时间；专业角色也可能提高局部质量</a:t>
             </a:r>
           </a:p>
         </p:txBody>
@@ -2315,7 +2315,7 @@
           <p:cNvPr id="11" name="cover-course">
             <a:extLst xmlns:a="http://schemas.openxmlformats.org/drawingml/2006/main">
               <a:ext uri="{FF2B5EF4-FFF2-40B4-BE49-F238E27FC236}">
-                <a16:creationId xmlns:a16="http://schemas.microsoft.com/office/drawing/2014/main" id="{586662AC-2A82-4ACF-8107-433FA7899C43}"/>
+                <a16:creationId xmlns:a16="http://schemas.microsoft.com/office/drawing/2014/main" id="{FFED8073-9ED5-4822-A2D7-20F0C89A9A55}"/>
               </a:ext>
             </a:extLst>
           </p:cNvPr>
@@ -2373,7 +2373,7 @@
           <p:cNvPr id="12" name="cover-id">
             <a:extLst xmlns:a="http://schemas.openxmlformats.org/drawingml/2006/main">
               <a:ext uri="{FF2B5EF4-FFF2-40B4-BE49-F238E27FC236}">
-                <a16:creationId xmlns:a16="http://schemas.microsoft.com/office/drawing/2014/main" id="{484D106A-FAA1-4132-ADC8-5BED0FA54112}"/>
+                <a16:creationId xmlns:a16="http://schemas.microsoft.com/office/drawing/2014/main" id="{4713EA98-AA8A-4685-8ED6-5D157D167644}"/>
               </a:ext>
             </a:extLst>
           </p:cNvPr>
@@ -2429,7 +2429,7 @@
     </p:spTree>
     <p:extLst>
       <p:ext uri="{BB962C8B-B14F-4D97-AF65-F5344CB8AC3E}">
-        <p14:creationId xmlns:p14="http://schemas.microsoft.com/office/powerpoint/2010/main" val="215556197"/>
+        <p14:creationId xmlns:p14="http://schemas.microsoft.com/office/powerpoint/2010/main" val="1757945530"/>
       </p:ext>
     </p:extLst>
   </p:cSld>
@@ -2460,7 +2460,7 @@
           <p:cNvPr id="1" name="s10-rule">
             <a:extLst xmlns:a="http://schemas.openxmlformats.org/drawingml/2006/main">
               <a:ext uri="{FF2B5EF4-FFF2-40B4-BE49-F238E27FC236}">
-                <a16:creationId xmlns:a16="http://schemas.microsoft.com/office/drawing/2014/main" id="{E193B321-0E90-43A2-9876-8F673632F8AD}"/>
+                <a16:creationId xmlns:a16="http://schemas.microsoft.com/office/drawing/2014/main" id="{D8BB8569-CC3E-4808-BC2C-FED64DF6F4CE}"/>
               </a:ext>
             </a:extLst>
           </p:cNvPr>
@@ -2493,7 +2493,7 @@
           <p:cNvPr id="2" name="s10-eyebrow">
             <a:extLst xmlns:a="http://schemas.openxmlformats.org/drawingml/2006/main">
               <a:ext uri="{FF2B5EF4-FFF2-40B4-BE49-F238E27FC236}">
-                <a16:creationId xmlns:a16="http://schemas.microsoft.com/office/drawing/2014/main" id="{9A6DFBC8-007F-4395-99C0-AAF41684746C}"/>
+                <a16:creationId xmlns:a16="http://schemas.microsoft.com/office/drawing/2014/main" id="{F5D0372B-A72B-4021-BB2B-0B53CBCFE67C}"/>
               </a:ext>
             </a:extLst>
           </p:cNvPr>
@@ -2551,7 +2551,7 @@
           <p:cNvPr id="3" name="s10-title">
             <a:extLst xmlns:a="http://schemas.openxmlformats.org/drawingml/2006/main">
               <a:ext uri="{FF2B5EF4-FFF2-40B4-BE49-F238E27FC236}">
-                <a16:creationId xmlns:a16="http://schemas.microsoft.com/office/drawing/2014/main" id="{41604E66-F999-4A04-9D06-AE715C6FA28D}"/>
+                <a16:creationId xmlns:a16="http://schemas.microsoft.com/office/drawing/2014/main" id="{44B0918E-8433-4349-8A4E-21683EF7D8B7}"/>
               </a:ext>
             </a:extLst>
           </p:cNvPr>
@@ -2599,7 +2599,7 @@
                 <a:ea typeface="PingFang SC"/>
                 <a:cs typeface="PingFang SC"/>
               </a:rPr>
-              <a:t>把方法落实为可验证的行动</a:t>
+              <a:t>多智能体协作：一次可验收练习</a:t>
             </a:r>
           </a:p>
         </p:txBody>
@@ -2609,7 +2609,7 @@
           <p:cNvPr id="4" name="s10-footer">
             <a:extLst xmlns:a="http://schemas.openxmlformats.org/drawingml/2006/main">
               <a:ext uri="{FF2B5EF4-FFF2-40B4-BE49-F238E27FC236}">
-                <a16:creationId xmlns:a16="http://schemas.microsoft.com/office/drawing/2014/main" id="{A4B01B4E-98D9-4FC3-9099-D5578C467154}"/>
+                <a16:creationId xmlns:a16="http://schemas.microsoft.com/office/drawing/2014/main" id="{D072E5D6-3694-44E9-B405-A94338374520}"/>
               </a:ext>
             </a:extLst>
           </p:cNvPr>
@@ -2640,7 +2640,7 @@
           <p:cNvPr id="5" name="s10-identity">
             <a:extLst xmlns:a="http://schemas.openxmlformats.org/drawingml/2006/main">
               <a:ext uri="{FF2B5EF4-FFF2-40B4-BE49-F238E27FC236}">
-                <a16:creationId xmlns:a16="http://schemas.microsoft.com/office/drawing/2014/main" id="{C7411EA2-EFF4-4D51-BC49-A4076E92FA1F}"/>
+                <a16:creationId xmlns:a16="http://schemas.microsoft.com/office/drawing/2014/main" id="{07545475-D99C-4440-AE26-0D3F31026BE1}"/>
               </a:ext>
             </a:extLst>
           </p:cNvPr>
@@ -2698,7 +2698,7 @@
           <p:cNvPr id="6" name="practice-circle-0">
             <a:extLst xmlns:a="http://schemas.openxmlformats.org/drawingml/2006/main">
               <a:ext uri="{FF2B5EF4-FFF2-40B4-BE49-F238E27FC236}">
-                <a16:creationId xmlns:a16="http://schemas.microsoft.com/office/drawing/2014/main" id="{AAA4F57F-ED9B-435C-8398-4FF4E2A357D2}"/>
+                <a16:creationId xmlns:a16="http://schemas.microsoft.com/office/drawing/2014/main" id="{3CB36B4A-D174-4C9D-A7D7-29381447F03F}"/>
               </a:ext>
             </a:extLst>
           </p:cNvPr>
@@ -2731,7 +2731,7 @@
           <p:cNvPr id="7" name="practice-number-0">
             <a:extLst xmlns:a="http://schemas.openxmlformats.org/drawingml/2006/main">
               <a:ext uri="{FF2B5EF4-FFF2-40B4-BE49-F238E27FC236}">
-                <a16:creationId xmlns:a16="http://schemas.microsoft.com/office/drawing/2014/main" id="{9D2C70AC-5952-422E-A43C-80FBE3E1A05D}"/>
+                <a16:creationId xmlns:a16="http://schemas.microsoft.com/office/drawing/2014/main" id="{BF13C60E-15E5-4B49-988D-A2ECD2FD9B17}"/>
               </a:ext>
             </a:extLst>
           </p:cNvPr>
@@ -2789,7 +2789,7 @@
           <p:cNvPr id="8" name="practice-item-0">
             <a:extLst xmlns:a="http://schemas.openxmlformats.org/drawingml/2006/main">
               <a:ext uri="{FF2B5EF4-FFF2-40B4-BE49-F238E27FC236}">
-                <a16:creationId xmlns:a16="http://schemas.microsoft.com/office/drawing/2014/main" id="{1568FEF8-D7EE-42EB-B5DF-68DD7F83F262}"/>
+                <a16:creationId xmlns:a16="http://schemas.microsoft.com/office/drawing/2014/main" id="{F2C08DC6-C2F9-4F79-ABF1-855BBD4A69B2}"/>
               </a:ext>
             </a:extLst>
           </p:cNvPr>
@@ -2843,7 +2843,7 @@
                 <a:ea typeface="PingFang SC"/>
                 <a:cs typeface="PingFang SC"/>
               </a:rPr>
-              <a:t>选择“发布一份月度数据简报”任务，完成以下设计：；先写一段论证，说明任务哪些部分值得并行、哪些部分必须串行；如果决定不拆，也要给出成本理由</a:t>
+              <a:t>选择“发布一份月度数据简报”任务，完成以下设计；先写一段论证，说明任务哪些部分值得并行、哪些部分必须串行；如果决定不拆，也要给出成本理由</a:t>
             </a:r>
           </a:p>
         </p:txBody>
@@ -2853,7 +2853,7 @@
           <p:cNvPr id="9" name="practice-connector-0">
             <a:extLst xmlns:a="http://schemas.openxmlformats.org/drawingml/2006/main">
               <a:ext uri="{FF2B5EF4-FFF2-40B4-BE49-F238E27FC236}">
-                <a16:creationId xmlns:a16="http://schemas.microsoft.com/office/drawing/2014/main" id="{4F957455-14D9-4C4D-ACB0-367AFAED1F8F}"/>
+                <a16:creationId xmlns:a16="http://schemas.microsoft.com/office/drawing/2014/main" id="{DB7E56E2-8DA4-4F2C-B870-12ABDB6945CC}"/>
               </a:ext>
             </a:extLst>
           </p:cNvPr>
@@ -2873,7 +2873,7 @@
           <a:noFill xmlns:a="http://schemas.openxmlformats.org/drawingml/2006/main"/>
           <a:ln xmlns:a="http://schemas.openxmlformats.org/drawingml/2006/main" w="28575">
             <a:solidFill>
-              <a:srgbClr val="17A6C8"/>
+              <a:srgbClr val="006B80"/>
             </a:solidFill>
             <a:prstDash val="solid"/>
           </a:ln>
@@ -2884,7 +2884,7 @@
           <p:cNvPr id="10" name="practice-circle-1">
             <a:extLst xmlns:a="http://schemas.openxmlformats.org/drawingml/2006/main">
               <a:ext uri="{FF2B5EF4-FFF2-40B4-BE49-F238E27FC236}">
-                <a16:creationId xmlns:a16="http://schemas.microsoft.com/office/drawing/2014/main" id="{13053E9B-1306-4E4F-BB0D-118BCC321BBD}"/>
+                <a16:creationId xmlns:a16="http://schemas.microsoft.com/office/drawing/2014/main" id="{B0106055-EE39-4E66-BDC5-46799FCAB5BB}"/>
               </a:ext>
             </a:extLst>
           </p:cNvPr>
@@ -2917,7 +2917,7 @@
           <p:cNvPr id="11" name="practice-number-1">
             <a:extLst xmlns:a="http://schemas.openxmlformats.org/drawingml/2006/main">
               <a:ext uri="{FF2B5EF4-FFF2-40B4-BE49-F238E27FC236}">
-                <a16:creationId xmlns:a16="http://schemas.microsoft.com/office/drawing/2014/main" id="{CABCC176-F147-4317-AF65-3AEAF450CCA7}"/>
+                <a16:creationId xmlns:a16="http://schemas.microsoft.com/office/drawing/2014/main" id="{9A11C6C4-AC0B-4A98-B23D-512DF7F861E2}"/>
               </a:ext>
             </a:extLst>
           </p:cNvPr>
@@ -2975,7 +2975,7 @@
           <p:cNvPr id="12" name="practice-item-1">
             <a:extLst xmlns:a="http://schemas.openxmlformats.org/drawingml/2006/main">
               <a:ext uri="{FF2B5EF4-FFF2-40B4-BE49-F238E27FC236}">
-                <a16:creationId xmlns:a16="http://schemas.microsoft.com/office/drawing/2014/main" id="{B63E89B3-4E02-4155-8AD5-84B07A955720}"/>
+                <a16:creationId xmlns:a16="http://schemas.microsoft.com/office/drawing/2014/main" id="{DCE6DA1B-5339-4CA9-8379-BB3A8A76B2F2}"/>
               </a:ext>
             </a:extLst>
           </p:cNvPr>
@@ -3029,7 +3029,7 @@
                 <a:ea typeface="PingFang SC"/>
                 <a:cs typeface="PingFang SC"/>
               </a:rPr>
-              <a:t>定义协调者、数据执行者、文字执行者、审阅者和整合者的输入、输出、工具权限与退出条件。；设计一张共享状态表，至少包含任务编号、输入版本、状态、产物、证据、阻塞和下游依赖</a:t>
+              <a:t>定义协调者、数据执行者、文字执行者、审阅者和整合者的输入、输出、工具权限与退出条件；设计一张共享状态表，至少包含任务编号、输入版本、状态、产物、证据、阻塞和下游依赖</a:t>
             </a:r>
           </a:p>
         </p:txBody>
@@ -3039,7 +3039,7 @@
           <p:cNvPr id="13" name="practice-connector-1">
             <a:extLst xmlns:a="http://schemas.openxmlformats.org/drawingml/2006/main">
               <a:ext uri="{FF2B5EF4-FFF2-40B4-BE49-F238E27FC236}">
-                <a16:creationId xmlns:a16="http://schemas.microsoft.com/office/drawing/2014/main" id="{D7C9A611-3F9C-476D-BAF0-BCAB37C411AE}"/>
+                <a16:creationId xmlns:a16="http://schemas.microsoft.com/office/drawing/2014/main" id="{8DCA4E42-3BE8-4EA9-B017-833AB19E1C8F}"/>
               </a:ext>
             </a:extLst>
           </p:cNvPr>
@@ -3059,7 +3059,7 @@
           <a:noFill xmlns:a="http://schemas.openxmlformats.org/drawingml/2006/main"/>
           <a:ln xmlns:a="http://schemas.openxmlformats.org/drawingml/2006/main" w="28575">
             <a:solidFill>
-              <a:srgbClr val="17A6C8"/>
+              <a:srgbClr val="006B80"/>
             </a:solidFill>
             <a:prstDash val="solid"/>
           </a:ln>
@@ -3070,7 +3070,7 @@
           <p:cNvPr id="14" name="practice-circle-2">
             <a:extLst xmlns:a="http://schemas.openxmlformats.org/drawingml/2006/main">
               <a:ext uri="{FF2B5EF4-FFF2-40B4-BE49-F238E27FC236}">
-                <a16:creationId xmlns:a16="http://schemas.microsoft.com/office/drawing/2014/main" id="{688F3187-AF1E-41ED-B5C5-C270C2E1EEF7}"/>
+                <a16:creationId xmlns:a16="http://schemas.microsoft.com/office/drawing/2014/main" id="{EA212288-EF3C-480B-922D-D4742418F06D}"/>
               </a:ext>
             </a:extLst>
           </p:cNvPr>
@@ -3088,7 +3088,7 @@
             <a:avLst/>
           </a:prstGeom>
           <a:solidFill xmlns:a="http://schemas.openxmlformats.org/drawingml/2006/main">
-            <a:srgbClr val="17A6C8"/>
+            <a:srgbClr val="006B80"/>
           </a:solidFill>
           <a:ln xmlns:a="http://schemas.openxmlformats.org/drawingml/2006/main" w="28575">
             <a:solidFill>
@@ -3103,7 +3103,7 @@
           <p:cNvPr id="15" name="practice-number-2">
             <a:extLst xmlns:a="http://schemas.openxmlformats.org/drawingml/2006/main">
               <a:ext uri="{FF2B5EF4-FFF2-40B4-BE49-F238E27FC236}">
-                <a16:creationId xmlns:a16="http://schemas.microsoft.com/office/drawing/2014/main" id="{344D015C-4601-4E84-BA97-8D6600799C38}"/>
+                <a16:creationId xmlns:a16="http://schemas.microsoft.com/office/drawing/2014/main" id="{4DF4738E-D130-4AB7-AE66-E8561A83D24C}"/>
               </a:ext>
             </a:extLst>
           </p:cNvPr>
@@ -3161,7 +3161,7 @@
           <p:cNvPr id="16" name="practice-item-2">
             <a:extLst xmlns:a="http://schemas.openxmlformats.org/drawingml/2006/main">
               <a:ext uri="{FF2B5EF4-FFF2-40B4-BE49-F238E27FC236}">
-                <a16:creationId xmlns:a16="http://schemas.microsoft.com/office/drawing/2014/main" id="{6F2B15EB-9C23-48AD-AB25-95D01146E1B4}"/>
+                <a16:creationId xmlns:a16="http://schemas.microsoft.com/office/drawing/2014/main" id="{99DDE7DF-1821-4ADF-9217-0305E7C0FC21}"/>
               </a:ext>
             </a:extLst>
           </p:cNvPr>
@@ -3185,7 +3185,7 @@
           </a:solidFill>
           <a:ln xmlns:a="http://schemas.openxmlformats.org/drawingml/2006/main" w="19050">
             <a:solidFill>
-              <a:srgbClr val="17A6C8"/>
+              <a:srgbClr val="006B80"/>
             </a:solidFill>
             <a:prstDash val="solid"/>
           </a:ln>
@@ -3215,7 +3215,7 @@
                 <a:ea typeface="PingFang SC"/>
                 <a:cs typeface="PingFang SC"/>
               </a:rPr>
-              <a:t>写出一次交接示例，并模拟“数据版本更新”和“两个角色结论冲突”两种故障。；指定至少两个人工介入点，说明触发条件、审核人和审核后的恢复步骤</a:t>
+              <a:t>写出一次交接示例，并模拟“数据版本更新”和“两个角色结论冲突”两种故障；指定至少两个人工介入点，说明触发条件、审核人和审核后的恢复步骤</a:t>
             </a:r>
           </a:p>
         </p:txBody>
@@ -3223,7 +3223,7 @@
     </p:spTree>
     <p:extLst>
       <p:ext uri="{BB962C8B-B14F-4D97-AF65-F5344CB8AC3E}">
-        <p14:creationId xmlns:p14="http://schemas.microsoft.com/office/powerpoint/2010/main" val="1668182158"/>
+        <p14:creationId xmlns:p14="http://schemas.microsoft.com/office/powerpoint/2010/main" val="701497796"/>
       </p:ext>
     </p:extLst>
   </p:cSld>
@@ -3254,7 +3254,7 @@
           <p:cNvPr id="1" name="s11-rule">
             <a:extLst xmlns:a="http://schemas.openxmlformats.org/drawingml/2006/main">
               <a:ext uri="{FF2B5EF4-FFF2-40B4-BE49-F238E27FC236}">
-                <a16:creationId xmlns:a16="http://schemas.microsoft.com/office/drawing/2014/main" id="{48533250-ADDD-4EBE-B008-5E8526271CB3}"/>
+                <a16:creationId xmlns:a16="http://schemas.microsoft.com/office/drawing/2014/main" id="{4AF032BB-B557-47E3-9A39-663385A86FCD}"/>
               </a:ext>
             </a:extLst>
           </p:cNvPr>
@@ -3287,7 +3287,7 @@
           <p:cNvPr id="2" name="s11-eyebrow">
             <a:extLst xmlns:a="http://schemas.openxmlformats.org/drawingml/2006/main">
               <a:ext uri="{FF2B5EF4-FFF2-40B4-BE49-F238E27FC236}">
-                <a16:creationId xmlns:a16="http://schemas.microsoft.com/office/drawing/2014/main" id="{633E72DC-2BD0-4E53-ACEE-C39B55AC34FF}"/>
+                <a16:creationId xmlns:a16="http://schemas.microsoft.com/office/drawing/2014/main" id="{BCC2C76E-42A3-499A-8D60-41ED99D9FA9E}"/>
               </a:ext>
             </a:extLst>
           </p:cNvPr>
@@ -3345,7 +3345,7 @@
           <p:cNvPr id="3" name="s11-title">
             <a:extLst xmlns:a="http://schemas.openxmlformats.org/drawingml/2006/main">
               <a:ext uri="{FF2B5EF4-FFF2-40B4-BE49-F238E27FC236}">
-                <a16:creationId xmlns:a16="http://schemas.microsoft.com/office/drawing/2014/main" id="{0752CD0A-6262-406F-BF73-1EBABF03D7D4}"/>
+                <a16:creationId xmlns:a16="http://schemas.microsoft.com/office/drawing/2014/main" id="{C8BF3063-527E-4648-BF79-E3B10E9FA3A0}"/>
               </a:ext>
             </a:extLst>
           </p:cNvPr>
@@ -3393,7 +3393,7 @@
                 <a:ea typeface="PingFang SC"/>
                 <a:cs typeface="PingFang SC"/>
               </a:rPr>
-              <a:t>带走三条可复用的判断原则</a:t>
+              <a:t>多智能体协作：判断时先抓住三点</a:t>
             </a:r>
           </a:p>
         </p:txBody>
@@ -3403,7 +3403,7 @@
           <p:cNvPr id="4" name="s11-footer">
             <a:extLst xmlns:a="http://schemas.openxmlformats.org/drawingml/2006/main">
               <a:ext uri="{FF2B5EF4-FFF2-40B4-BE49-F238E27FC236}">
-                <a16:creationId xmlns:a16="http://schemas.microsoft.com/office/drawing/2014/main" id="{1CB5F376-FBED-4A87-9493-BF1AFFE8A505}"/>
+                <a16:creationId xmlns:a16="http://schemas.microsoft.com/office/drawing/2014/main" id="{D466E53D-1367-450F-909C-498E27B00B1F}"/>
               </a:ext>
             </a:extLst>
           </p:cNvPr>
@@ -3434,7 +3434,7 @@
           <p:cNvPr id="5" name="s11-identity">
             <a:extLst xmlns:a="http://schemas.openxmlformats.org/drawingml/2006/main">
               <a:ext uri="{FF2B5EF4-FFF2-40B4-BE49-F238E27FC236}">
-                <a16:creationId xmlns:a16="http://schemas.microsoft.com/office/drawing/2014/main" id="{13156D01-47E4-49BD-87B0-EEA9A9AD64B3}"/>
+                <a16:creationId xmlns:a16="http://schemas.microsoft.com/office/drawing/2014/main" id="{65570866-CE16-4171-B38D-24C4BF5DB509}"/>
               </a:ext>
             </a:extLst>
           </p:cNvPr>
@@ -3492,7 +3492,7 @@
           <p:cNvPr id="6" name="recap-circle-0">
             <a:extLst xmlns:a="http://schemas.openxmlformats.org/drawingml/2006/main">
               <a:ext uri="{FF2B5EF4-FFF2-40B4-BE49-F238E27FC236}">
-                <a16:creationId xmlns:a16="http://schemas.microsoft.com/office/drawing/2014/main" id="{C721E744-3933-4104-877F-BDDA60DDDB1A}"/>
+                <a16:creationId xmlns:a16="http://schemas.microsoft.com/office/drawing/2014/main" id="{7BAAB69C-5714-4630-A204-C24D10EED94A}"/>
               </a:ext>
             </a:extLst>
           </p:cNvPr>
@@ -3525,7 +3525,7 @@
           <p:cNvPr id="7" name="recap-number-0">
             <a:extLst xmlns:a="http://schemas.openxmlformats.org/drawingml/2006/main">
               <a:ext uri="{FF2B5EF4-FFF2-40B4-BE49-F238E27FC236}">
-                <a16:creationId xmlns:a16="http://schemas.microsoft.com/office/drawing/2014/main" id="{B0A78835-2E66-4734-A775-16802184A048}"/>
+                <a16:creationId xmlns:a16="http://schemas.microsoft.com/office/drawing/2014/main" id="{01D59162-6381-430C-B28A-FDBF3B591806}"/>
               </a:ext>
             </a:extLst>
           </p:cNvPr>
@@ -3583,7 +3583,7 @@
           <p:cNvPr id="8" name="recap-item-0">
             <a:extLst xmlns:a="http://schemas.openxmlformats.org/drawingml/2006/main">
               <a:ext uri="{FF2B5EF4-FFF2-40B4-BE49-F238E27FC236}">
-                <a16:creationId xmlns:a16="http://schemas.microsoft.com/office/drawing/2014/main" id="{2FC8C2F6-320A-4D1A-9D9C-6A948E0B440B}"/>
+                <a16:creationId xmlns:a16="http://schemas.microsoft.com/office/drawing/2014/main" id="{8250C9E1-B4C1-48C3-BD1D-4422C6DBD2F3}"/>
               </a:ext>
             </a:extLst>
           </p:cNvPr>
@@ -3637,7 +3637,7 @@
                 <a:ea typeface="PingFang SC"/>
                 <a:cs typeface="PingFang SC"/>
               </a:rPr>
-              <a:t>何时值得拆分</a:t>
+              <a:t>可独立推进又需要合并的任务才值得拆分</a:t>
             </a:r>
           </a:p>
         </p:txBody>
@@ -3647,7 +3647,7 @@
           <p:cNvPr id="9" name="recap-connector-0">
             <a:extLst xmlns:a="http://schemas.openxmlformats.org/drawingml/2006/main">
               <a:ext uri="{FF2B5EF4-FFF2-40B4-BE49-F238E27FC236}">
-                <a16:creationId xmlns:a16="http://schemas.microsoft.com/office/drawing/2014/main" id="{8AF6B503-4EE4-4358-A05F-F887A2B8604C}"/>
+                <a16:creationId xmlns:a16="http://schemas.microsoft.com/office/drawing/2014/main" id="{ACDF3A5E-26ED-426B-B6AC-6606405EA624}"/>
               </a:ext>
             </a:extLst>
           </p:cNvPr>
@@ -3667,7 +3667,7 @@
           <a:noFill xmlns:a="http://schemas.openxmlformats.org/drawingml/2006/main"/>
           <a:ln xmlns:a="http://schemas.openxmlformats.org/drawingml/2006/main" w="28575">
             <a:solidFill>
-              <a:srgbClr val="17A6C8"/>
+              <a:srgbClr val="006B80"/>
             </a:solidFill>
             <a:prstDash val="solid"/>
           </a:ln>
@@ -3678,7 +3678,7 @@
           <p:cNvPr id="10" name="recap-circle-1">
             <a:extLst xmlns:a="http://schemas.openxmlformats.org/drawingml/2006/main">
               <a:ext uri="{FF2B5EF4-FFF2-40B4-BE49-F238E27FC236}">
-                <a16:creationId xmlns:a16="http://schemas.microsoft.com/office/drawing/2014/main" id="{04506737-FE7E-48C5-A076-F1188E204D93}"/>
+                <a16:creationId xmlns:a16="http://schemas.microsoft.com/office/drawing/2014/main" id="{82AC343D-FAD5-4CA1-B1D6-E68CC1106EDA}"/>
               </a:ext>
             </a:extLst>
           </p:cNvPr>
@@ -3711,7 +3711,7 @@
           <p:cNvPr id="11" name="recap-number-1">
             <a:extLst xmlns:a="http://schemas.openxmlformats.org/drawingml/2006/main">
               <a:ext uri="{FF2B5EF4-FFF2-40B4-BE49-F238E27FC236}">
-                <a16:creationId xmlns:a16="http://schemas.microsoft.com/office/drawing/2014/main" id="{882479B7-E195-4E3C-A079-DB4E189C9ED8}"/>
+                <a16:creationId xmlns:a16="http://schemas.microsoft.com/office/drawing/2014/main" id="{30BC2339-F47C-42AD-9F12-1B90DA6C35D2}"/>
               </a:ext>
             </a:extLst>
           </p:cNvPr>
@@ -3769,7 +3769,7 @@
           <p:cNvPr id="12" name="recap-item-1">
             <a:extLst xmlns:a="http://schemas.openxmlformats.org/drawingml/2006/main">
               <a:ext uri="{FF2B5EF4-FFF2-40B4-BE49-F238E27FC236}">
-                <a16:creationId xmlns:a16="http://schemas.microsoft.com/office/drawing/2014/main" id="{C2C512EE-74C2-4EC2-A18F-543CCB69685B}"/>
+                <a16:creationId xmlns:a16="http://schemas.microsoft.com/office/drawing/2014/main" id="{ECE45218-CCD7-44DC-A1D4-D232979B47ED}"/>
               </a:ext>
             </a:extLst>
           </p:cNvPr>
@@ -3823,7 +3823,7 @@
                 <a:ea typeface="PingFang SC"/>
                 <a:cs typeface="PingFang SC"/>
               </a:rPr>
-              <a:t>一次合格交接应包含</a:t>
+              <a:t>合格交接必须带上证据、阻塞与下一步</a:t>
             </a:r>
           </a:p>
         </p:txBody>
@@ -3833,7 +3833,7 @@
           <p:cNvPr id="13" name="recap-connector-1">
             <a:extLst xmlns:a="http://schemas.openxmlformats.org/drawingml/2006/main">
               <a:ext uri="{FF2B5EF4-FFF2-40B4-BE49-F238E27FC236}">
-                <a16:creationId xmlns:a16="http://schemas.microsoft.com/office/drawing/2014/main" id="{E4A33914-9F7A-4D4F-B6E1-42B553EFBF6E}"/>
+                <a16:creationId xmlns:a16="http://schemas.microsoft.com/office/drawing/2014/main" id="{1D1163DA-48A2-433B-B699-2C15C87666AC}"/>
               </a:ext>
             </a:extLst>
           </p:cNvPr>
@@ -3853,7 +3853,7 @@
           <a:noFill xmlns:a="http://schemas.openxmlformats.org/drawingml/2006/main"/>
           <a:ln xmlns:a="http://schemas.openxmlformats.org/drawingml/2006/main" w="28575">
             <a:solidFill>
-              <a:srgbClr val="17A6C8"/>
+              <a:srgbClr val="006B80"/>
             </a:solidFill>
             <a:prstDash val="solid"/>
           </a:ln>
@@ -3864,7 +3864,7 @@
           <p:cNvPr id="14" name="recap-circle-2">
             <a:extLst xmlns:a="http://schemas.openxmlformats.org/drawingml/2006/main">
               <a:ext uri="{FF2B5EF4-FFF2-40B4-BE49-F238E27FC236}">
-                <a16:creationId xmlns:a16="http://schemas.microsoft.com/office/drawing/2014/main" id="{177645DA-AB3B-44AA-AA6D-D8F1619909B2}"/>
+                <a16:creationId xmlns:a16="http://schemas.microsoft.com/office/drawing/2014/main" id="{DE6088C5-7895-410E-B461-17B6D26CC63A}"/>
               </a:ext>
             </a:extLst>
           </p:cNvPr>
@@ -3882,7 +3882,7 @@
             <a:avLst/>
           </a:prstGeom>
           <a:solidFill xmlns:a="http://schemas.openxmlformats.org/drawingml/2006/main">
-            <a:srgbClr val="17A6C8"/>
+            <a:srgbClr val="006B80"/>
           </a:solidFill>
           <a:ln xmlns:a="http://schemas.openxmlformats.org/drawingml/2006/main" w="28575">
             <a:solidFill>
@@ -3897,7 +3897,7 @@
           <p:cNvPr id="15" name="recap-number-2">
             <a:extLst xmlns:a="http://schemas.openxmlformats.org/drawingml/2006/main">
               <a:ext uri="{FF2B5EF4-FFF2-40B4-BE49-F238E27FC236}">
-                <a16:creationId xmlns:a16="http://schemas.microsoft.com/office/drawing/2014/main" id="{AB1EF0B2-5486-4236-8649-E1C80C19039A}"/>
+                <a16:creationId xmlns:a16="http://schemas.microsoft.com/office/drawing/2014/main" id="{5F9655BD-3288-4121-ACC5-C90CECE5AE75}"/>
               </a:ext>
             </a:extLst>
           </p:cNvPr>
@@ -3955,7 +3955,7 @@
           <p:cNvPr id="16" name="recap-item-2">
             <a:extLst xmlns:a="http://schemas.openxmlformats.org/drawingml/2006/main">
               <a:ext uri="{FF2B5EF4-FFF2-40B4-BE49-F238E27FC236}">
-                <a16:creationId xmlns:a16="http://schemas.microsoft.com/office/drawing/2014/main" id="{38935A71-E83B-4A76-B2C0-30D839F350C1}"/>
+                <a16:creationId xmlns:a16="http://schemas.microsoft.com/office/drawing/2014/main" id="{88A5746C-92CC-4690-86E8-2650B0A4FF4E}"/>
               </a:ext>
             </a:extLst>
           </p:cNvPr>
@@ -3979,7 +3979,7 @@
           </a:solidFill>
           <a:ln xmlns:a="http://schemas.openxmlformats.org/drawingml/2006/main" w="19050">
             <a:solidFill>
-              <a:srgbClr val="17A6C8"/>
+              <a:srgbClr val="006B80"/>
             </a:solidFill>
             <a:prstDash val="solid"/>
           </a:ln>
@@ -4009,7 +4009,7 @@
                 <a:ea typeface="PingFang SC"/>
                 <a:cs typeface="PingFang SC"/>
               </a:rPr>
-              <a:t>人应被安排在判断价值最高的位置，而不是在任务结束后被迫通读全部记录</a:t>
+              <a:t>人工应集中在目标、冲突与高风险判断</a:t>
             </a:r>
           </a:p>
         </p:txBody>
@@ -4017,7 +4017,7 @@
     </p:spTree>
     <p:extLst>
       <p:ext uri="{BB962C8B-B14F-4D97-AF65-F5344CB8AC3E}">
-        <p14:creationId xmlns:p14="http://schemas.microsoft.com/office/powerpoint/2010/main" val="1493127199"/>
+        <p14:creationId xmlns:p14="http://schemas.microsoft.com/office/powerpoint/2010/main" val="2041708223"/>
       </p:ext>
     </p:extLst>
   </p:cSld>
@@ -4048,7 +4048,7 @@
           <p:cNvPr id="1" name="s12-rule">
             <a:extLst xmlns:a="http://schemas.openxmlformats.org/drawingml/2006/main">
               <a:ext uri="{FF2B5EF4-FFF2-40B4-BE49-F238E27FC236}">
-                <a16:creationId xmlns:a16="http://schemas.microsoft.com/office/drawing/2014/main" id="{368E92AF-8C25-48F2-8512-32C1ECBA0F71}"/>
+                <a16:creationId xmlns:a16="http://schemas.microsoft.com/office/drawing/2014/main" id="{878F6390-7B56-4FB6-B570-B6C9BFF3E710}"/>
               </a:ext>
             </a:extLst>
           </p:cNvPr>
@@ -4081,7 +4081,7 @@
           <p:cNvPr id="2" name="s12-eyebrow">
             <a:extLst xmlns:a="http://schemas.openxmlformats.org/drawingml/2006/main">
               <a:ext uri="{FF2B5EF4-FFF2-40B4-BE49-F238E27FC236}">
-                <a16:creationId xmlns:a16="http://schemas.microsoft.com/office/drawing/2014/main" id="{8951AC1C-321F-4C49-9F08-4F21650A5739}"/>
+                <a16:creationId xmlns:a16="http://schemas.microsoft.com/office/drawing/2014/main" id="{36EBCB7A-DBDF-43AE-B564-B0D2999F1B02}"/>
               </a:ext>
             </a:extLst>
           </p:cNvPr>
@@ -4139,7 +4139,7 @@
           <p:cNvPr id="3" name="s12-title">
             <a:extLst xmlns:a="http://schemas.openxmlformats.org/drawingml/2006/main">
               <a:ext uri="{FF2B5EF4-FFF2-40B4-BE49-F238E27FC236}">
-                <a16:creationId xmlns:a16="http://schemas.microsoft.com/office/drawing/2014/main" id="{8C763530-E048-45BC-BE15-A84A742AC25C}"/>
+                <a16:creationId xmlns:a16="http://schemas.microsoft.com/office/drawing/2014/main" id="{D519B7A2-DF15-4E97-90BF-94AF200C5DBC}"/>
               </a:ext>
             </a:extLst>
           </p:cNvPr>
@@ -4187,7 +4187,7 @@
                 <a:ea typeface="PingFang SC"/>
                 <a:cs typeface="PingFang SC"/>
               </a:rPr>
-              <a:t>从公开重制课件回到可核对的学习资料</a:t>
+              <a:t>多智能体协作：依据、边界与延伸</a:t>
             </a:r>
           </a:p>
         </p:txBody>
@@ -4197,7 +4197,7 @@
           <p:cNvPr id="4" name="s12-footer">
             <a:extLst xmlns:a="http://schemas.openxmlformats.org/drawingml/2006/main">
               <a:ext uri="{FF2B5EF4-FFF2-40B4-BE49-F238E27FC236}">
-                <a16:creationId xmlns:a16="http://schemas.microsoft.com/office/drawing/2014/main" id="{56FE67D9-6D58-4A43-B273-D822DA89C63E}"/>
+                <a16:creationId xmlns:a16="http://schemas.microsoft.com/office/drawing/2014/main" id="{FD794E89-C3CA-49C5-AC8F-FBBBA7B0416C}"/>
               </a:ext>
             </a:extLst>
           </p:cNvPr>
@@ -4228,7 +4228,7 @@
           <p:cNvPr id="5" name="s12-identity">
             <a:extLst xmlns:a="http://schemas.openxmlformats.org/drawingml/2006/main">
               <a:ext uri="{FF2B5EF4-FFF2-40B4-BE49-F238E27FC236}">
-                <a16:creationId xmlns:a16="http://schemas.microsoft.com/office/drawing/2014/main" id="{8DBABFBA-2509-4434-86AC-E55D2153C948}"/>
+                <a16:creationId xmlns:a16="http://schemas.microsoft.com/office/drawing/2014/main" id="{2249BED8-AD74-45B2-A783-BDA82C56935A}"/>
               </a:ext>
             </a:extLst>
           </p:cNvPr>
@@ -4286,7 +4286,7 @@
           <p:cNvPr id="6" name="source-0">
             <a:extLst xmlns:a="http://schemas.openxmlformats.org/drawingml/2006/main">
               <a:ext uri="{FF2B5EF4-FFF2-40B4-BE49-F238E27FC236}">
-                <a16:creationId xmlns:a16="http://schemas.microsoft.com/office/drawing/2014/main" id="{4F292D4C-E508-40CE-8A10-9FC64F6CEEC7}"/>
+                <a16:creationId xmlns:a16="http://schemas.microsoft.com/office/drawing/2014/main" id="{68F603D7-8420-4A72-940E-0631B353AF4D}"/>
               </a:ext>
             </a:extLst>
           </p:cNvPr>
@@ -4310,7 +4310,7 @@
           </a:solidFill>
           <a:ln xmlns:a="http://schemas.openxmlformats.org/drawingml/2006/main" w="9525">
             <a:solidFill>
-              <a:srgbClr val="17A6C8"/>
+              <a:srgbClr val="006B80"/>
             </a:solidFill>
             <a:prstDash val="solid"/>
           </a:ln>
@@ -4350,7 +4350,7 @@
           <p:cNvPr id="7" name="source-1">
             <a:extLst xmlns:a="http://schemas.openxmlformats.org/drawingml/2006/main">
               <a:ext uri="{FF2B5EF4-FFF2-40B4-BE49-F238E27FC236}">
-                <a16:creationId xmlns:a16="http://schemas.microsoft.com/office/drawing/2014/main" id="{C0EC0778-EF1D-4A2F-83FD-BBF927BCB32A}"/>
+                <a16:creationId xmlns:a16="http://schemas.microsoft.com/office/drawing/2014/main" id="{AB6BEED8-8C19-405B-AD5D-7AB9B40794E8}"/>
               </a:ext>
             </a:extLst>
           </p:cNvPr>
@@ -4414,7 +4414,7 @@
           <p:cNvPr id="8" name="s12-takeaway-rule">
             <a:extLst xmlns:a="http://schemas.openxmlformats.org/drawingml/2006/main">
               <a:ext uri="{FF2B5EF4-FFF2-40B4-BE49-F238E27FC236}">
-                <a16:creationId xmlns:a16="http://schemas.microsoft.com/office/drawing/2014/main" id="{CC36DE16-274D-4092-9357-8A849E6D852A}"/>
+                <a16:creationId xmlns:a16="http://schemas.microsoft.com/office/drawing/2014/main" id="{6BD3C839-2C5D-40DA-88FC-AFCD47097243}"/>
               </a:ext>
             </a:extLst>
           </p:cNvPr>
@@ -4447,7 +4447,7 @@
           <p:cNvPr id="9" name="s12-takeaway">
             <a:extLst xmlns:a="http://schemas.openxmlformats.org/drawingml/2006/main">
               <a:ext uri="{FF2B5EF4-FFF2-40B4-BE49-F238E27FC236}">
-                <a16:creationId xmlns:a16="http://schemas.microsoft.com/office/drawing/2014/main" id="{3EA35ED5-FAC7-443A-9D14-87C321632851}"/>
+                <a16:creationId xmlns:a16="http://schemas.microsoft.com/office/drawing/2014/main" id="{0187AE5E-A91A-49F8-BCA2-20A6360CB9FD}"/>
               </a:ext>
             </a:extLst>
           </p:cNvPr>
@@ -4503,7 +4503,7 @@
     </p:spTree>
     <p:extLst>
       <p:ext uri="{BB962C8B-B14F-4D97-AF65-F5344CB8AC3E}">
-        <p14:creationId xmlns:p14="http://schemas.microsoft.com/office/powerpoint/2010/main" val="1305863534"/>
+        <p14:creationId xmlns:p14="http://schemas.microsoft.com/office/powerpoint/2010/main" val="345105269"/>
       </p:ext>
     </p:extLst>
   </p:cSld>
@@ -4534,7 +4534,7 @@
           <p:cNvPr id="1" name="s2-rule">
             <a:extLst xmlns:a="http://schemas.openxmlformats.org/drawingml/2006/main">
               <a:ext uri="{FF2B5EF4-FFF2-40B4-BE49-F238E27FC236}">
-                <a16:creationId xmlns:a16="http://schemas.microsoft.com/office/drawing/2014/main" id="{4F39488D-9D73-4291-AF7F-CC41C69DDD04}"/>
+                <a16:creationId xmlns:a16="http://schemas.microsoft.com/office/drawing/2014/main" id="{428375CE-67D4-4E37-A354-59C8977C45C7}"/>
               </a:ext>
             </a:extLst>
           </p:cNvPr>
@@ -4567,7 +4567,7 @@
           <p:cNvPr id="2" name="s2-eyebrow">
             <a:extLst xmlns:a="http://schemas.openxmlformats.org/drawingml/2006/main">
               <a:ext uri="{FF2B5EF4-FFF2-40B4-BE49-F238E27FC236}">
-                <a16:creationId xmlns:a16="http://schemas.microsoft.com/office/drawing/2014/main" id="{325522E3-DDCD-4CD6-843D-B44EE1CA182D}"/>
+                <a16:creationId xmlns:a16="http://schemas.microsoft.com/office/drawing/2014/main" id="{AD10E74B-9D2F-4AF8-8B0E-B1E67276338E}"/>
               </a:ext>
             </a:extLst>
           </p:cNvPr>
@@ -4625,7 +4625,7 @@
           <p:cNvPr id="3" name="s2-title">
             <a:extLst xmlns:a="http://schemas.openxmlformats.org/drawingml/2006/main">
               <a:ext uri="{FF2B5EF4-FFF2-40B4-BE49-F238E27FC236}">
-                <a16:creationId xmlns:a16="http://schemas.microsoft.com/office/drawing/2014/main" id="{B489491F-99BB-4151-901D-063143C9281D}"/>
+                <a16:creationId xmlns:a16="http://schemas.microsoft.com/office/drawing/2014/main" id="{C966A8CB-7939-46AE-AAD1-E9749074A874}"/>
               </a:ext>
             </a:extLst>
           </p:cNvPr>
@@ -4673,7 +4673,7 @@
                 <a:ea typeface="PingFang SC"/>
                 <a:cs typeface="PingFang SC"/>
               </a:rPr>
-              <a:t>学完这一节，你能完成这些判断与行动</a:t>
+              <a:t>多智能体协作：4项学习结果</a:t>
             </a:r>
           </a:p>
         </p:txBody>
@@ -4683,7 +4683,7 @@
           <p:cNvPr id="4" name="s2-footer">
             <a:extLst xmlns:a="http://schemas.openxmlformats.org/drawingml/2006/main">
               <a:ext uri="{FF2B5EF4-FFF2-40B4-BE49-F238E27FC236}">
-                <a16:creationId xmlns:a16="http://schemas.microsoft.com/office/drawing/2014/main" id="{A6119209-EDEC-49B6-A4B6-23680555D27B}"/>
+                <a16:creationId xmlns:a16="http://schemas.microsoft.com/office/drawing/2014/main" id="{80FBBBFC-6EE1-4DF2-A6DB-693F6C6851E5}"/>
               </a:ext>
             </a:extLst>
           </p:cNvPr>
@@ -4714,7 +4714,7 @@
           <p:cNvPr id="5" name="s2-identity">
             <a:extLst xmlns:a="http://schemas.openxmlformats.org/drawingml/2006/main">
               <a:ext uri="{FF2B5EF4-FFF2-40B4-BE49-F238E27FC236}">
-                <a16:creationId xmlns:a16="http://schemas.microsoft.com/office/drawing/2014/main" id="{C4CD3EEE-5F9F-44A9-8585-51D368461CB5}"/>
+                <a16:creationId xmlns:a16="http://schemas.microsoft.com/office/drawing/2014/main" id="{9A3D14A8-EB00-4C5A-9446-8E7D8334899E}"/>
               </a:ext>
             </a:extLst>
           </p:cNvPr>
@@ -4772,7 +4772,7 @@
           <p:cNvPr id="6" name="objective-1">
             <a:extLst xmlns:a="http://schemas.openxmlformats.org/drawingml/2006/main">
               <a:ext uri="{FF2B5EF4-FFF2-40B4-BE49-F238E27FC236}">
-                <a16:creationId xmlns:a16="http://schemas.microsoft.com/office/drawing/2014/main" id="{038FB4DD-2320-4669-B827-E09F4B0D67D3}"/>
+                <a16:creationId xmlns:a16="http://schemas.microsoft.com/office/drawing/2014/main" id="{6D71889D-3C68-48C5-8017-4DC7C68A4803}"/>
               </a:ext>
             </a:extLst>
           </p:cNvPr>
@@ -4859,7 +4859,7 @@
           <p:cNvPr id="7" name="objective-2">
             <a:extLst xmlns:a="http://schemas.openxmlformats.org/drawingml/2006/main">
               <a:ext uri="{FF2B5EF4-FFF2-40B4-BE49-F238E27FC236}">
-                <a16:creationId xmlns:a16="http://schemas.microsoft.com/office/drawing/2014/main" id="{7038B337-0613-4891-A6A1-9A52DD86CBEA}"/>
+                <a16:creationId xmlns:a16="http://schemas.microsoft.com/office/drawing/2014/main" id="{BDD97A43-0AF5-4EDB-92AE-838CA9F3ED4D}"/>
               </a:ext>
             </a:extLst>
           </p:cNvPr>
@@ -4946,7 +4946,7 @@
           <p:cNvPr id="8" name="objective-3">
             <a:extLst xmlns:a="http://schemas.openxmlformats.org/drawingml/2006/main">
               <a:ext uri="{FF2B5EF4-FFF2-40B4-BE49-F238E27FC236}">
-                <a16:creationId xmlns:a16="http://schemas.microsoft.com/office/drawing/2014/main" id="{7CDAB157-CB90-4D7B-98F9-5C56A79F8531}"/>
+                <a16:creationId xmlns:a16="http://schemas.microsoft.com/office/drawing/2014/main" id="{40A7F8AB-0BA7-4F1F-8055-92CF3A8A4167}"/>
               </a:ext>
             </a:extLst>
           </p:cNvPr>
@@ -5033,7 +5033,7 @@
           <p:cNvPr id="9" name="objective-4">
             <a:extLst xmlns:a="http://schemas.openxmlformats.org/drawingml/2006/main">
               <a:ext uri="{FF2B5EF4-FFF2-40B4-BE49-F238E27FC236}">
-                <a16:creationId xmlns:a16="http://schemas.microsoft.com/office/drawing/2014/main" id="{B6A60CB3-70B5-4ACC-8AD4-3EE3BD7B1A3B}"/>
+                <a16:creationId xmlns:a16="http://schemas.microsoft.com/office/drawing/2014/main" id="{76F4CB2E-AE3D-4CE6-A88D-4BF9A8756888}"/>
               </a:ext>
             </a:extLst>
           </p:cNvPr>
@@ -5057,7 +5057,7 @@
           </a:solidFill>
           <a:ln xmlns:a="http://schemas.openxmlformats.org/drawingml/2006/main" w="19050">
             <a:solidFill>
-              <a:srgbClr val="17A6C8"/>
+              <a:srgbClr val="006B80"/>
             </a:solidFill>
             <a:prstDash val="solid"/>
           </a:ln>
@@ -5118,7 +5118,7 @@
     </p:spTree>
     <p:extLst>
       <p:ext uri="{BB962C8B-B14F-4D97-AF65-F5344CB8AC3E}">
-        <p14:creationId xmlns:p14="http://schemas.microsoft.com/office/powerpoint/2010/main" val="1044529455"/>
+        <p14:creationId xmlns:p14="http://schemas.microsoft.com/office/powerpoint/2010/main" val="296120658"/>
       </p:ext>
     </p:extLst>
   </p:cSld>
@@ -5149,7 +5149,7 @@
           <p:cNvPr id="1" name="s3-rule">
             <a:extLst xmlns:a="http://schemas.openxmlformats.org/drawingml/2006/main">
               <a:ext uri="{FF2B5EF4-FFF2-40B4-BE49-F238E27FC236}">
-                <a16:creationId xmlns:a16="http://schemas.microsoft.com/office/drawing/2014/main" id="{D78AF2AA-54D4-4196-A081-69CB1366A5F9}"/>
+                <a16:creationId xmlns:a16="http://schemas.microsoft.com/office/drawing/2014/main" id="{2CEF9958-C4FE-4ECF-B694-5B20B569FD94}"/>
               </a:ext>
             </a:extLst>
           </p:cNvPr>
@@ -5182,7 +5182,7 @@
           <p:cNvPr id="2" name="s3-eyebrow">
             <a:extLst xmlns:a="http://schemas.openxmlformats.org/drawingml/2006/main">
               <a:ext uri="{FF2B5EF4-FFF2-40B4-BE49-F238E27FC236}">
-                <a16:creationId xmlns:a16="http://schemas.microsoft.com/office/drawing/2014/main" id="{1AEDBD52-FD8A-496E-8179-FC3C17E728DB}"/>
+                <a16:creationId xmlns:a16="http://schemas.microsoft.com/office/drawing/2014/main" id="{77E0947A-BB90-41B7-8563-D3F152144CED}"/>
               </a:ext>
             </a:extLst>
           </p:cNvPr>
@@ -5240,7 +5240,7 @@
           <p:cNvPr id="3" name="s3-title">
             <a:extLst xmlns:a="http://schemas.openxmlformats.org/drawingml/2006/main">
               <a:ext uri="{FF2B5EF4-FFF2-40B4-BE49-F238E27FC236}">
-                <a16:creationId xmlns:a16="http://schemas.microsoft.com/office/drawing/2014/main" id="{BDCB1563-F10D-4D65-92ED-0E56493CC802}"/>
+                <a16:creationId xmlns:a16="http://schemas.microsoft.com/office/drawing/2014/main" id="{E67DBD40-94CC-4ACE-8095-7425C98D0811}"/>
               </a:ext>
             </a:extLst>
           </p:cNvPr>
@@ -5288,7 +5288,7 @@
                 <a:ea typeface="PingFang SC"/>
                 <a:cs typeface="PingFang SC"/>
               </a:rPr>
-              <a:t>何时值得拆分</a:t>
+              <a:t>可独立推进又需要合并的任务才值得拆分</a:t>
             </a:r>
           </a:p>
         </p:txBody>
@@ -5298,7 +5298,7 @@
           <p:cNvPr id="4" name="s3-footer">
             <a:extLst xmlns:a="http://schemas.openxmlformats.org/drawingml/2006/main">
               <a:ext uri="{FF2B5EF4-FFF2-40B4-BE49-F238E27FC236}">
-                <a16:creationId xmlns:a16="http://schemas.microsoft.com/office/drawing/2014/main" id="{8D1BECEF-CEFC-4D5A-A61D-F96DC2B96331}"/>
+                <a16:creationId xmlns:a16="http://schemas.microsoft.com/office/drawing/2014/main" id="{462108E4-8B9E-41CE-9897-6CC3FF2E0AEC}"/>
               </a:ext>
             </a:extLst>
           </p:cNvPr>
@@ -5329,7 +5329,7 @@
           <p:cNvPr id="5" name="s3-identity">
             <a:extLst xmlns:a="http://schemas.openxmlformats.org/drawingml/2006/main">
               <a:ext uri="{FF2B5EF4-FFF2-40B4-BE49-F238E27FC236}">
-                <a16:creationId xmlns:a16="http://schemas.microsoft.com/office/drawing/2014/main" id="{39737BDC-80DA-4A5E-9FCB-8485AAE39FB5}"/>
+                <a16:creationId xmlns:a16="http://schemas.microsoft.com/office/drawing/2014/main" id="{BF337E07-1368-4FB7-871A-8CB8309379FE}"/>
               </a:ext>
             </a:extLst>
           </p:cNvPr>
@@ -5387,7 +5387,7 @@
           <p:cNvPr id="6" name="core-no-0">
             <a:extLst xmlns:a="http://schemas.openxmlformats.org/drawingml/2006/main">
               <a:ext uri="{FF2B5EF4-FFF2-40B4-BE49-F238E27FC236}">
-                <a16:creationId xmlns:a16="http://schemas.microsoft.com/office/drawing/2014/main" id="{543165FC-C89F-4BB9-B6D1-071C3D601104}"/>
+                <a16:creationId xmlns:a16="http://schemas.microsoft.com/office/drawing/2014/main" id="{3A5A43F2-6098-4A10-90C9-60248C12C7C7}"/>
               </a:ext>
             </a:extLst>
           </p:cNvPr>
@@ -5419,7 +5419,7 @@
             <a:pPr algn="l">
               <a:defRPr sz="2250" b="1">
                 <a:solidFill>
-                  <a:srgbClr val="17A6C8"/>
+                  <a:srgbClr val="006B80"/>
                 </a:solidFill>
                 <a:latin typeface="PingFang SC"/>
                 <a:ea typeface="PingFang SC"/>
@@ -5429,7 +5429,7 @@
             <a:r>
               <a:rPr sz="2250" b="1">
                 <a:solidFill>
-                  <a:srgbClr val="17A6C8"/>
+                  <a:srgbClr val="006B80"/>
                 </a:solidFill>
                 <a:latin typeface="PingFang SC"/>
                 <a:ea typeface="PingFang SC"/>
@@ -5445,7 +5445,7 @@
           <p:cNvPr id="7" name="core-label-0">
             <a:extLst xmlns:a="http://schemas.openxmlformats.org/drawingml/2006/main">
               <a:ext uri="{FF2B5EF4-FFF2-40B4-BE49-F238E27FC236}">
-                <a16:creationId xmlns:a16="http://schemas.microsoft.com/office/drawing/2014/main" id="{528E44FE-3B80-449D-A3B3-D3D7C22FB67C}"/>
+                <a16:creationId xmlns:a16="http://schemas.microsoft.com/office/drawing/2014/main" id="{D372F4AA-18DD-412C-B9CB-16E091520B61}"/>
               </a:ext>
             </a:extLst>
           </p:cNvPr>
@@ -5503,7 +5503,7 @@
           <p:cNvPr id="8" name="core-body-0">
             <a:extLst xmlns:a="http://schemas.openxmlformats.org/drawingml/2006/main">
               <a:ext uri="{FF2B5EF4-FFF2-40B4-BE49-F238E27FC236}">
-                <a16:creationId xmlns:a16="http://schemas.microsoft.com/office/drawing/2014/main" id="{F2A9E708-4779-449B-9AF6-C2421CDFEA08}"/>
+                <a16:creationId xmlns:a16="http://schemas.microsoft.com/office/drawing/2014/main" id="{3BEEECC0-53A5-4D2F-830E-6F9647398186}"/>
               </a:ext>
             </a:extLst>
           </p:cNvPr>
@@ -5527,7 +5527,7 @@
           </a:solidFill>
           <a:ln xmlns:a="http://schemas.openxmlformats.org/drawingml/2006/main" w="19050">
             <a:solidFill>
-              <a:srgbClr val="17A6C8"/>
+              <a:srgbClr val="006B80"/>
             </a:solidFill>
             <a:prstDash val="solid"/>
           </a:ln>
@@ -5567,7 +5567,7 @@
           <p:cNvPr id="9" name="core-no-1">
             <a:extLst xmlns:a="http://schemas.openxmlformats.org/drawingml/2006/main">
               <a:ext uri="{FF2B5EF4-FFF2-40B4-BE49-F238E27FC236}">
-                <a16:creationId xmlns:a16="http://schemas.microsoft.com/office/drawing/2014/main" id="{A72C21AA-D871-47BF-A648-8235E1D2D7A9}"/>
+                <a16:creationId xmlns:a16="http://schemas.microsoft.com/office/drawing/2014/main" id="{A08DFBD7-1AED-4105-B6FF-57E57517455D}"/>
               </a:ext>
             </a:extLst>
           </p:cNvPr>
@@ -5599,7 +5599,7 @@
             <a:pPr algn="l">
               <a:defRPr sz="2250" b="1">
                 <a:solidFill>
-                  <a:srgbClr val="17A6C8"/>
+                  <a:srgbClr val="006B80"/>
                 </a:solidFill>
                 <a:latin typeface="PingFang SC"/>
                 <a:ea typeface="PingFang SC"/>
@@ -5609,7 +5609,7 @@
             <a:r>
               <a:rPr sz="2250" b="1">
                 <a:solidFill>
-                  <a:srgbClr val="17A6C8"/>
+                  <a:srgbClr val="006B80"/>
                 </a:solidFill>
                 <a:latin typeface="PingFang SC"/>
                 <a:ea typeface="PingFang SC"/>
@@ -5625,7 +5625,7 @@
           <p:cNvPr id="10" name="core-label-1">
             <a:extLst xmlns:a="http://schemas.openxmlformats.org/drawingml/2006/main">
               <a:ext uri="{FF2B5EF4-FFF2-40B4-BE49-F238E27FC236}">
-                <a16:creationId xmlns:a16="http://schemas.microsoft.com/office/drawing/2014/main" id="{40168DE4-8ED4-4C43-A254-91F6713CC1D1}"/>
+                <a16:creationId xmlns:a16="http://schemas.microsoft.com/office/drawing/2014/main" id="{75586ECA-1E22-45B0-8BF0-D98539C9061F}"/>
               </a:ext>
             </a:extLst>
           </p:cNvPr>
@@ -5683,7 +5683,7 @@
           <p:cNvPr id="11" name="core-body-1">
             <a:extLst xmlns:a="http://schemas.openxmlformats.org/drawingml/2006/main">
               <a:ext uri="{FF2B5EF4-FFF2-40B4-BE49-F238E27FC236}">
-                <a16:creationId xmlns:a16="http://schemas.microsoft.com/office/drawing/2014/main" id="{66BE2922-1F39-499A-B219-A7BD88C0C23F}"/>
+                <a16:creationId xmlns:a16="http://schemas.microsoft.com/office/drawing/2014/main" id="{6825B548-DEC1-4A5A-B09D-3D4E274B65E4}"/>
               </a:ext>
             </a:extLst>
           </p:cNvPr>
@@ -5737,7 +5737,7 @@
                 <a:ea typeface="PingFang SC"/>
                 <a:cs typeface="PingFang SC"/>
               </a:rPr>
-              <a:t>以下任务更适合单智能体或确定性工作流：任务很短；步骤强依赖且必须严格串行；共享状态每一步都在变化；最终产物需要持续保持统一文风或同一设计判断；错误成本很高而又缺少统一审阅…</a:t>
+              <a:t>以下任务更适合单智能体或确定性工作流；任务很短，步骤强依赖且必须严格串行；共享状态每一步都在变化；最终产物需要持续保持统一文风或同一设计判断；错误成本很高而又缺少统一审阅</a:t>
             </a:r>
           </a:p>
         </p:txBody>
@@ -5747,7 +5747,7 @@
           <p:cNvPr id="12" name="s3-takeaway-rule">
             <a:extLst xmlns:a="http://schemas.openxmlformats.org/drawingml/2006/main">
               <a:ext uri="{FF2B5EF4-FFF2-40B4-BE49-F238E27FC236}">
-                <a16:creationId xmlns:a16="http://schemas.microsoft.com/office/drawing/2014/main" id="{84DD1953-EB8A-4FC3-A37A-479395B95D7A}"/>
+                <a16:creationId xmlns:a16="http://schemas.microsoft.com/office/drawing/2014/main" id="{7E444806-B4F5-48E1-A266-219D35BCBA2E}"/>
               </a:ext>
             </a:extLst>
           </p:cNvPr>
@@ -5780,7 +5780,7 @@
           <p:cNvPr id="13" name="s3-takeaway">
             <a:extLst xmlns:a="http://schemas.openxmlformats.org/drawingml/2006/main">
               <a:ext uri="{FF2B5EF4-FFF2-40B4-BE49-F238E27FC236}">
-                <a16:creationId xmlns:a16="http://schemas.microsoft.com/office/drawing/2014/main" id="{B17959FB-7AA3-47B5-8ED1-725687A54918}"/>
+                <a16:creationId xmlns:a16="http://schemas.microsoft.com/office/drawing/2014/main" id="{FAD144E0-13F0-4750-8356-132C6F5D2EBC}"/>
               </a:ext>
             </a:extLst>
           </p:cNvPr>
@@ -5828,7 +5828,7 @@
                 <a:ea typeface="PingFang SC"/>
                 <a:cs typeface="PingFang SC"/>
               </a:rPr>
-              <a:t>何时值得拆分</a:t>
+              <a:t>可独立推进又需要合并的任务才值得拆分</a:t>
             </a:r>
           </a:p>
         </p:txBody>
@@ -5836,7 +5836,7 @@
     </p:spTree>
     <p:extLst>
       <p:ext uri="{BB962C8B-B14F-4D97-AF65-F5344CB8AC3E}">
-        <p14:creationId xmlns:p14="http://schemas.microsoft.com/office/powerpoint/2010/main" val="987621604"/>
+        <p14:creationId xmlns:p14="http://schemas.microsoft.com/office/powerpoint/2010/main" val="345718247"/>
       </p:ext>
     </p:extLst>
   </p:cSld>
@@ -5867,7 +5867,7 @@
           <p:cNvPr id="1" name="s4-rule">
             <a:extLst xmlns:a="http://schemas.openxmlformats.org/drawingml/2006/main">
               <a:ext uri="{FF2B5EF4-FFF2-40B4-BE49-F238E27FC236}">
-                <a16:creationId xmlns:a16="http://schemas.microsoft.com/office/drawing/2014/main" id="{E26F406A-6C55-4910-9FC0-2337ED37E1F8}"/>
+                <a16:creationId xmlns:a16="http://schemas.microsoft.com/office/drawing/2014/main" id="{50819880-03E4-40E1-B340-60F09E2A72F6}"/>
               </a:ext>
             </a:extLst>
           </p:cNvPr>
@@ -5900,7 +5900,7 @@
           <p:cNvPr id="2" name="s4-eyebrow">
             <a:extLst xmlns:a="http://schemas.openxmlformats.org/drawingml/2006/main">
               <a:ext uri="{FF2B5EF4-FFF2-40B4-BE49-F238E27FC236}">
-                <a16:creationId xmlns:a16="http://schemas.microsoft.com/office/drawing/2014/main" id="{FBFB3052-BCC4-4A96-A526-F3867055C7A0}"/>
+                <a16:creationId xmlns:a16="http://schemas.microsoft.com/office/drawing/2014/main" id="{A8DA5D1A-1FC2-459E-ADEA-CE7A0AA72B3B}"/>
               </a:ext>
             </a:extLst>
           </p:cNvPr>
@@ -5958,7 +5958,7 @@
           <p:cNvPr id="3" name="s4-title">
             <a:extLst xmlns:a="http://schemas.openxmlformats.org/drawingml/2006/main">
               <a:ext uri="{FF2B5EF4-FFF2-40B4-BE49-F238E27FC236}">
-                <a16:creationId xmlns:a16="http://schemas.microsoft.com/office/drawing/2014/main" id="{A7A1F940-1026-40BB-9FC4-3ABC3B605D47}"/>
+                <a16:creationId xmlns:a16="http://schemas.microsoft.com/office/drawing/2014/main" id="{A503D7C5-92B7-4485-9603-8A908289CEDF}"/>
               </a:ext>
             </a:extLst>
           </p:cNvPr>
@@ -6006,7 +6006,7 @@
                 <a:ea typeface="PingFang SC"/>
                 <a:cs typeface="PingFang SC"/>
               </a:rPr>
-              <a:t>角色定义至少包含六项</a:t>
+              <a:t>角色责任与共享状态共同决定协作质量</a:t>
             </a:r>
           </a:p>
         </p:txBody>
@@ -6016,7 +6016,7 @@
           <p:cNvPr id="4" name="s4-footer">
             <a:extLst xmlns:a="http://schemas.openxmlformats.org/drawingml/2006/main">
               <a:ext uri="{FF2B5EF4-FFF2-40B4-BE49-F238E27FC236}">
-                <a16:creationId xmlns:a16="http://schemas.microsoft.com/office/drawing/2014/main" id="{C175410E-BEE7-4FB5-99D7-24515604BFDD}"/>
+                <a16:creationId xmlns:a16="http://schemas.microsoft.com/office/drawing/2014/main" id="{13BBA488-6342-42DC-9AE3-55129304E7EA}"/>
               </a:ext>
             </a:extLst>
           </p:cNvPr>
@@ -6047,7 +6047,7 @@
           <p:cNvPr id="5" name="s4-identity">
             <a:extLst xmlns:a="http://schemas.openxmlformats.org/drawingml/2006/main">
               <a:ext uri="{FF2B5EF4-FFF2-40B4-BE49-F238E27FC236}">
-                <a16:creationId xmlns:a16="http://schemas.microsoft.com/office/drawing/2014/main" id="{919C7C90-B391-4616-84DF-A4FC02F92FC2}"/>
+                <a16:creationId xmlns:a16="http://schemas.microsoft.com/office/drawing/2014/main" id="{A39F8A92-492F-4390-98A7-C206CB45B4C7}"/>
               </a:ext>
             </a:extLst>
           </p:cNvPr>
@@ -6105,7 +6105,7 @@
           <p:cNvPr id="6" name="core-no-0">
             <a:extLst xmlns:a="http://schemas.openxmlformats.org/drawingml/2006/main">
               <a:ext uri="{FF2B5EF4-FFF2-40B4-BE49-F238E27FC236}">
-                <a16:creationId xmlns:a16="http://schemas.microsoft.com/office/drawing/2014/main" id="{6CF6EF28-EA23-4070-B95D-2B6E9E322AA0}"/>
+                <a16:creationId xmlns:a16="http://schemas.microsoft.com/office/drawing/2014/main" id="{B5927C18-F831-4811-9976-5B20FF34DFC9}"/>
               </a:ext>
             </a:extLst>
           </p:cNvPr>
@@ -6137,7 +6137,7 @@
             <a:pPr algn="l">
               <a:defRPr sz="2250" b="1">
                 <a:solidFill>
-                  <a:srgbClr val="17A6C8"/>
+                  <a:srgbClr val="006B80"/>
                 </a:solidFill>
                 <a:latin typeface="PingFang SC"/>
                 <a:ea typeface="PingFang SC"/>
@@ -6147,7 +6147,7 @@
             <a:r>
               <a:rPr sz="2250" b="1">
                 <a:solidFill>
-                  <a:srgbClr val="17A6C8"/>
+                  <a:srgbClr val="006B80"/>
                 </a:solidFill>
                 <a:latin typeface="PingFang SC"/>
                 <a:ea typeface="PingFang SC"/>
@@ -6163,7 +6163,7 @@
           <p:cNvPr id="7" name="core-label-0">
             <a:extLst xmlns:a="http://schemas.openxmlformats.org/drawingml/2006/main">
               <a:ext uri="{FF2B5EF4-FFF2-40B4-BE49-F238E27FC236}">
-                <a16:creationId xmlns:a16="http://schemas.microsoft.com/office/drawing/2014/main" id="{A154DDE8-6801-406C-88A3-87A0DE96B212}"/>
+                <a16:creationId xmlns:a16="http://schemas.microsoft.com/office/drawing/2014/main" id="{077C24CB-518F-47AA-A3DD-048BD65AF46D}"/>
               </a:ext>
             </a:extLst>
           </p:cNvPr>
@@ -6221,7 +6221,7 @@
           <p:cNvPr id="8" name="core-body-0">
             <a:extLst xmlns:a="http://schemas.openxmlformats.org/drawingml/2006/main">
               <a:ext uri="{FF2B5EF4-FFF2-40B4-BE49-F238E27FC236}">
-                <a16:creationId xmlns:a16="http://schemas.microsoft.com/office/drawing/2014/main" id="{93778B3A-5484-453E-AD50-84A7800C5B98}"/>
+                <a16:creationId xmlns:a16="http://schemas.microsoft.com/office/drawing/2014/main" id="{D9D1E987-EB39-4780-890F-F5C3C3DC0878}"/>
               </a:ext>
             </a:extLst>
           </p:cNvPr>
@@ -6245,7 +6245,7 @@
           </a:solidFill>
           <a:ln xmlns:a="http://schemas.openxmlformats.org/drawingml/2006/main" w="19050">
             <a:solidFill>
-              <a:srgbClr val="17A6C8"/>
+              <a:srgbClr val="006B80"/>
             </a:solidFill>
             <a:prstDash val="solid"/>
           </a:ln>
@@ -6275,7 +6275,7 @@
                 <a:ea typeface="PingFang SC"/>
                 <a:cs typeface="PingFang SC"/>
               </a:rPr>
-              <a:t>角色定义至少包含六项：目标、输入、允许使用的工具、输出格式、验收标准和禁止事项。常见角色可以包括</a:t>
+              <a:t>角色定义至少包含六项：目标、输入、允许使用的工具、输出格式、验收标准和禁止事项</a:t>
             </a:r>
           </a:p>
         </p:txBody>
@@ -6285,7 +6285,7 @@
           <p:cNvPr id="9" name="core-no-1">
             <a:extLst xmlns:a="http://schemas.openxmlformats.org/drawingml/2006/main">
               <a:ext uri="{FF2B5EF4-FFF2-40B4-BE49-F238E27FC236}">
-                <a16:creationId xmlns:a16="http://schemas.microsoft.com/office/drawing/2014/main" id="{5FC0EA60-E3EA-4212-A632-6EEBE8BC17A1}"/>
+                <a16:creationId xmlns:a16="http://schemas.microsoft.com/office/drawing/2014/main" id="{A9FCF347-C035-4EF8-AE4C-F4E8084C5CFF}"/>
               </a:ext>
             </a:extLst>
           </p:cNvPr>
@@ -6317,7 +6317,7 @@
             <a:pPr algn="l">
               <a:defRPr sz="2250" b="1">
                 <a:solidFill>
-                  <a:srgbClr val="17A6C8"/>
+                  <a:srgbClr val="006B80"/>
                 </a:solidFill>
                 <a:latin typeface="PingFang SC"/>
                 <a:ea typeface="PingFang SC"/>
@@ -6327,7 +6327,7 @@
             <a:r>
               <a:rPr sz="2250" b="1">
                 <a:solidFill>
-                  <a:srgbClr val="17A6C8"/>
+                  <a:srgbClr val="006B80"/>
                 </a:solidFill>
                 <a:latin typeface="PingFang SC"/>
                 <a:ea typeface="PingFang SC"/>
@@ -6343,7 +6343,7 @@
           <p:cNvPr id="10" name="core-label-1">
             <a:extLst xmlns:a="http://schemas.openxmlformats.org/drawingml/2006/main">
               <a:ext uri="{FF2B5EF4-FFF2-40B4-BE49-F238E27FC236}">
-                <a16:creationId xmlns:a16="http://schemas.microsoft.com/office/drawing/2014/main" id="{F5036081-B27E-407C-86B8-C55C222E4B22}"/>
+                <a16:creationId xmlns:a16="http://schemas.microsoft.com/office/drawing/2014/main" id="{2D079824-32A3-485C-BF9D-726936EBC736}"/>
               </a:ext>
             </a:extLst>
           </p:cNvPr>
@@ -6401,7 +6401,7 @@
           <p:cNvPr id="11" name="core-body-1">
             <a:extLst xmlns:a="http://schemas.openxmlformats.org/drawingml/2006/main">
               <a:ext uri="{FF2B5EF4-FFF2-40B4-BE49-F238E27FC236}">
-                <a16:creationId xmlns:a16="http://schemas.microsoft.com/office/drawing/2014/main" id="{FCF8B6FD-DAE8-44F8-A023-C55BE74E249F}"/>
+                <a16:creationId xmlns:a16="http://schemas.microsoft.com/office/drawing/2014/main" id="{BC14956A-9157-4870-80AF-4897553020D8}"/>
               </a:ext>
             </a:extLst>
           </p:cNvPr>
@@ -6455,7 +6455,7 @@
                 <a:ea typeface="PingFang SC"/>
                 <a:cs typeface="PingFang SC"/>
               </a:rPr>
-              <a:t>协作系统需要一份权威状态，记录任务目标、子任务、负责人、状态、输入版本、产物位置、证据、阻塞和依赖。状态值应少而明确，例如 pending 、 in progress…</a:t>
+              <a:t>协作系统需要一份权威状态；记录任务目标、子任务、负责人、状态、输入版本、产物位置、证据、阻塞和依赖</a:t>
             </a:r>
           </a:p>
         </p:txBody>
@@ -6465,7 +6465,7 @@
           <p:cNvPr id="12" name="s4-takeaway-rule">
             <a:extLst xmlns:a="http://schemas.openxmlformats.org/drawingml/2006/main">
               <a:ext uri="{FF2B5EF4-FFF2-40B4-BE49-F238E27FC236}">
-                <a16:creationId xmlns:a16="http://schemas.microsoft.com/office/drawing/2014/main" id="{C4573A8B-DFC2-4C2E-98BA-A1C905809A12}"/>
+                <a16:creationId xmlns:a16="http://schemas.microsoft.com/office/drawing/2014/main" id="{F4DD0A3A-CBBC-45F7-A8EF-26352C237A4C}"/>
               </a:ext>
             </a:extLst>
           </p:cNvPr>
@@ -6498,7 +6498,7 @@
           <p:cNvPr id="13" name="s4-takeaway">
             <a:extLst xmlns:a="http://schemas.openxmlformats.org/drawingml/2006/main">
               <a:ext uri="{FF2B5EF4-FFF2-40B4-BE49-F238E27FC236}">
-                <a16:creationId xmlns:a16="http://schemas.microsoft.com/office/drawing/2014/main" id="{C2F648FA-B6F0-4108-8333-841ACC07A1C3}"/>
+                <a16:creationId xmlns:a16="http://schemas.microsoft.com/office/drawing/2014/main" id="{8A9CEBC2-260E-4416-9000-653F587EDA10}"/>
               </a:ext>
             </a:extLst>
           </p:cNvPr>
@@ -6546,7 +6546,7 @@
                 <a:ea typeface="PingFang SC"/>
                 <a:cs typeface="PingFang SC"/>
               </a:rPr>
-              <a:t>角色定义至少包含六项</a:t>
+              <a:t>角色责任与共享状态共同决定协作质量</a:t>
             </a:r>
           </a:p>
         </p:txBody>
@@ -6554,7 +6554,7 @@
     </p:spTree>
     <p:extLst>
       <p:ext uri="{BB962C8B-B14F-4D97-AF65-F5344CB8AC3E}">
-        <p14:creationId xmlns:p14="http://schemas.microsoft.com/office/powerpoint/2010/main" val="548738504"/>
+        <p14:creationId xmlns:p14="http://schemas.microsoft.com/office/powerpoint/2010/main" val="277639443"/>
       </p:ext>
     </p:extLst>
   </p:cSld>
@@ -6585,7 +6585,7 @@
           <p:cNvPr id="1" name="s5-rule">
             <a:extLst xmlns:a="http://schemas.openxmlformats.org/drawingml/2006/main">
               <a:ext uri="{FF2B5EF4-FFF2-40B4-BE49-F238E27FC236}">
-                <a16:creationId xmlns:a16="http://schemas.microsoft.com/office/drawing/2014/main" id="{9142F968-A27B-4F41-80A9-E02B32462FF3}"/>
+                <a16:creationId xmlns:a16="http://schemas.microsoft.com/office/drawing/2014/main" id="{ADCD6F7A-B312-4447-9153-F799C71D972D}"/>
               </a:ext>
             </a:extLst>
           </p:cNvPr>
@@ -6618,7 +6618,7 @@
           <p:cNvPr id="2" name="s5-eyebrow">
             <a:extLst xmlns:a="http://schemas.openxmlformats.org/drawingml/2006/main">
               <a:ext uri="{FF2B5EF4-FFF2-40B4-BE49-F238E27FC236}">
-                <a16:creationId xmlns:a16="http://schemas.microsoft.com/office/drawing/2014/main" id="{15089D04-497E-46E7-A97B-6FCB59D6F2A9}"/>
+                <a16:creationId xmlns:a16="http://schemas.microsoft.com/office/drawing/2014/main" id="{58D7329F-506E-4090-BD21-418427AC8DF3}"/>
               </a:ext>
             </a:extLst>
           </p:cNvPr>
@@ -6676,7 +6676,7 @@
           <p:cNvPr id="3" name="s5-title">
             <a:extLst xmlns:a="http://schemas.openxmlformats.org/drawingml/2006/main">
               <a:ext uri="{FF2B5EF4-FFF2-40B4-BE49-F238E27FC236}">
-                <a16:creationId xmlns:a16="http://schemas.microsoft.com/office/drawing/2014/main" id="{90007D09-38A4-481E-BCDA-E478EAB3DFC8}"/>
+                <a16:creationId xmlns:a16="http://schemas.microsoft.com/office/drawing/2014/main" id="{4B2FB5FA-F275-4719-9AED-6D70AF282137}"/>
               </a:ext>
             </a:extLst>
           </p:cNvPr>
@@ -6724,7 +6724,7 @@
                 <a:ea typeface="PingFang SC"/>
                 <a:cs typeface="PingFang SC"/>
               </a:rPr>
-              <a:t>一次合格交接应包含</a:t>
+              <a:t>合格交接必须带上证据、阻塞与下一步</a:t>
             </a:r>
           </a:p>
         </p:txBody>
@@ -6734,7 +6734,7 @@
           <p:cNvPr id="4" name="s5-footer">
             <a:extLst xmlns:a="http://schemas.openxmlformats.org/drawingml/2006/main">
               <a:ext uri="{FF2B5EF4-FFF2-40B4-BE49-F238E27FC236}">
-                <a16:creationId xmlns:a16="http://schemas.microsoft.com/office/drawing/2014/main" id="{38F493FE-E259-4484-929D-1B7DBAFE49BD}"/>
+                <a16:creationId xmlns:a16="http://schemas.microsoft.com/office/drawing/2014/main" id="{63B0155C-F675-401A-AEB4-05F22A70C53A}"/>
               </a:ext>
             </a:extLst>
           </p:cNvPr>
@@ -6765,7 +6765,7 @@
           <p:cNvPr id="5" name="s5-identity">
             <a:extLst xmlns:a="http://schemas.openxmlformats.org/drawingml/2006/main">
               <a:ext uri="{FF2B5EF4-FFF2-40B4-BE49-F238E27FC236}">
-                <a16:creationId xmlns:a16="http://schemas.microsoft.com/office/drawing/2014/main" id="{ECCC58B1-ABD3-4347-B329-FCB613E49552}"/>
+                <a16:creationId xmlns:a16="http://schemas.microsoft.com/office/drawing/2014/main" id="{D559810D-2B55-4D56-85E4-11C834BB326B}"/>
               </a:ext>
             </a:extLst>
           </p:cNvPr>
@@ -6823,7 +6823,7 @@
           <p:cNvPr id="6" name="core-no-0">
             <a:extLst xmlns:a="http://schemas.openxmlformats.org/drawingml/2006/main">
               <a:ext uri="{FF2B5EF4-FFF2-40B4-BE49-F238E27FC236}">
-                <a16:creationId xmlns:a16="http://schemas.microsoft.com/office/drawing/2014/main" id="{EDC22E5F-F197-41C4-8240-2D9242FED7F7}"/>
+                <a16:creationId xmlns:a16="http://schemas.microsoft.com/office/drawing/2014/main" id="{55A9F49A-B9CA-4D79-BFAF-4131980EB6F0}"/>
               </a:ext>
             </a:extLst>
           </p:cNvPr>
@@ -6855,7 +6855,7 @@
             <a:pPr algn="l">
               <a:defRPr sz="2250" b="1">
                 <a:solidFill>
-                  <a:srgbClr val="17A6C8"/>
+                  <a:srgbClr val="006B80"/>
                 </a:solidFill>
                 <a:latin typeface="PingFang SC"/>
                 <a:ea typeface="PingFang SC"/>
@@ -6865,7 +6865,7 @@
             <a:r>
               <a:rPr sz="2250" b="1">
                 <a:solidFill>
-                  <a:srgbClr val="17A6C8"/>
+                  <a:srgbClr val="006B80"/>
                 </a:solidFill>
                 <a:latin typeface="PingFang SC"/>
                 <a:ea typeface="PingFang SC"/>
@@ -6881,7 +6881,7 @@
           <p:cNvPr id="7" name="core-label-0">
             <a:extLst xmlns:a="http://schemas.openxmlformats.org/drawingml/2006/main">
               <a:ext uri="{FF2B5EF4-FFF2-40B4-BE49-F238E27FC236}">
-                <a16:creationId xmlns:a16="http://schemas.microsoft.com/office/drawing/2014/main" id="{13D274BE-5DF1-4BD7-8680-5D3E526F9D75}"/>
+                <a16:creationId xmlns:a16="http://schemas.microsoft.com/office/drawing/2014/main" id="{7F28937C-D26D-4A2C-8B48-D974625F0939}"/>
               </a:ext>
             </a:extLst>
           </p:cNvPr>
@@ -6939,7 +6939,7 @@
           <p:cNvPr id="8" name="core-body-0">
             <a:extLst xmlns:a="http://schemas.openxmlformats.org/drawingml/2006/main">
               <a:ext uri="{FF2B5EF4-FFF2-40B4-BE49-F238E27FC236}">
-                <a16:creationId xmlns:a16="http://schemas.microsoft.com/office/drawing/2014/main" id="{3A69D493-3764-49F1-99D8-5E346D4DE173}"/>
+                <a16:creationId xmlns:a16="http://schemas.microsoft.com/office/drawing/2014/main" id="{9A6A41B2-904D-4768-A231-215035763BDC}"/>
               </a:ext>
             </a:extLst>
           </p:cNvPr>
@@ -6963,7 +6963,7 @@
           </a:solidFill>
           <a:ln xmlns:a="http://schemas.openxmlformats.org/drawingml/2006/main" w="19050">
             <a:solidFill>
-              <a:srgbClr val="17A6C8"/>
+              <a:srgbClr val="006B80"/>
             </a:solidFill>
             <a:prstDash val="solid"/>
           </a:ln>
@@ -7003,7 +7003,7 @@
           <p:cNvPr id="9" name="core-no-1">
             <a:extLst xmlns:a="http://schemas.openxmlformats.org/drawingml/2006/main">
               <a:ext uri="{FF2B5EF4-FFF2-40B4-BE49-F238E27FC236}">
-                <a16:creationId xmlns:a16="http://schemas.microsoft.com/office/drawing/2014/main" id="{A5558738-1BEC-42C4-A4D4-8A8F5DEE51CA}"/>
+                <a16:creationId xmlns:a16="http://schemas.microsoft.com/office/drawing/2014/main" id="{C75D5927-5AC5-4B1C-A7A4-E472362D176C}"/>
               </a:ext>
             </a:extLst>
           </p:cNvPr>
@@ -7035,7 +7035,7 @@
             <a:pPr algn="l">
               <a:defRPr sz="2250" b="1">
                 <a:solidFill>
-                  <a:srgbClr val="17A6C8"/>
+                  <a:srgbClr val="006B80"/>
                 </a:solidFill>
                 <a:latin typeface="PingFang SC"/>
                 <a:ea typeface="PingFang SC"/>
@@ -7045,7 +7045,7 @@
             <a:r>
               <a:rPr sz="2250" b="1">
                 <a:solidFill>
-                  <a:srgbClr val="17A6C8"/>
+                  <a:srgbClr val="006B80"/>
                 </a:solidFill>
                 <a:latin typeface="PingFang SC"/>
                 <a:ea typeface="PingFang SC"/>
@@ -7061,7 +7061,7 @@
           <p:cNvPr id="10" name="core-body-1">
             <a:extLst xmlns:a="http://schemas.openxmlformats.org/drawingml/2006/main">
               <a:ext uri="{FF2B5EF4-FFF2-40B4-BE49-F238E27FC236}">
-                <a16:creationId xmlns:a16="http://schemas.microsoft.com/office/drawing/2014/main" id="{1492ABC2-3957-48D4-B23B-C01515793928}"/>
+                <a16:creationId xmlns:a16="http://schemas.microsoft.com/office/drawing/2014/main" id="{97D5B884-CE71-47A6-B005-14BF6AFE36F3}"/>
               </a:ext>
             </a:extLst>
           </p:cNvPr>
@@ -7125,7 +7125,7 @@
           <p:cNvPr id="11" name="s5-takeaway-rule">
             <a:extLst xmlns:a="http://schemas.openxmlformats.org/drawingml/2006/main">
               <a:ext uri="{FF2B5EF4-FFF2-40B4-BE49-F238E27FC236}">
-                <a16:creationId xmlns:a16="http://schemas.microsoft.com/office/drawing/2014/main" id="{C76E6FBF-4B28-4328-AB35-122BEA81504C}"/>
+                <a16:creationId xmlns:a16="http://schemas.microsoft.com/office/drawing/2014/main" id="{0FD2F38B-4A54-443D-BF98-788CA310C63D}"/>
               </a:ext>
             </a:extLst>
           </p:cNvPr>
@@ -7158,7 +7158,7 @@
           <p:cNvPr id="12" name="s5-takeaway">
             <a:extLst xmlns:a="http://schemas.openxmlformats.org/drawingml/2006/main">
               <a:ext uri="{FF2B5EF4-FFF2-40B4-BE49-F238E27FC236}">
-                <a16:creationId xmlns:a16="http://schemas.microsoft.com/office/drawing/2014/main" id="{4B699B7F-D4CE-40DC-BD9C-B96D05401581}"/>
+                <a16:creationId xmlns:a16="http://schemas.microsoft.com/office/drawing/2014/main" id="{0EB8EFC5-3738-4D48-96C1-E856B55A1BF3}"/>
               </a:ext>
             </a:extLst>
           </p:cNvPr>
@@ -7206,7 +7206,7 @@
                 <a:ea typeface="PingFang SC"/>
                 <a:cs typeface="PingFang SC"/>
               </a:rPr>
-              <a:t>一次合格交接应包含</a:t>
+              <a:t>合格交接必须带上证据、阻塞与下一步</a:t>
             </a:r>
           </a:p>
         </p:txBody>
@@ -7214,7 +7214,7 @@
     </p:spTree>
     <p:extLst>
       <p:ext uri="{BB962C8B-B14F-4D97-AF65-F5344CB8AC3E}">
-        <p14:creationId xmlns:p14="http://schemas.microsoft.com/office/powerpoint/2010/main" val="358357150"/>
+        <p14:creationId xmlns:p14="http://schemas.microsoft.com/office/powerpoint/2010/main" val="930482828"/>
       </p:ext>
     </p:extLst>
   </p:cSld>
@@ -7245,7 +7245,7 @@
           <p:cNvPr id="1" name="s6-rule">
             <a:extLst xmlns:a="http://schemas.openxmlformats.org/drawingml/2006/main">
               <a:ext uri="{FF2B5EF4-FFF2-40B4-BE49-F238E27FC236}">
-                <a16:creationId xmlns:a16="http://schemas.microsoft.com/office/drawing/2014/main" id="{477E549C-CA1C-424E-B78D-97E3DD864D94}"/>
+                <a16:creationId xmlns:a16="http://schemas.microsoft.com/office/drawing/2014/main" id="{43A4F660-F13D-4898-82CE-AE1254810E4C}"/>
               </a:ext>
             </a:extLst>
           </p:cNvPr>
@@ -7278,7 +7278,7 @@
           <p:cNvPr id="2" name="s6-eyebrow">
             <a:extLst xmlns:a="http://schemas.openxmlformats.org/drawingml/2006/main">
               <a:ext uri="{FF2B5EF4-FFF2-40B4-BE49-F238E27FC236}">
-                <a16:creationId xmlns:a16="http://schemas.microsoft.com/office/drawing/2014/main" id="{557F25D2-AE9E-49BB-A057-9B14A746FCBF}"/>
+                <a16:creationId xmlns:a16="http://schemas.microsoft.com/office/drawing/2014/main" id="{0F1F23D2-F5A5-4275-AE63-2158E3E5B29B}"/>
               </a:ext>
             </a:extLst>
           </p:cNvPr>
@@ -7336,7 +7336,7 @@
           <p:cNvPr id="3" name="s6-title">
             <a:extLst xmlns:a="http://schemas.openxmlformats.org/drawingml/2006/main">
               <a:ext uri="{FF2B5EF4-FFF2-40B4-BE49-F238E27FC236}">
-                <a16:creationId xmlns:a16="http://schemas.microsoft.com/office/drawing/2014/main" id="{EB25B117-E0B6-4DD9-B577-EBE14D57EC4B}"/>
+                <a16:creationId xmlns:a16="http://schemas.microsoft.com/office/drawing/2014/main" id="{CCF4D067-2056-4DC9-901B-0D0F9E7384E7}"/>
               </a:ext>
             </a:extLst>
           </p:cNvPr>
@@ -7394,7 +7394,7 @@
           <p:cNvPr id="4" name="s6-footer">
             <a:extLst xmlns:a="http://schemas.openxmlformats.org/drawingml/2006/main">
               <a:ext uri="{FF2B5EF4-FFF2-40B4-BE49-F238E27FC236}">
-                <a16:creationId xmlns:a16="http://schemas.microsoft.com/office/drawing/2014/main" id="{E61A9882-DC82-4F66-8D49-5F537C3350B2}"/>
+                <a16:creationId xmlns:a16="http://schemas.microsoft.com/office/drawing/2014/main" id="{C351AB34-C39B-4469-B52E-EFD34165CFD9}"/>
               </a:ext>
             </a:extLst>
           </p:cNvPr>
@@ -7425,7 +7425,7 @@
           <p:cNvPr id="5" name="s6-identity">
             <a:extLst xmlns:a="http://schemas.openxmlformats.org/drawingml/2006/main">
               <a:ext uri="{FF2B5EF4-FFF2-40B4-BE49-F238E27FC236}">
-                <a16:creationId xmlns:a16="http://schemas.microsoft.com/office/drawing/2014/main" id="{9DB2615A-5C73-4592-B147-55780A2ED3B5}"/>
+                <a16:creationId xmlns:a16="http://schemas.microsoft.com/office/drawing/2014/main" id="{5D4033EC-D047-40E1-8543-2479C4E04315}"/>
               </a:ext>
             </a:extLst>
           </p:cNvPr>
@@ -7483,7 +7483,7 @@
           <p:cNvPr id="6" name="core-no-0">
             <a:extLst xmlns:a="http://schemas.openxmlformats.org/drawingml/2006/main">
               <a:ext uri="{FF2B5EF4-FFF2-40B4-BE49-F238E27FC236}">
-                <a16:creationId xmlns:a16="http://schemas.microsoft.com/office/drawing/2014/main" id="{FD86A2A9-C40C-4BD7-8C0F-E44E1A93B6A4}"/>
+                <a16:creationId xmlns:a16="http://schemas.microsoft.com/office/drawing/2014/main" id="{EBA5C5F6-CCD5-4B28-91BA-916F56A32FEA}"/>
               </a:ext>
             </a:extLst>
           </p:cNvPr>
@@ -7515,7 +7515,7 @@
             <a:pPr algn="l">
               <a:defRPr sz="2250" b="1">
                 <a:solidFill>
-                  <a:srgbClr val="17A6C8"/>
+                  <a:srgbClr val="006B80"/>
                 </a:solidFill>
                 <a:latin typeface="PingFang SC"/>
                 <a:ea typeface="PingFang SC"/>
@@ -7525,7 +7525,7 @@
             <a:r>
               <a:rPr sz="2250" b="1">
                 <a:solidFill>
-                  <a:srgbClr val="17A6C8"/>
+                  <a:srgbClr val="006B80"/>
                 </a:solidFill>
                 <a:latin typeface="PingFang SC"/>
                 <a:ea typeface="PingFang SC"/>
@@ -7541,7 +7541,7 @@
           <p:cNvPr id="7" name="core-label-0">
             <a:extLst xmlns:a="http://schemas.openxmlformats.org/drawingml/2006/main">
               <a:ext uri="{FF2B5EF4-FFF2-40B4-BE49-F238E27FC236}">
-                <a16:creationId xmlns:a16="http://schemas.microsoft.com/office/drawing/2014/main" id="{53BCDC78-2FBC-4647-BB5D-F3849379F0EA}"/>
+                <a16:creationId xmlns:a16="http://schemas.microsoft.com/office/drawing/2014/main" id="{04A043EE-507E-4FA5-9311-E040E7D3D838}"/>
               </a:ext>
             </a:extLst>
           </p:cNvPr>
@@ -7599,7 +7599,7 @@
           <p:cNvPr id="8" name="core-body-0">
             <a:extLst xmlns:a="http://schemas.openxmlformats.org/drawingml/2006/main">
               <a:ext uri="{FF2B5EF4-FFF2-40B4-BE49-F238E27FC236}">
-                <a16:creationId xmlns:a16="http://schemas.microsoft.com/office/drawing/2014/main" id="{8081E9B5-EA22-4AA3-BD92-1FB6A34D0F43}"/>
+                <a16:creationId xmlns:a16="http://schemas.microsoft.com/office/drawing/2014/main" id="{D7927E10-9F0B-4FD3-A172-BF3A98AEACEE}"/>
               </a:ext>
             </a:extLst>
           </p:cNvPr>
@@ -7623,7 +7623,7 @@
           </a:solidFill>
           <a:ln xmlns:a="http://schemas.openxmlformats.org/drawingml/2006/main" w="19050">
             <a:solidFill>
-              <a:srgbClr val="17A6C8"/>
+              <a:srgbClr val="006B80"/>
             </a:solidFill>
             <a:prstDash val="solid"/>
           </a:ln>
@@ -7653,7 +7653,7 @@
                 <a:ea typeface="PingFang SC"/>
                 <a:cs typeface="PingFang SC"/>
               </a:rPr>
-              <a:t>多个角色可能各自给出正确但互不兼容的结果。冲突应按预先定义的优先级处理：事实问题回到来源，功能问题回到测试，范围问题回到目标和约束，高风险决策交给责任人。不能简单采用“多数票”…</a:t>
+              <a:t>多个角色可能各自给出正确但互不兼容的结果；冲突应按预先定义的优先级处理；事实问题回到来源，功能问题回到测试；范围问题回到目标和约束；高风险决策交给责任人；不能简单采用“多数票”</a:t>
             </a:r>
           </a:p>
         </p:txBody>
@@ -7663,7 +7663,7 @@
           <p:cNvPr id="9" name="core-no-1">
             <a:extLst xmlns:a="http://schemas.openxmlformats.org/drawingml/2006/main">
               <a:ext uri="{FF2B5EF4-FFF2-40B4-BE49-F238E27FC236}">
-                <a16:creationId xmlns:a16="http://schemas.microsoft.com/office/drawing/2014/main" id="{E19D4351-3E5D-4955-B668-E87E05DC70C8}"/>
+                <a16:creationId xmlns:a16="http://schemas.microsoft.com/office/drawing/2014/main" id="{82E19430-9FB0-471A-9A2C-A404A65E28CF}"/>
               </a:ext>
             </a:extLst>
           </p:cNvPr>
@@ -7695,7 +7695,7 @@
             <a:pPr algn="l">
               <a:defRPr sz="2250" b="1">
                 <a:solidFill>
-                  <a:srgbClr val="17A6C8"/>
+                  <a:srgbClr val="006B80"/>
                 </a:solidFill>
                 <a:latin typeface="PingFang SC"/>
                 <a:ea typeface="PingFang SC"/>
@@ -7705,7 +7705,7 @@
             <a:r>
               <a:rPr sz="2250" b="1">
                 <a:solidFill>
-                  <a:srgbClr val="17A6C8"/>
+                  <a:srgbClr val="006B80"/>
                 </a:solidFill>
                 <a:latin typeface="PingFang SC"/>
                 <a:ea typeface="PingFang SC"/>
@@ -7721,7 +7721,7 @@
           <p:cNvPr id="10" name="core-body-1">
             <a:extLst xmlns:a="http://schemas.openxmlformats.org/drawingml/2006/main">
               <a:ext uri="{FF2B5EF4-FFF2-40B4-BE49-F238E27FC236}">
-                <a16:creationId xmlns:a16="http://schemas.microsoft.com/office/drawing/2014/main" id="{85CD855E-E6A4-4901-A775-CECA8FCA56DE}"/>
+                <a16:creationId xmlns:a16="http://schemas.microsoft.com/office/drawing/2014/main" id="{706D01D4-49BF-4730-B636-978FF809A47C}"/>
               </a:ext>
             </a:extLst>
           </p:cNvPr>
@@ -7785,7 +7785,7 @@
           <p:cNvPr id="11" name="s6-takeaway-rule">
             <a:extLst xmlns:a="http://schemas.openxmlformats.org/drawingml/2006/main">
               <a:ext uri="{FF2B5EF4-FFF2-40B4-BE49-F238E27FC236}">
-                <a16:creationId xmlns:a16="http://schemas.microsoft.com/office/drawing/2014/main" id="{662D7991-1B5F-49DE-B151-01A13EB9100C}"/>
+                <a16:creationId xmlns:a16="http://schemas.microsoft.com/office/drawing/2014/main" id="{D23DDFFD-B783-405B-94AB-AD4B935857CD}"/>
               </a:ext>
             </a:extLst>
           </p:cNvPr>
@@ -7818,7 +7818,7 @@
           <p:cNvPr id="12" name="s6-takeaway">
             <a:extLst xmlns:a="http://schemas.openxmlformats.org/drawingml/2006/main">
               <a:ext uri="{FF2B5EF4-FFF2-40B4-BE49-F238E27FC236}">
-                <a16:creationId xmlns:a16="http://schemas.microsoft.com/office/drawing/2014/main" id="{B1A4DD91-841D-4988-8BAD-0D8F540F7A4E}"/>
+                <a16:creationId xmlns:a16="http://schemas.microsoft.com/office/drawing/2014/main" id="{16FB3687-9C45-4856-9B80-E66403875040}"/>
               </a:ext>
             </a:extLst>
           </p:cNvPr>
@@ -7874,7 +7874,7 @@
     </p:spTree>
     <p:extLst>
       <p:ext uri="{BB962C8B-B14F-4D97-AF65-F5344CB8AC3E}">
-        <p14:creationId xmlns:p14="http://schemas.microsoft.com/office/powerpoint/2010/main" val="1183673027"/>
+        <p14:creationId xmlns:p14="http://schemas.microsoft.com/office/powerpoint/2010/main" val="167811815"/>
       </p:ext>
     </p:extLst>
   </p:cSld>
@@ -7905,7 +7905,7 @@
           <p:cNvPr id="1" name="s7-rule">
             <a:extLst xmlns:a="http://schemas.openxmlformats.org/drawingml/2006/main">
               <a:ext uri="{FF2B5EF4-FFF2-40B4-BE49-F238E27FC236}">
-                <a16:creationId xmlns:a16="http://schemas.microsoft.com/office/drawing/2014/main" id="{090A3657-EEEB-4201-8547-EF999300360C}"/>
+                <a16:creationId xmlns:a16="http://schemas.microsoft.com/office/drawing/2014/main" id="{525F4F19-1D72-43F4-AD51-4AB748219713}"/>
               </a:ext>
             </a:extLst>
           </p:cNvPr>
@@ -7938,7 +7938,7 @@
           <p:cNvPr id="2" name="s7-eyebrow">
             <a:extLst xmlns:a="http://schemas.openxmlformats.org/drawingml/2006/main">
               <a:ext uri="{FF2B5EF4-FFF2-40B4-BE49-F238E27FC236}">
-                <a16:creationId xmlns:a16="http://schemas.microsoft.com/office/drawing/2014/main" id="{69F30FDE-980B-42BD-B1D5-A041E6A1D54A}"/>
+                <a16:creationId xmlns:a16="http://schemas.microsoft.com/office/drawing/2014/main" id="{09B8E66F-F2C0-4DA7-9053-C79716904608}"/>
               </a:ext>
             </a:extLst>
           </p:cNvPr>
@@ -7996,7 +7996,7 @@
           <p:cNvPr id="3" name="s7-title">
             <a:extLst xmlns:a="http://schemas.openxmlformats.org/drawingml/2006/main">
               <a:ext uri="{FF2B5EF4-FFF2-40B4-BE49-F238E27FC236}">
-                <a16:creationId xmlns:a16="http://schemas.microsoft.com/office/drawing/2014/main" id="{068B144C-F00E-4A0E-934A-6982D934B199}"/>
+                <a16:creationId xmlns:a16="http://schemas.microsoft.com/office/drawing/2014/main" id="{85951F59-5BC7-4A82-B15B-F934D4EF3170}"/>
               </a:ext>
             </a:extLst>
           </p:cNvPr>
@@ -8054,7 +8054,7 @@
           <p:cNvPr id="4" name="s7-footer">
             <a:extLst xmlns:a="http://schemas.openxmlformats.org/drawingml/2006/main">
               <a:ext uri="{FF2B5EF4-FFF2-40B4-BE49-F238E27FC236}">
-                <a16:creationId xmlns:a16="http://schemas.microsoft.com/office/drawing/2014/main" id="{CFB2D9D0-831C-4948-B2F0-BA4B2831C6BB}"/>
+                <a16:creationId xmlns:a16="http://schemas.microsoft.com/office/drawing/2014/main" id="{A29D3A63-72F8-44A3-BDD0-4DD24A119136}"/>
               </a:ext>
             </a:extLst>
           </p:cNvPr>
@@ -8085,7 +8085,7 @@
           <p:cNvPr id="5" name="s7-identity">
             <a:extLst xmlns:a="http://schemas.openxmlformats.org/drawingml/2006/main">
               <a:ext uri="{FF2B5EF4-FFF2-40B4-BE49-F238E27FC236}">
-                <a16:creationId xmlns:a16="http://schemas.microsoft.com/office/drawing/2014/main" id="{70C6F99F-0C91-40D1-953A-9EC7D3C8B4C5}"/>
+                <a16:creationId xmlns:a16="http://schemas.microsoft.com/office/drawing/2014/main" id="{92DE1392-DB0A-461C-A97D-2481F4EAAACC}"/>
               </a:ext>
             </a:extLst>
           </p:cNvPr>
@@ -8143,7 +8143,7 @@
           <p:cNvPr id="6" name="core-no-0">
             <a:extLst xmlns:a="http://schemas.openxmlformats.org/drawingml/2006/main">
               <a:ext uri="{FF2B5EF4-FFF2-40B4-BE49-F238E27FC236}">
-                <a16:creationId xmlns:a16="http://schemas.microsoft.com/office/drawing/2014/main" id="{E6DE3A4A-11D7-4394-940D-6D97CE0D6653}"/>
+                <a16:creationId xmlns:a16="http://schemas.microsoft.com/office/drawing/2014/main" id="{20BB828B-9E18-4A48-A811-6CB0E95C5250}"/>
               </a:ext>
             </a:extLst>
           </p:cNvPr>
@@ -8175,7 +8175,7 @@
             <a:pPr algn="l">
               <a:defRPr sz="2250" b="1">
                 <a:solidFill>
-                  <a:srgbClr val="17A6C8"/>
+                  <a:srgbClr val="006B80"/>
                 </a:solidFill>
                 <a:latin typeface="PingFang SC"/>
                 <a:ea typeface="PingFang SC"/>
@@ -8185,7 +8185,7 @@
             <a:r>
               <a:rPr sz="2250" b="1">
                 <a:solidFill>
-                  <a:srgbClr val="17A6C8"/>
+                  <a:srgbClr val="006B80"/>
                 </a:solidFill>
                 <a:latin typeface="PingFang SC"/>
                 <a:ea typeface="PingFang SC"/>
@@ -8201,7 +8201,7 @@
           <p:cNvPr id="7" name="core-label-0">
             <a:extLst xmlns:a="http://schemas.openxmlformats.org/drawingml/2006/main">
               <a:ext uri="{FF2B5EF4-FFF2-40B4-BE49-F238E27FC236}">
-                <a16:creationId xmlns:a16="http://schemas.microsoft.com/office/drawing/2014/main" id="{AD83AD5D-7695-4854-B459-B49395216B59}"/>
+                <a16:creationId xmlns:a16="http://schemas.microsoft.com/office/drawing/2014/main" id="{2255C251-39E9-4DB4-8D04-65A6DDBCB13A}"/>
               </a:ext>
             </a:extLst>
           </p:cNvPr>
@@ -8259,7 +8259,7 @@
           <p:cNvPr id="8" name="core-body-0">
             <a:extLst xmlns:a="http://schemas.openxmlformats.org/drawingml/2006/main">
               <a:ext uri="{FF2B5EF4-FFF2-40B4-BE49-F238E27FC236}">
-                <a16:creationId xmlns:a16="http://schemas.microsoft.com/office/drawing/2014/main" id="{471BF4EB-CA14-4B91-91FA-FDAE70A5C44C}"/>
+                <a16:creationId xmlns:a16="http://schemas.microsoft.com/office/drawing/2014/main" id="{59EFB1F8-EA8D-4279-9808-8CC8EBA5731E}"/>
               </a:ext>
             </a:extLst>
           </p:cNvPr>
@@ -8283,7 +8283,7 @@
           </a:solidFill>
           <a:ln xmlns:a="http://schemas.openxmlformats.org/drawingml/2006/main" w="19050">
             <a:solidFill>
-              <a:srgbClr val="17A6C8"/>
+              <a:srgbClr val="006B80"/>
             </a:solidFill>
             <a:prstDash val="solid"/>
           </a:ln>
@@ -8323,7 +8323,7 @@
           <p:cNvPr id="9" name="core-no-1">
             <a:extLst xmlns:a="http://schemas.openxmlformats.org/drawingml/2006/main">
               <a:ext uri="{FF2B5EF4-FFF2-40B4-BE49-F238E27FC236}">
-                <a16:creationId xmlns:a16="http://schemas.microsoft.com/office/drawing/2014/main" id="{7B82073B-925B-4169-B1D1-B71118DAF279}"/>
+                <a16:creationId xmlns:a16="http://schemas.microsoft.com/office/drawing/2014/main" id="{1A0C2AE4-C6D1-46CE-9AC6-E72DDF53F41E}"/>
               </a:ext>
             </a:extLst>
           </p:cNvPr>
@@ -8355,7 +8355,7 @@
             <a:pPr algn="l">
               <a:defRPr sz="2250" b="1">
                 <a:solidFill>
-                  <a:srgbClr val="17A6C8"/>
+                  <a:srgbClr val="006B80"/>
                 </a:solidFill>
                 <a:latin typeface="PingFang SC"/>
                 <a:ea typeface="PingFang SC"/>
@@ -8365,7 +8365,7 @@
             <a:r>
               <a:rPr sz="2250" b="1">
                 <a:solidFill>
-                  <a:srgbClr val="17A6C8"/>
+                  <a:srgbClr val="006B80"/>
                 </a:solidFill>
                 <a:latin typeface="PingFang SC"/>
                 <a:ea typeface="PingFang SC"/>
@@ -8381,7 +8381,7 @@
           <p:cNvPr id="10" name="core-body-1">
             <a:extLst xmlns:a="http://schemas.openxmlformats.org/drawingml/2006/main">
               <a:ext uri="{FF2B5EF4-FFF2-40B4-BE49-F238E27FC236}">
-                <a16:creationId xmlns:a16="http://schemas.microsoft.com/office/drawing/2014/main" id="{DB6CCF1D-4777-42DD-A61E-929829A1DAF8}"/>
+                <a16:creationId xmlns:a16="http://schemas.microsoft.com/office/drawing/2014/main" id="{BEC6208A-84EE-4D65-94A6-A5EA68AC45F7}"/>
               </a:ext>
             </a:extLst>
           </p:cNvPr>
@@ -8435,7 +8435,7 @@
                 <a:ea typeface="PingFang SC"/>
                 <a:cs typeface="PingFang SC"/>
               </a:rPr>
-              <a:t>故障会沿依赖传播：研究角色引用了错误数据，分析和写作角色都可能在错误基础上继续；协调者标错状态，整合者会遗漏未完成项。降低传播的方法包括固定输入版本、为关键事实附来源、限制写入范围…</a:t>
+              <a:t>故障会沿依赖传播，研究角色引用了错误数据；分析和写作角色都可能在错误基础上继续；协调者标错状态，整合者会遗漏未完成项</a:t>
             </a:r>
           </a:p>
         </p:txBody>
@@ -8445,7 +8445,7 @@
           <p:cNvPr id="11" name="s7-takeaway-rule">
             <a:extLst xmlns:a="http://schemas.openxmlformats.org/drawingml/2006/main">
               <a:ext uri="{FF2B5EF4-FFF2-40B4-BE49-F238E27FC236}">
-                <a16:creationId xmlns:a16="http://schemas.microsoft.com/office/drawing/2014/main" id="{6E45CCCA-33BB-4DB4-BBB2-9EAA8F4DC631}"/>
+                <a16:creationId xmlns:a16="http://schemas.microsoft.com/office/drawing/2014/main" id="{D75B1C26-ECB1-4D77-99E5-4F316C96B754}"/>
               </a:ext>
             </a:extLst>
           </p:cNvPr>
@@ -8478,7 +8478,7 @@
           <p:cNvPr id="12" name="s7-takeaway">
             <a:extLst xmlns:a="http://schemas.openxmlformats.org/drawingml/2006/main">
               <a:ext uri="{FF2B5EF4-FFF2-40B4-BE49-F238E27FC236}">
-                <a16:creationId xmlns:a16="http://schemas.microsoft.com/office/drawing/2014/main" id="{8283A8D5-94C6-41F7-80E0-FF0B9D9468DF}"/>
+                <a16:creationId xmlns:a16="http://schemas.microsoft.com/office/drawing/2014/main" id="{D635AD62-0DBF-4C9B-99F4-D062EE8F0A50}"/>
               </a:ext>
             </a:extLst>
           </p:cNvPr>
@@ -8534,7 +8534,7 @@
     </p:spTree>
     <p:extLst>
       <p:ext uri="{BB962C8B-B14F-4D97-AF65-F5344CB8AC3E}">
-        <p14:creationId xmlns:p14="http://schemas.microsoft.com/office/powerpoint/2010/main" val="560956896"/>
+        <p14:creationId xmlns:p14="http://schemas.microsoft.com/office/powerpoint/2010/main" val="501658257"/>
       </p:ext>
     </p:extLst>
   </p:cSld>
@@ -8565,7 +8565,7 @@
           <p:cNvPr id="1" name="s8-rule">
             <a:extLst xmlns:a="http://schemas.openxmlformats.org/drawingml/2006/main">
               <a:ext uri="{FF2B5EF4-FFF2-40B4-BE49-F238E27FC236}">
-                <a16:creationId xmlns:a16="http://schemas.microsoft.com/office/drawing/2014/main" id="{086082FF-619A-4DD9-83E1-670FB4E5C644}"/>
+                <a16:creationId xmlns:a16="http://schemas.microsoft.com/office/drawing/2014/main" id="{FC25B89A-1BBA-44FD-B072-717D3AF4B0DE}"/>
               </a:ext>
             </a:extLst>
           </p:cNvPr>
@@ -8598,7 +8598,7 @@
           <p:cNvPr id="2" name="s8-eyebrow">
             <a:extLst xmlns:a="http://schemas.openxmlformats.org/drawingml/2006/main">
               <a:ext uri="{FF2B5EF4-FFF2-40B4-BE49-F238E27FC236}">
-                <a16:creationId xmlns:a16="http://schemas.microsoft.com/office/drawing/2014/main" id="{90F17E56-5EE9-49C8-AE6C-7489ADE65583}"/>
+                <a16:creationId xmlns:a16="http://schemas.microsoft.com/office/drawing/2014/main" id="{54C44897-D741-46FA-8861-AB5D412CB989}"/>
               </a:ext>
             </a:extLst>
           </p:cNvPr>
@@ -8656,7 +8656,7 @@
           <p:cNvPr id="3" name="s8-title">
             <a:extLst xmlns:a="http://schemas.openxmlformats.org/drawingml/2006/main">
               <a:ext uri="{FF2B5EF4-FFF2-40B4-BE49-F238E27FC236}">
-                <a16:creationId xmlns:a16="http://schemas.microsoft.com/office/drawing/2014/main" id="{A1CF494A-1187-4854-B84A-7BE23E617E90}"/>
+                <a16:creationId xmlns:a16="http://schemas.microsoft.com/office/drawing/2014/main" id="{597EDE9A-42FC-41D9-B16E-28283EDF0A35}"/>
               </a:ext>
             </a:extLst>
           </p:cNvPr>
@@ -8681,7 +8681,7 @@
         </p:spPr>
         <p:txBody>
           <a:bodyPr xmlns:a="http://schemas.openxmlformats.org/drawingml/2006/main" lIns="0" tIns="0" rIns="0" bIns="0" anchor="ctr">
-            <a:normAutofit fontScale="76449"/>
+            <a:normAutofit fontScale="100000"/>
           </a:bodyPr>
           <a:lstStyle xmlns:a="http://schemas.openxmlformats.org/drawingml/2006/main"/>
           <a:p xmlns:a="http://schemas.openxmlformats.org/drawingml/2006/main">
@@ -8704,7 +8704,7 @@
                 <a:ea typeface="PingFang SC"/>
                 <a:cs typeface="PingFang SC"/>
               </a:rPr>
-              <a:t>人应被安排在判断价值最高的位置，而不是在任务结束后被迫通读全部记录</a:t>
+              <a:t>人工应集中在目标、冲突与高风险判断</a:t>
             </a:r>
           </a:p>
         </p:txBody>
@@ -8714,7 +8714,7 @@
           <p:cNvPr id="4" name="s8-footer">
             <a:extLst xmlns:a="http://schemas.openxmlformats.org/drawingml/2006/main">
               <a:ext uri="{FF2B5EF4-FFF2-40B4-BE49-F238E27FC236}">
-                <a16:creationId xmlns:a16="http://schemas.microsoft.com/office/drawing/2014/main" id="{A2FEBCFD-278D-4DB3-9DE5-BAFA3049D5A6}"/>
+                <a16:creationId xmlns:a16="http://schemas.microsoft.com/office/drawing/2014/main" id="{DA864F43-774E-455C-88D8-A22EBDDC1770}"/>
               </a:ext>
             </a:extLst>
           </p:cNvPr>
@@ -8745,7 +8745,7 @@
           <p:cNvPr id="5" name="s8-identity">
             <a:extLst xmlns:a="http://schemas.openxmlformats.org/drawingml/2006/main">
               <a:ext uri="{FF2B5EF4-FFF2-40B4-BE49-F238E27FC236}">
-                <a16:creationId xmlns:a16="http://schemas.microsoft.com/office/drawing/2014/main" id="{C285718A-126F-424A-9147-2E973665F53E}"/>
+                <a16:creationId xmlns:a16="http://schemas.microsoft.com/office/drawing/2014/main" id="{F7338C8F-B79C-4876-8024-C1F3AD1B3AE7}"/>
               </a:ext>
             </a:extLst>
           </p:cNvPr>
@@ -8803,7 +8803,7 @@
           <p:cNvPr id="6" name="core-no-0">
             <a:extLst xmlns:a="http://schemas.openxmlformats.org/drawingml/2006/main">
               <a:ext uri="{FF2B5EF4-FFF2-40B4-BE49-F238E27FC236}">
-                <a16:creationId xmlns:a16="http://schemas.microsoft.com/office/drawing/2014/main" id="{57D4104E-5013-4B53-A3AD-E0C66BCE5D6F}"/>
+                <a16:creationId xmlns:a16="http://schemas.microsoft.com/office/drawing/2014/main" id="{F110FB81-BF48-4AFE-BD23-5D0D2B7FF2F0}"/>
               </a:ext>
             </a:extLst>
           </p:cNvPr>
@@ -8835,7 +8835,7 @@
             <a:pPr algn="l">
               <a:defRPr sz="2250" b="1">
                 <a:solidFill>
-                  <a:srgbClr val="17A6C8"/>
+                  <a:srgbClr val="006B80"/>
                 </a:solidFill>
                 <a:latin typeface="PingFang SC"/>
                 <a:ea typeface="PingFang SC"/>
@@ -8845,7 +8845,7 @@
             <a:r>
               <a:rPr sz="2250" b="1">
                 <a:solidFill>
-                  <a:srgbClr val="17A6C8"/>
+                  <a:srgbClr val="006B80"/>
                 </a:solidFill>
                 <a:latin typeface="PingFang SC"/>
                 <a:ea typeface="PingFang SC"/>
@@ -8861,7 +8861,7 @@
           <p:cNvPr id="7" name="core-label-0">
             <a:extLst xmlns:a="http://schemas.openxmlformats.org/drawingml/2006/main">
               <a:ext uri="{FF2B5EF4-FFF2-40B4-BE49-F238E27FC236}">
-                <a16:creationId xmlns:a16="http://schemas.microsoft.com/office/drawing/2014/main" id="{8CDDD0C1-5419-4623-AFBA-0C6CCECD8A41}"/>
+                <a16:creationId xmlns:a16="http://schemas.microsoft.com/office/drawing/2014/main" id="{3F1F4206-66C7-478B-A7EF-918FC5223471}"/>
               </a:ext>
             </a:extLst>
           </p:cNvPr>
@@ -8919,7 +8919,7 @@
           <p:cNvPr id="8" name="core-body-0">
             <a:extLst xmlns:a="http://schemas.openxmlformats.org/drawingml/2006/main">
               <a:ext uri="{FF2B5EF4-FFF2-40B4-BE49-F238E27FC236}">
-                <a16:creationId xmlns:a16="http://schemas.microsoft.com/office/drawing/2014/main" id="{08B12DE3-FB48-4579-A8F2-03C2D1961552}"/>
+                <a16:creationId xmlns:a16="http://schemas.microsoft.com/office/drawing/2014/main" id="{BAFEF8B1-08DA-490D-BC28-ED3F9E53F493}"/>
               </a:ext>
             </a:extLst>
           </p:cNvPr>
@@ -8943,7 +8943,7 @@
           </a:solidFill>
           <a:ln xmlns:a="http://schemas.openxmlformats.org/drawingml/2006/main" w="19050">
             <a:solidFill>
-              <a:srgbClr val="17A6C8"/>
+              <a:srgbClr val="006B80"/>
             </a:solidFill>
             <a:prstDash val="solid"/>
           </a:ln>
@@ -8973,7 +8973,7 @@
                 <a:ea typeface="PingFang SC"/>
                 <a:cs typeface="PingFang SC"/>
               </a:rPr>
-              <a:t>人应被安排在判断价值最高的位置，而不是在任务结束后被迫通读全部记录。适合人工介入的节点包括：目标和范围仍有多种解释；两个角色给出冲突结论；系统将执行外发、删除、授权等高影响动作…</a:t>
+              <a:t>人应被安排在判断价值最高的位置；而不是在任务结束后被迫通读全部记录；适合人工介入的节点包括，目标和范围仍有多种解释；两个角色给出冲突结论；系统将执行外发、删除、授权等高影响动作</a:t>
             </a:r>
           </a:p>
         </p:txBody>
@@ -8983,7 +8983,7 @@
           <p:cNvPr id="9" name="core-no-1">
             <a:extLst xmlns:a="http://schemas.openxmlformats.org/drawingml/2006/main">
               <a:ext uri="{FF2B5EF4-FFF2-40B4-BE49-F238E27FC236}">
-                <a16:creationId xmlns:a16="http://schemas.microsoft.com/office/drawing/2014/main" id="{324151A4-8EC4-4109-8FD6-984BEA2F0B19}"/>
+                <a16:creationId xmlns:a16="http://schemas.microsoft.com/office/drawing/2014/main" id="{6AEA418C-0206-4A52-B155-116C3207AF6F}"/>
               </a:ext>
             </a:extLst>
           </p:cNvPr>
@@ -9015,7 +9015,7 @@
             <a:pPr algn="l">
               <a:defRPr sz="2250" b="1">
                 <a:solidFill>
-                  <a:srgbClr val="17A6C8"/>
+                  <a:srgbClr val="006B80"/>
                 </a:solidFill>
                 <a:latin typeface="PingFang SC"/>
                 <a:ea typeface="PingFang SC"/>
@@ -9025,7 +9025,7 @@
             <a:r>
               <a:rPr sz="2250" b="1">
                 <a:solidFill>
-                  <a:srgbClr val="17A6C8"/>
+                  <a:srgbClr val="006B80"/>
                 </a:solidFill>
                 <a:latin typeface="PingFang SC"/>
                 <a:ea typeface="PingFang SC"/>
@@ -9041,7 +9041,7 @@
           <p:cNvPr id="10" name="core-body-1">
             <a:extLst xmlns:a="http://schemas.openxmlformats.org/drawingml/2006/main">
               <a:ext uri="{FF2B5EF4-FFF2-40B4-BE49-F238E27FC236}">
-                <a16:creationId xmlns:a16="http://schemas.microsoft.com/office/drawing/2014/main" id="{F1E89498-663E-40AA-AC43-A2225B8759B4}"/>
+                <a16:creationId xmlns:a16="http://schemas.microsoft.com/office/drawing/2014/main" id="{3F96588E-822B-469C-903E-269195B65A63}"/>
               </a:ext>
             </a:extLst>
           </p:cNvPr>
@@ -9105,7 +9105,7 @@
           <p:cNvPr id="11" name="s8-takeaway-rule">
             <a:extLst xmlns:a="http://schemas.openxmlformats.org/drawingml/2006/main">
               <a:ext uri="{FF2B5EF4-FFF2-40B4-BE49-F238E27FC236}">
-                <a16:creationId xmlns:a16="http://schemas.microsoft.com/office/drawing/2014/main" id="{706192B5-D8E6-4DD6-838D-C9BE39B9AAE4}"/>
+                <a16:creationId xmlns:a16="http://schemas.microsoft.com/office/drawing/2014/main" id="{EDB7A790-B9D2-497B-941D-50B25B16CF55}"/>
               </a:ext>
             </a:extLst>
           </p:cNvPr>
@@ -9138,7 +9138,7 @@
           <p:cNvPr id="12" name="s8-takeaway">
             <a:extLst xmlns:a="http://schemas.openxmlformats.org/drawingml/2006/main">
               <a:ext uri="{FF2B5EF4-FFF2-40B4-BE49-F238E27FC236}">
-                <a16:creationId xmlns:a16="http://schemas.microsoft.com/office/drawing/2014/main" id="{C3140D94-B21E-4E01-B15B-B3FAE30C50B3}"/>
+                <a16:creationId xmlns:a16="http://schemas.microsoft.com/office/drawing/2014/main" id="{BFA642C7-598F-49E5-BD05-DC6393EFCC1C}"/>
               </a:ext>
             </a:extLst>
           </p:cNvPr>
@@ -9186,7 +9186,7 @@
                 <a:ea typeface="PingFang SC"/>
                 <a:cs typeface="PingFang SC"/>
               </a:rPr>
-              <a:t>人应被安排在判断价值最高的位置，而不是在任务结束后被迫通读全部记录</a:t>
+              <a:t>人工应集中在目标、冲突与高风险判断</a:t>
             </a:r>
           </a:p>
         </p:txBody>
@@ -9194,7 +9194,7 @@
     </p:spTree>
     <p:extLst>
       <p:ext uri="{BB962C8B-B14F-4D97-AF65-F5344CB8AC3E}">
-        <p14:creationId xmlns:p14="http://schemas.microsoft.com/office/powerpoint/2010/main" val="546212492"/>
+        <p14:creationId xmlns:p14="http://schemas.microsoft.com/office/powerpoint/2010/main" val="68051104"/>
       </p:ext>
     </p:extLst>
   </p:cSld>
@@ -9225,7 +9225,7 @@
           <p:cNvPr id="1" name="s9-rule">
             <a:extLst xmlns:a="http://schemas.openxmlformats.org/drawingml/2006/main">
               <a:ext uri="{FF2B5EF4-FFF2-40B4-BE49-F238E27FC236}">
-                <a16:creationId xmlns:a16="http://schemas.microsoft.com/office/drawing/2014/main" id="{C95919BD-3CE5-49D5-B96D-F2856A33F523}"/>
+                <a16:creationId xmlns:a16="http://schemas.microsoft.com/office/drawing/2014/main" id="{6CF4B4C3-8F5A-4AB4-A2BF-48E73DDA4D7B}"/>
               </a:ext>
             </a:extLst>
           </p:cNvPr>
@@ -9258,7 +9258,7 @@
           <p:cNvPr id="2" name="s9-eyebrow">
             <a:extLst xmlns:a="http://schemas.openxmlformats.org/drawingml/2006/main">
               <a:ext uri="{FF2B5EF4-FFF2-40B4-BE49-F238E27FC236}">
-                <a16:creationId xmlns:a16="http://schemas.microsoft.com/office/drawing/2014/main" id="{08BF42B9-772E-4EFE-9B65-AE0DF3C29013}"/>
+                <a16:creationId xmlns:a16="http://schemas.microsoft.com/office/drawing/2014/main" id="{52B31DA1-256E-47D6-AA75-6AA348696C11}"/>
               </a:ext>
             </a:extLst>
           </p:cNvPr>
@@ -9316,7 +9316,7 @@
           <p:cNvPr id="3" name="s9-title">
             <a:extLst xmlns:a="http://schemas.openxmlformats.org/drawingml/2006/main">
               <a:ext uri="{FF2B5EF4-FFF2-40B4-BE49-F238E27FC236}">
-                <a16:creationId xmlns:a16="http://schemas.microsoft.com/office/drawing/2014/main" id="{3430FA8B-9FEA-494A-947F-4A9C799DDF88}"/>
+                <a16:creationId xmlns:a16="http://schemas.microsoft.com/office/drawing/2014/main" id="{CDE49C6B-F296-4364-B7F2-4FFA3E4F66BF}"/>
               </a:ext>
             </a:extLst>
           </p:cNvPr>
@@ -9364,7 +9364,7 @@
                 <a:ea typeface="PingFang SC"/>
                 <a:cs typeface="PingFang SC"/>
               </a:rPr>
-              <a:t>是否用多智能体完成一份行业调研必须经过边界验证</a:t>
+              <a:t>共享指标决定多智能体结果能否合并</a:t>
             </a:r>
           </a:p>
         </p:txBody>
@@ -9374,7 +9374,7 @@
           <p:cNvPr id="4" name="s9-footer">
             <a:extLst xmlns:a="http://schemas.openxmlformats.org/drawingml/2006/main">
               <a:ext uri="{FF2B5EF4-FFF2-40B4-BE49-F238E27FC236}">
-                <a16:creationId xmlns:a16="http://schemas.microsoft.com/office/drawing/2014/main" id="{65A5BD33-73BA-4F41-A95D-82EEC0DBCAE6}"/>
+                <a16:creationId xmlns:a16="http://schemas.microsoft.com/office/drawing/2014/main" id="{9A073F02-6172-49F5-A408-A52809BE9A39}"/>
               </a:ext>
             </a:extLst>
           </p:cNvPr>
@@ -9405,7 +9405,7 @@
           <p:cNvPr id="5" name="s9-identity">
             <a:extLst xmlns:a="http://schemas.openxmlformats.org/drawingml/2006/main">
               <a:ext uri="{FF2B5EF4-FFF2-40B4-BE49-F238E27FC236}">
-                <a16:creationId xmlns:a16="http://schemas.microsoft.com/office/drawing/2014/main" id="{F225CA2F-ABBF-4342-994E-639091DF3EBC}"/>
+                <a16:creationId xmlns:a16="http://schemas.microsoft.com/office/drawing/2014/main" id="{052518ED-32AC-4B4D-A028-06A9BF11E775}"/>
               </a:ext>
             </a:extLst>
           </p:cNvPr>
@@ -9463,7 +9463,7 @@
           <p:cNvPr id="6" name="case-title">
             <a:extLst xmlns:a="http://schemas.openxmlformats.org/drawingml/2006/main">
               <a:ext uri="{FF2B5EF4-FFF2-40B4-BE49-F238E27FC236}">
-                <a16:creationId xmlns:a16="http://schemas.microsoft.com/office/drawing/2014/main" id="{74DDE7DB-7129-4380-BA6A-19B6B6F3187D}"/>
+                <a16:creationId xmlns:a16="http://schemas.microsoft.com/office/drawing/2014/main" id="{F85D90B8-6559-46B7-A6CE-DDD18E4A2F36}"/>
               </a:ext>
             </a:extLst>
           </p:cNvPr>
@@ -9527,23 +9527,23 @@
           <p:cNvPr id="7" name="case-row-0">
             <a:extLst xmlns:a="http://schemas.openxmlformats.org/drawingml/2006/main">
               <a:ext uri="{FF2B5EF4-FFF2-40B4-BE49-F238E27FC236}">
-                <a16:creationId xmlns:a16="http://schemas.microsoft.com/office/drawing/2014/main" id="{910C1547-3570-4F7A-A965-CB5E980A9AB7}"/>
-              </a:ext>
-            </a:extLst>
-          </p:cNvPr>
-          <p:cNvSpPr>
-            <a:spLocks xmlns:a="http://schemas.openxmlformats.org/drawingml/2006/main" noGrp="1"/>
-          </p:cNvSpPr>
-          <p:nvPr/>
-        </p:nvSpPr>
-        <p:spPr>
-          <a:xfrm xmlns:a="http://schemas.openxmlformats.org/drawingml/2006/main">
-            <a:off x="4286250" y="2057400"/>
-            <a:ext cx="6534150" cy="838200"/>
+                <a16:creationId xmlns:a16="http://schemas.microsoft.com/office/drawing/2014/main" id="{0FDA863C-7B54-4571-B872-432F8BBC6C1B}"/>
+              </a:ext>
+            </a:extLst>
+          </p:cNvPr>
+          <p:cNvSpPr>
+            <a:spLocks xmlns:a="http://schemas.openxmlformats.org/drawingml/2006/main" noGrp="1"/>
+          </p:cNvSpPr>
+          <p:nvPr/>
+        </p:nvSpPr>
+        <p:spPr>
+          <a:xfrm xmlns:a="http://schemas.openxmlformats.org/drawingml/2006/main">
+            <a:off x="4286250" y="2038350"/>
+            <a:ext cx="6534150" cy="514350"/>
           </a:xfrm>
           <a:prstGeom xmlns:a="http://schemas.openxmlformats.org/drawingml/2006/main" prst="roundRect">
             <a:avLst>
-              <a:gd name="adj" fmla="val 14773"/>
+              <a:gd name="adj" fmla="val 24074"/>
             </a:avLst>
           </a:prstGeom>
           <a:solidFill xmlns:a="http://schemas.openxmlformats.org/drawingml/2006/main">
@@ -9558,7 +9558,7 @@
         </p:spPr>
         <p:txBody>
           <a:bodyPr xmlns:a="http://schemas.openxmlformats.org/drawingml/2006/main" lIns="152400" tIns="133350" rIns="152400" bIns="133350" anchor="ctr">
-            <a:normAutofit fontScale="69292"/>
+            <a:normAutofit fontScale="72956"/>
           </a:bodyPr>
           <a:lstStyle xmlns:a="http://schemas.openxmlformats.org/drawingml/2006/main"/>
           <a:p xmlns:a="http://schemas.openxmlformats.org/drawingml/2006/main">
@@ -9581,7 +9581,7 @@
                 <a:ea typeface="PingFang SC"/>
                 <a:cs typeface="PingFang SC"/>
               </a:rPr>
-              <a:t>场景｜任务要求在一天内比较三个行业的 AI 应用，形成同一指标体系下的报告。合理拆分方式是：协调者先统一研究问题、时间范围和证据标准；三个研究角色分别处理一个行业…</a:t>
+              <a:t>结果｜任务要求在一天内比较三个行业的 AI 应用，形成同一指标体系下的报告</a:t>
             </a:r>
           </a:p>
         </p:txBody>
@@ -9591,23 +9591,23 @@
           <p:cNvPr id="8" name="case-row-1">
             <a:extLst xmlns:a="http://schemas.openxmlformats.org/drawingml/2006/main">
               <a:ext uri="{FF2B5EF4-FFF2-40B4-BE49-F238E27FC236}">
-                <a16:creationId xmlns:a16="http://schemas.microsoft.com/office/drawing/2014/main" id="{5F3E535B-2D37-4AEC-B875-15DFA6A4ACEC}"/>
-              </a:ext>
-            </a:extLst>
-          </p:cNvPr>
-          <p:cNvSpPr>
-            <a:spLocks xmlns:a="http://schemas.openxmlformats.org/drawingml/2006/main" noGrp="1"/>
-          </p:cNvSpPr>
-          <p:nvPr/>
-        </p:nvSpPr>
-        <p:spPr>
-          <a:xfrm xmlns:a="http://schemas.openxmlformats.org/drawingml/2006/main">
-            <a:off x="4286250" y="3086100"/>
-            <a:ext cx="6534150" cy="838200"/>
+                <a16:creationId xmlns:a16="http://schemas.microsoft.com/office/drawing/2014/main" id="{BD80CC60-D21B-4812-BB70-FA660E513323}"/>
+              </a:ext>
+            </a:extLst>
+          </p:cNvPr>
+          <p:cNvSpPr>
+            <a:spLocks xmlns:a="http://schemas.openxmlformats.org/drawingml/2006/main" noGrp="1"/>
+          </p:cNvSpPr>
+          <p:nvPr/>
+        </p:nvSpPr>
+        <p:spPr>
+          <a:xfrm xmlns:a="http://schemas.openxmlformats.org/drawingml/2006/main">
+            <a:off x="4286250" y="2667000"/>
+            <a:ext cx="6534150" cy="514350"/>
           </a:xfrm>
           <a:prstGeom xmlns:a="http://schemas.openxmlformats.org/drawingml/2006/main" prst="roundRect">
             <a:avLst>
-              <a:gd name="adj" fmla="val 14773"/>
+              <a:gd name="adj" fmla="val 24074"/>
             </a:avLst>
           </a:prstGeom>
           <a:solidFill xmlns:a="http://schemas.openxmlformats.org/drawingml/2006/main">
@@ -9622,7 +9622,7 @@
         </p:spPr>
         <p:txBody>
           <a:bodyPr xmlns:a="http://schemas.openxmlformats.org/drawingml/2006/main" lIns="152400" tIns="133350" rIns="152400" bIns="133350" anchor="ctr">
-            <a:normAutofit fontScale="71583"/>
+            <a:normAutofit fontScale="72956"/>
           </a:bodyPr>
           <a:lstStyle xmlns:a="http://schemas.openxmlformats.org/drawingml/2006/main"/>
           <a:p xmlns:a="http://schemas.openxmlformats.org/drawingml/2006/main">
@@ -9645,7 +9645,7 @@
                 <a:ea typeface="PingFang SC"/>
                 <a:cs typeface="PingFang SC"/>
               </a:rPr>
-              <a:t>机制｜如果让每个研究角色自行决定指标，最后会得到三篇无法横向比较的文章。正确的共享状态应先固定指标模板，并要求每条结论包含来源、日期、适用范围和不确定性。某行业资料不足时…</a:t>
+              <a:t>方法｜合理拆分方式是：协调者先统一研究问题、时间范围和证据标准</a:t>
             </a:r>
           </a:p>
         </p:txBody>
@@ -9655,23 +9655,151 @@
           <p:cNvPr id="9" name="case-row-2">
             <a:extLst xmlns:a="http://schemas.openxmlformats.org/drawingml/2006/main">
               <a:ext uri="{FF2B5EF4-FFF2-40B4-BE49-F238E27FC236}">
-                <a16:creationId xmlns:a16="http://schemas.microsoft.com/office/drawing/2014/main" id="{041FDDF7-A9B8-4940-BC9C-3BFE4DBBE277}"/>
-              </a:ext>
-            </a:extLst>
-          </p:cNvPr>
-          <p:cNvSpPr>
-            <a:spLocks xmlns:a="http://schemas.openxmlformats.org/drawingml/2006/main" noGrp="1"/>
-          </p:cNvSpPr>
-          <p:nvPr/>
-        </p:nvSpPr>
-        <p:spPr>
-          <a:xfrm xmlns:a="http://schemas.openxmlformats.org/drawingml/2006/main">
-            <a:off x="4286250" y="4114800"/>
-            <a:ext cx="6534150" cy="838200"/>
+                <a16:creationId xmlns:a16="http://schemas.microsoft.com/office/drawing/2014/main" id="{A0BBC3CC-D3B5-457B-A353-44ECA0EA7746}"/>
+              </a:ext>
+            </a:extLst>
+          </p:cNvPr>
+          <p:cNvSpPr>
+            <a:spLocks xmlns:a="http://schemas.openxmlformats.org/drawingml/2006/main" noGrp="1"/>
+          </p:cNvSpPr>
+          <p:nvPr/>
+        </p:nvSpPr>
+        <p:spPr>
+          <a:xfrm xmlns:a="http://schemas.openxmlformats.org/drawingml/2006/main">
+            <a:off x="4286250" y="3295650"/>
+            <a:ext cx="6534150" cy="514350"/>
           </a:xfrm>
           <a:prstGeom xmlns:a="http://schemas.openxmlformats.org/drawingml/2006/main" prst="roundRect">
             <a:avLst>
-              <a:gd name="adj" fmla="val 14773"/>
+              <a:gd name="adj" fmla="val 24074"/>
+            </a:avLst>
+          </a:prstGeom>
+          <a:solidFill xmlns:a="http://schemas.openxmlformats.org/drawingml/2006/main">
+            <a:srgbClr val="FFFFFF"/>
+          </a:solidFill>
+          <a:ln xmlns:a="http://schemas.openxmlformats.org/drawingml/2006/main" w="9525">
+            <a:solidFill>
+              <a:srgbClr val="D8E0E8"/>
+            </a:solidFill>
+            <a:prstDash val="solid"/>
+          </a:ln>
+        </p:spPr>
+        <p:txBody>
+          <a:bodyPr xmlns:a="http://schemas.openxmlformats.org/drawingml/2006/main" lIns="152400" tIns="133350" rIns="152400" bIns="133350" anchor="ctr">
+            <a:normAutofit fontScale="72956"/>
+          </a:bodyPr>
+          <a:lstStyle xmlns:a="http://schemas.openxmlformats.org/drawingml/2006/main"/>
+          <a:p xmlns:a="http://schemas.openxmlformats.org/drawingml/2006/main">
+            <a:pPr algn="l">
+              <a:defRPr sz="1575" b="0">
+                <a:solidFill>
+                  <a:srgbClr val="10233F"/>
+                </a:solidFill>
+                <a:latin typeface="PingFang SC"/>
+                <a:ea typeface="PingFang SC"/>
+                <a:cs typeface="PingFang SC"/>
+              </a:defRPr>
+            </a:pPr>
+            <a:r>
+              <a:rPr sz="1575" b="0">
+                <a:solidFill>
+                  <a:srgbClr val="10233F"/>
+                </a:solidFill>
+                <a:latin typeface="PingFang SC"/>
+                <a:ea typeface="PingFang SC"/>
+                <a:cs typeface="PingFang SC"/>
+              </a:rPr>
+              <a:t>机制｜三个研究角色分别处理一个行业</a:t>
+            </a:r>
+          </a:p>
+        </p:txBody>
+      </p:sp>
+      <p:sp>
+        <p:nvSpPr>
+          <p:cNvPr id="10" name="case-row-3">
+            <a:extLst xmlns:a="http://schemas.openxmlformats.org/drawingml/2006/main">
+              <a:ext uri="{FF2B5EF4-FFF2-40B4-BE49-F238E27FC236}">
+                <a16:creationId xmlns:a16="http://schemas.microsoft.com/office/drawing/2014/main" id="{4F4C92A7-FE27-4A97-8C6F-0F4D86E13B9D}"/>
+              </a:ext>
+            </a:extLst>
+          </p:cNvPr>
+          <p:cNvSpPr>
+            <a:spLocks xmlns:a="http://schemas.openxmlformats.org/drawingml/2006/main" noGrp="1"/>
+          </p:cNvSpPr>
+          <p:nvPr/>
+        </p:nvSpPr>
+        <p:spPr>
+          <a:xfrm xmlns:a="http://schemas.openxmlformats.org/drawingml/2006/main">
+            <a:off x="4286250" y="3924300"/>
+            <a:ext cx="6534150" cy="514350"/>
+          </a:xfrm>
+          <a:prstGeom xmlns:a="http://schemas.openxmlformats.org/drawingml/2006/main" prst="roundRect">
+            <a:avLst>
+              <a:gd name="adj" fmla="val 24074"/>
+            </a:avLst>
+          </a:prstGeom>
+          <a:solidFill xmlns:a="http://schemas.openxmlformats.org/drawingml/2006/main">
+            <a:srgbClr val="FFFFFF"/>
+          </a:solidFill>
+          <a:ln xmlns:a="http://schemas.openxmlformats.org/drawingml/2006/main" w="9525">
+            <a:solidFill>
+              <a:srgbClr val="D8E0E8"/>
+            </a:solidFill>
+            <a:prstDash val="solid"/>
+          </a:ln>
+        </p:spPr>
+        <p:txBody>
+          <a:bodyPr xmlns:a="http://schemas.openxmlformats.org/drawingml/2006/main" lIns="152400" tIns="133350" rIns="152400" bIns="133350" anchor="ctr">
+            <a:normAutofit fontScale="72956"/>
+          </a:bodyPr>
+          <a:lstStyle xmlns:a="http://schemas.openxmlformats.org/drawingml/2006/main"/>
+          <a:p xmlns:a="http://schemas.openxmlformats.org/drawingml/2006/main">
+            <a:pPr algn="l">
+              <a:defRPr sz="1575" b="0">
+                <a:solidFill>
+                  <a:srgbClr val="10233F"/>
+                </a:solidFill>
+                <a:latin typeface="PingFang SC"/>
+                <a:ea typeface="PingFang SC"/>
+                <a:cs typeface="PingFang SC"/>
+              </a:defRPr>
+            </a:pPr>
+            <a:r>
+              <a:rPr sz="1575" b="0">
+                <a:solidFill>
+                  <a:srgbClr val="10233F"/>
+                </a:solidFill>
+                <a:latin typeface="PingFang SC"/>
+                <a:ea typeface="PingFang SC"/>
+                <a:cs typeface="PingFang SC"/>
+              </a:rPr>
+              <a:t>机制｜审阅者核对关键来源</a:t>
+            </a:r>
+          </a:p>
+        </p:txBody>
+      </p:sp>
+      <p:sp>
+        <p:nvSpPr>
+          <p:cNvPr id="11" name="case-row-4">
+            <a:extLst xmlns:a="http://schemas.openxmlformats.org/drawingml/2006/main">
+              <a:ext uri="{FF2B5EF4-FFF2-40B4-BE49-F238E27FC236}">
+                <a16:creationId xmlns:a16="http://schemas.microsoft.com/office/drawing/2014/main" id="{957B26AB-D08A-4356-9F5A-9EADED286FAF}"/>
+              </a:ext>
+            </a:extLst>
+          </p:cNvPr>
+          <p:cNvSpPr>
+            <a:spLocks xmlns:a="http://schemas.openxmlformats.org/drawingml/2006/main" noGrp="1"/>
+          </p:cNvSpPr>
+          <p:nvPr/>
+        </p:nvSpPr>
+        <p:spPr>
+          <a:xfrm xmlns:a="http://schemas.openxmlformats.org/drawingml/2006/main">
+            <a:off x="4286250" y="4552950"/>
+            <a:ext cx="6534150" cy="514350"/>
+          </a:xfrm>
+          <a:prstGeom xmlns:a="http://schemas.openxmlformats.org/drawingml/2006/main" prst="roundRect">
+            <a:avLst>
+              <a:gd name="adj" fmla="val 24074"/>
             </a:avLst>
           </a:prstGeom>
           <a:solidFill xmlns:a="http://schemas.openxmlformats.org/drawingml/2006/main">
@@ -9679,14 +9807,14 @@
           </a:solidFill>
           <a:ln xmlns:a="http://schemas.openxmlformats.org/drawingml/2006/main" w="9525">
             <a:solidFill>
-              <a:srgbClr val="17A6C8"/>
+              <a:srgbClr val="006B80"/>
             </a:solidFill>
             <a:prstDash val="solid"/>
           </a:ln>
         </p:spPr>
         <p:txBody>
           <a:bodyPr xmlns:a="http://schemas.openxmlformats.org/drawingml/2006/main" lIns="152400" tIns="133350" rIns="152400" bIns="133350" anchor="ctr">
-            <a:normAutofit fontScale="90559"/>
+            <a:normAutofit fontScale="72956"/>
           </a:bodyPr>
           <a:lstStyle xmlns:a="http://schemas.openxmlformats.org/drawingml/2006/main"/>
           <a:p xmlns:a="http://schemas.openxmlformats.org/drawingml/2006/main">
@@ -9709,17 +9837,17 @@
                 <a:ea typeface="PingFang SC"/>
                 <a:cs typeface="PingFang SC"/>
               </a:rPr>
-              <a:t>结果｜相反，如果任务只是查询三个公开数字并填入一张表，单个智能体顺序完成通常更合适。拆分的判断应来自任务结构，而不是来自可用智能体的数量</a:t>
-            </a:r>
-          </a:p>
-        </p:txBody>
-      </p:sp>
-      <p:sp>
-        <p:nvSpPr>
-          <p:cNvPr id="10" name="s9-takeaway-rule">
-            <a:extLst xmlns:a="http://schemas.openxmlformats.org/drawingml/2006/main">
-              <a:ext uri="{FF2B5EF4-FFF2-40B4-BE49-F238E27FC236}">
-                <a16:creationId xmlns:a16="http://schemas.microsoft.com/office/drawing/2014/main" id="{7B971E2C-C176-4B90-A1B9-12231BE8C60E}"/>
+              <a:t>启示｜整合者统一术语和比较表</a:t>
+            </a:r>
+          </a:p>
+        </p:txBody>
+      </p:sp>
+      <p:sp>
+        <p:nvSpPr>
+          <p:cNvPr id="12" name="s9-takeaway-rule">
+            <a:extLst xmlns:a="http://schemas.openxmlformats.org/drawingml/2006/main">
+              <a:ext uri="{FF2B5EF4-FFF2-40B4-BE49-F238E27FC236}">
+                <a16:creationId xmlns:a16="http://schemas.microsoft.com/office/drawing/2014/main" id="{95267491-6D90-4F39-BD43-2B3B1FAAAA0A}"/>
               </a:ext>
             </a:extLst>
           </p:cNvPr>
@@ -9749,10 +9877,10 @@
       </p:sp>
       <p:sp>
         <p:nvSpPr>
-          <p:cNvPr id="11" name="s9-takeaway">
-            <a:extLst xmlns:a="http://schemas.openxmlformats.org/drawingml/2006/main">
-              <a:ext uri="{FF2B5EF4-FFF2-40B4-BE49-F238E27FC236}">
-                <a16:creationId xmlns:a16="http://schemas.microsoft.com/office/drawing/2014/main" id="{630E9E14-EC7A-4334-97F6-42B3E3E0A159}"/>
+          <p:cNvPr id="13" name="s9-takeaway">
+            <a:extLst xmlns:a="http://schemas.openxmlformats.org/drawingml/2006/main">
+              <a:ext uri="{FF2B5EF4-FFF2-40B4-BE49-F238E27FC236}">
+                <a16:creationId xmlns:a16="http://schemas.microsoft.com/office/drawing/2014/main" id="{9158CC47-6A2D-4540-9692-A3DD40EF76E4}"/>
               </a:ext>
             </a:extLst>
           </p:cNvPr>
@@ -9800,7 +9928,7 @@
                 <a:ea typeface="PingFang SC"/>
                 <a:cs typeface="PingFang SC"/>
               </a:rPr>
-              <a:t>是否用多智能体完成一份行业调研必须经过边界验证</a:t>
+              <a:t>共享指标决定多智能体结果能否合并</a:t>
             </a:r>
           </a:p>
         </p:txBody>
@@ -9808,7 +9936,7 @@
     </p:spTree>
     <p:extLst>
       <p:ext uri="{BB962C8B-B14F-4D97-AF65-F5344CB8AC3E}">
-        <p14:creationId xmlns:p14="http://schemas.microsoft.com/office/powerpoint/2010/main" val="999928712"/>
+        <p14:creationId xmlns:p14="http://schemas.microsoft.com/office/powerpoint/2010/main" val="257631629"/>
       </p:ext>
     </p:extLst>
   </p:cSld>

--- a/docs/public/course-assets/course-pptx/ag-003.pptx
+++ b/docs/public/course-assets/course-pptx/ag-003.pptx
@@ -2,24 +2,24 @@
 <file path=ppt/presentation.xml><?xml version="1.0" encoding="utf-8"?>
 <p:presentation xmlns:p="http://schemas.openxmlformats.org/presentationml/2006/main">
   <p:sldMasterIdLst>
-    <p:sldMasterId xmlns:r="http://schemas.openxmlformats.org/officeDocument/2006/relationships" id="2147483648" r:id="R6c6093b14c6e4aa1"/>
+    <p:sldMasterId xmlns:r="http://schemas.openxmlformats.org/officeDocument/2006/relationships" id="2147483648" r:id="R3f7b42d1dc5d49f5"/>
   </p:sldMasterIdLst>
   <p:notesMasterIdLst>
-    <p:notesMasterId xmlns:r="http://schemas.openxmlformats.org/officeDocument/2006/relationships" r:id="R7f2c4e4229134f03"/>
+    <p:notesMasterId xmlns:r="http://schemas.openxmlformats.org/officeDocument/2006/relationships" r:id="R814babb0d2af48fd"/>
   </p:notesMasterIdLst>
   <p:sldIdLst>
-    <p:sldId xmlns:r="http://schemas.openxmlformats.org/officeDocument/2006/relationships" id="256" r:id="R02a187e4c2624809"/>
-    <p:sldId xmlns:r="http://schemas.openxmlformats.org/officeDocument/2006/relationships" id="257" r:id="R2ee19947611944c9"/>
-    <p:sldId xmlns:r="http://schemas.openxmlformats.org/officeDocument/2006/relationships" id="258" r:id="R16e7d896206f4bc5"/>
-    <p:sldId xmlns:r="http://schemas.openxmlformats.org/officeDocument/2006/relationships" id="259" r:id="R26b9f14b298c4ca9"/>
-    <p:sldId xmlns:r="http://schemas.openxmlformats.org/officeDocument/2006/relationships" id="260" r:id="R0b5635dfddc441d0"/>
-    <p:sldId xmlns:r="http://schemas.openxmlformats.org/officeDocument/2006/relationships" id="261" r:id="R3cef0627a37d4e5e"/>
-    <p:sldId xmlns:r="http://schemas.openxmlformats.org/officeDocument/2006/relationships" id="262" r:id="Rd2721ddac8da4f0e"/>
-    <p:sldId xmlns:r="http://schemas.openxmlformats.org/officeDocument/2006/relationships" id="263" r:id="R04398e2dadec45db"/>
-    <p:sldId xmlns:r="http://schemas.openxmlformats.org/officeDocument/2006/relationships" id="264" r:id="R54a840600a05487c"/>
-    <p:sldId xmlns:r="http://schemas.openxmlformats.org/officeDocument/2006/relationships" id="265" r:id="Rf7ce7a2264434697"/>
-    <p:sldId xmlns:r="http://schemas.openxmlformats.org/officeDocument/2006/relationships" id="266" r:id="Rf459d9fa4db545c6"/>
-    <p:sldId xmlns:r="http://schemas.openxmlformats.org/officeDocument/2006/relationships" id="267" r:id="R709f356cc86e4bee"/>
+    <p:sldId xmlns:r="http://schemas.openxmlformats.org/officeDocument/2006/relationships" id="256" r:id="Rb77786ca16264bcc"/>
+    <p:sldId xmlns:r="http://schemas.openxmlformats.org/officeDocument/2006/relationships" id="257" r:id="Ra88f5b2082ef46ef"/>
+    <p:sldId xmlns:r="http://schemas.openxmlformats.org/officeDocument/2006/relationships" id="258" r:id="Rad730505b1e44706"/>
+    <p:sldId xmlns:r="http://schemas.openxmlformats.org/officeDocument/2006/relationships" id="259" r:id="R490b4d81c57d4db8"/>
+    <p:sldId xmlns:r="http://schemas.openxmlformats.org/officeDocument/2006/relationships" id="260" r:id="R85d604f5bc744ef2"/>
+    <p:sldId xmlns:r="http://schemas.openxmlformats.org/officeDocument/2006/relationships" id="261" r:id="R154a10c6ea6b472f"/>
+    <p:sldId xmlns:r="http://schemas.openxmlformats.org/officeDocument/2006/relationships" id="262" r:id="R1ba1f3533d5142c1"/>
+    <p:sldId xmlns:r="http://schemas.openxmlformats.org/officeDocument/2006/relationships" id="263" r:id="R01baecf89b1a41e5"/>
+    <p:sldId xmlns:r="http://schemas.openxmlformats.org/officeDocument/2006/relationships" id="264" r:id="Rb82424e37a0f4d1b"/>
+    <p:sldId xmlns:r="http://schemas.openxmlformats.org/officeDocument/2006/relationships" id="265" r:id="R87df2135a49b4218"/>
+    <p:sldId xmlns:r="http://schemas.openxmlformats.org/officeDocument/2006/relationships" id="266" r:id="Rf49a6e0228f749bd"/>
+    <p:sldId xmlns:r="http://schemas.openxmlformats.org/officeDocument/2006/relationships" id="267" r:id="Rabeb99013d4c4d97"/>
   </p:sldIdLst>
   <p:sldSz cx="12192000" cy="6858000"/>
   <p:notesSz cx="6858000" cy="9144000"/>
@@ -1338,7 +1338,7 @@
   </p:cSld>
   <p:clrMap bg1="lt1" tx1="dk1" bg2="lt2" tx2="dk2" accent1="accent1" accent2="accent2" accent3="accent3" accent4="accent4" accent5="accent5" accent6="accent6" hlink="hlink" folHlink="folHlink"/>
   <p:sldLayoutIdLst>
-    <p:sldLayoutId xmlns:r="http://schemas.openxmlformats.org/officeDocument/2006/relationships" id="2147483649" r:id="R8f89250c97a34718"/>
+    <p:sldLayoutId xmlns:r="http://schemas.openxmlformats.org/officeDocument/2006/relationships" id="2147483649" r:id="R6f025058b16c444b"/>
   </p:sldLayoutIdLst>
   <p:txStyles>
     <p:titleStyle>
@@ -1889,7 +1889,7 @@
           <p:cNvPr id="1" name="cover-rule">
             <a:extLst xmlns:a="http://schemas.openxmlformats.org/drawingml/2006/main">
               <a:ext uri="{FF2B5EF4-FFF2-40B4-BE49-F238E27FC236}">
-                <a16:creationId xmlns:a16="http://schemas.microsoft.com/office/drawing/2014/main" id="{EB51D5CE-9995-47E1-B258-023B23FBA01D}"/>
+                <a16:creationId xmlns:a16="http://schemas.microsoft.com/office/drawing/2014/main" id="{52BF9CF8-6FAA-4DA0-9F5A-F5C275E0872D}"/>
               </a:ext>
             </a:extLst>
           </p:cNvPr>
@@ -1922,7 +1922,7 @@
           <p:cNvPr id="2" name="cover-ring-1">
             <a:extLst xmlns:a="http://schemas.openxmlformats.org/drawingml/2006/main">
               <a:ext uri="{FF2B5EF4-FFF2-40B4-BE49-F238E27FC236}">
-                <a16:creationId xmlns:a16="http://schemas.microsoft.com/office/drawing/2014/main" id="{5B7E147C-5573-4571-8FFE-BF52D49077F7}"/>
+                <a16:creationId xmlns:a16="http://schemas.microsoft.com/office/drawing/2014/main" id="{6B088163-21CE-4A13-A661-C93624AB92FA}"/>
               </a:ext>
             </a:extLst>
           </p:cNvPr>
@@ -1953,7 +1953,7 @@
           <p:cNvPr id="3" name="cover-ring-2">
             <a:extLst xmlns:a="http://schemas.openxmlformats.org/drawingml/2006/main">
               <a:ext uri="{FF2B5EF4-FFF2-40B4-BE49-F238E27FC236}">
-                <a16:creationId xmlns:a16="http://schemas.microsoft.com/office/drawing/2014/main" id="{C38F460E-F9C1-4EF7-997F-91C7A809DA84}"/>
+                <a16:creationId xmlns:a16="http://schemas.microsoft.com/office/drawing/2014/main" id="{6D38F79E-A42E-42C1-8ED8-E66F0C7445FA}"/>
               </a:ext>
             </a:extLst>
           </p:cNvPr>
@@ -1984,7 +1984,7 @@
           <p:cNvPr id="4" name="cover-core">
             <a:extLst xmlns:a="http://schemas.openxmlformats.org/drawingml/2006/main">
               <a:ext uri="{FF2B5EF4-FFF2-40B4-BE49-F238E27FC236}">
-                <a16:creationId xmlns:a16="http://schemas.microsoft.com/office/drawing/2014/main" id="{A1827D90-10FF-4139-91FE-4E43B9875A24}"/>
+                <a16:creationId xmlns:a16="http://schemas.microsoft.com/office/drawing/2014/main" id="{352BE2BF-3042-4952-A1C5-55B1606E62D4}"/>
               </a:ext>
             </a:extLst>
           </p:cNvPr>
@@ -2017,7 +2017,7 @@
           <p:cNvPr id="5" name="cover-line-1">
             <a:extLst xmlns:a="http://schemas.openxmlformats.org/drawingml/2006/main">
               <a:ext uri="{FF2B5EF4-FFF2-40B4-BE49-F238E27FC236}">
-                <a16:creationId xmlns:a16="http://schemas.microsoft.com/office/drawing/2014/main" id="{103C39C0-D187-4B2C-BF87-81BD11520E3C}"/>
+                <a16:creationId xmlns:a16="http://schemas.microsoft.com/office/drawing/2014/main" id="{9123DC6B-06CC-49FC-B5F7-13773CE19A6D}"/>
               </a:ext>
             </a:extLst>
           </p:cNvPr>
@@ -2048,7 +2048,7 @@
           <p:cNvPr id="6" name="cover-line-2">
             <a:extLst xmlns:a="http://schemas.openxmlformats.org/drawingml/2006/main">
               <a:ext uri="{FF2B5EF4-FFF2-40B4-BE49-F238E27FC236}">
-                <a16:creationId xmlns:a16="http://schemas.microsoft.com/office/drawing/2014/main" id="{9C6E4AF8-C2DF-4C5A-9A4B-B08285FBA805}"/>
+                <a16:creationId xmlns:a16="http://schemas.microsoft.com/office/drawing/2014/main" id="{9D46CB26-BC7E-4D18-96FA-BB53AC34762F}"/>
               </a:ext>
             </a:extLst>
           </p:cNvPr>
@@ -2079,7 +2079,7 @@
           <p:cNvPr id="7" name="cover-eyebrow">
             <a:extLst xmlns:a="http://schemas.openxmlformats.org/drawingml/2006/main">
               <a:ext uri="{FF2B5EF4-FFF2-40B4-BE49-F238E27FC236}">
-                <a16:creationId xmlns:a16="http://schemas.microsoft.com/office/drawing/2014/main" id="{AD146D94-8DE9-4A1F-A54F-C421CC495C17}"/>
+                <a16:creationId xmlns:a16="http://schemas.microsoft.com/office/drawing/2014/main" id="{9C16AF86-4484-4B66-855B-CFDC4FA2F521}"/>
               </a:ext>
             </a:extLst>
           </p:cNvPr>
@@ -2137,7 +2137,7 @@
           <p:cNvPr id="8" name="cover-title">
             <a:extLst xmlns:a="http://schemas.openxmlformats.org/drawingml/2006/main">
               <a:ext uri="{FF2B5EF4-FFF2-40B4-BE49-F238E27FC236}">
-                <a16:creationId xmlns:a16="http://schemas.microsoft.com/office/drawing/2014/main" id="{C5BB205B-01E1-4ED5-AB4A-E1F75A3BAD57}"/>
+                <a16:creationId xmlns:a16="http://schemas.microsoft.com/office/drawing/2014/main" id="{6B0B2BB9-565D-416D-8147-FF1BCC7C98B0}"/>
               </a:ext>
             </a:extLst>
           </p:cNvPr>
@@ -2195,7 +2195,7 @@
           <p:cNvPr id="9" name="cover-subtitle">
             <a:extLst xmlns:a="http://schemas.openxmlformats.org/drawingml/2006/main">
               <a:ext uri="{FF2B5EF4-FFF2-40B4-BE49-F238E27FC236}">
-                <a16:creationId xmlns:a16="http://schemas.microsoft.com/office/drawing/2014/main" id="{DD86F398-6768-49A8-9266-1D24E9ECBCFD}"/>
+                <a16:creationId xmlns:a16="http://schemas.microsoft.com/office/drawing/2014/main" id="{8FB6EB08-563C-4265-A784-762C2E007CD1}"/>
               </a:ext>
             </a:extLst>
           </p:cNvPr>
@@ -2257,7 +2257,7 @@
           <p:cNvPr id="10" name="cover-lead">
             <a:extLst xmlns:a="http://schemas.openxmlformats.org/drawingml/2006/main">
               <a:ext uri="{FF2B5EF4-FFF2-40B4-BE49-F238E27FC236}">
-                <a16:creationId xmlns:a16="http://schemas.microsoft.com/office/drawing/2014/main" id="{88616479-E170-4E63-9890-08EC8AA7912E}"/>
+                <a16:creationId xmlns:a16="http://schemas.microsoft.com/office/drawing/2014/main" id="{B42375F0-206B-418C-8960-BBE48DDEEDC6}"/>
               </a:ext>
             </a:extLst>
           </p:cNvPr>
@@ -2315,7 +2315,7 @@
           <p:cNvPr id="11" name="cover-course">
             <a:extLst xmlns:a="http://schemas.openxmlformats.org/drawingml/2006/main">
               <a:ext uri="{FF2B5EF4-FFF2-40B4-BE49-F238E27FC236}">
-                <a16:creationId xmlns:a16="http://schemas.microsoft.com/office/drawing/2014/main" id="{FFED8073-9ED5-4822-A2D7-20F0C89A9A55}"/>
+                <a16:creationId xmlns:a16="http://schemas.microsoft.com/office/drawing/2014/main" id="{3CFDA47F-77A1-4511-B39D-D7ECDD3DB956}"/>
               </a:ext>
             </a:extLst>
           </p:cNvPr>
@@ -2373,7 +2373,7 @@
           <p:cNvPr id="12" name="cover-id">
             <a:extLst xmlns:a="http://schemas.openxmlformats.org/drawingml/2006/main">
               <a:ext uri="{FF2B5EF4-FFF2-40B4-BE49-F238E27FC236}">
-                <a16:creationId xmlns:a16="http://schemas.microsoft.com/office/drawing/2014/main" id="{4713EA98-AA8A-4685-8ED6-5D157D167644}"/>
+                <a16:creationId xmlns:a16="http://schemas.microsoft.com/office/drawing/2014/main" id="{1D110061-E0CA-4275-8655-7366505FD5DB}"/>
               </a:ext>
             </a:extLst>
           </p:cNvPr>
@@ -2429,7 +2429,7 @@
     </p:spTree>
     <p:extLst>
       <p:ext uri="{BB962C8B-B14F-4D97-AF65-F5344CB8AC3E}">
-        <p14:creationId xmlns:p14="http://schemas.microsoft.com/office/powerpoint/2010/main" val="1757945530"/>
+        <p14:creationId xmlns:p14="http://schemas.microsoft.com/office/powerpoint/2010/main" val="232050607"/>
       </p:ext>
     </p:extLst>
   </p:cSld>
@@ -2460,7 +2460,7 @@
           <p:cNvPr id="1" name="s10-rule">
             <a:extLst xmlns:a="http://schemas.openxmlformats.org/drawingml/2006/main">
               <a:ext uri="{FF2B5EF4-FFF2-40B4-BE49-F238E27FC236}">
-                <a16:creationId xmlns:a16="http://schemas.microsoft.com/office/drawing/2014/main" id="{D8BB8569-CC3E-4808-BC2C-FED64DF6F4CE}"/>
+                <a16:creationId xmlns:a16="http://schemas.microsoft.com/office/drawing/2014/main" id="{7CDB37F3-ECB9-4CB0-9DBA-1308D6089EAE}"/>
               </a:ext>
             </a:extLst>
           </p:cNvPr>
@@ -2493,7 +2493,7 @@
           <p:cNvPr id="2" name="s10-eyebrow">
             <a:extLst xmlns:a="http://schemas.openxmlformats.org/drawingml/2006/main">
               <a:ext uri="{FF2B5EF4-FFF2-40B4-BE49-F238E27FC236}">
-                <a16:creationId xmlns:a16="http://schemas.microsoft.com/office/drawing/2014/main" id="{F5D0372B-A72B-4021-BB2B-0B53CBCFE67C}"/>
+                <a16:creationId xmlns:a16="http://schemas.microsoft.com/office/drawing/2014/main" id="{594BA76B-FF6B-447D-994C-90F91D0FD03A}"/>
               </a:ext>
             </a:extLst>
           </p:cNvPr>
@@ -2551,7 +2551,7 @@
           <p:cNvPr id="3" name="s10-title">
             <a:extLst xmlns:a="http://schemas.openxmlformats.org/drawingml/2006/main">
               <a:ext uri="{FF2B5EF4-FFF2-40B4-BE49-F238E27FC236}">
-                <a16:creationId xmlns:a16="http://schemas.microsoft.com/office/drawing/2014/main" id="{44B0918E-8433-4349-8A4E-21683EF7D8B7}"/>
+                <a16:creationId xmlns:a16="http://schemas.microsoft.com/office/drawing/2014/main" id="{FF725665-0ED5-4F52-91CC-261FE1FEEB02}"/>
               </a:ext>
             </a:extLst>
           </p:cNvPr>
@@ -2609,7 +2609,7 @@
           <p:cNvPr id="4" name="s10-footer">
             <a:extLst xmlns:a="http://schemas.openxmlformats.org/drawingml/2006/main">
               <a:ext uri="{FF2B5EF4-FFF2-40B4-BE49-F238E27FC236}">
-                <a16:creationId xmlns:a16="http://schemas.microsoft.com/office/drawing/2014/main" id="{D072E5D6-3694-44E9-B405-A94338374520}"/>
+                <a16:creationId xmlns:a16="http://schemas.microsoft.com/office/drawing/2014/main" id="{E0EE304B-EE5C-4281-AA01-39D5B79106CF}"/>
               </a:ext>
             </a:extLst>
           </p:cNvPr>
@@ -2640,7 +2640,7 @@
           <p:cNvPr id="5" name="s10-identity">
             <a:extLst xmlns:a="http://schemas.openxmlformats.org/drawingml/2006/main">
               <a:ext uri="{FF2B5EF4-FFF2-40B4-BE49-F238E27FC236}">
-                <a16:creationId xmlns:a16="http://schemas.microsoft.com/office/drawing/2014/main" id="{07545475-D99C-4440-AE26-0D3F31026BE1}"/>
+                <a16:creationId xmlns:a16="http://schemas.microsoft.com/office/drawing/2014/main" id="{43F084E0-A114-4320-9020-331F6F57B4C9}"/>
               </a:ext>
             </a:extLst>
           </p:cNvPr>
@@ -2698,7 +2698,7 @@
           <p:cNvPr id="6" name="practice-circle-0">
             <a:extLst xmlns:a="http://schemas.openxmlformats.org/drawingml/2006/main">
               <a:ext uri="{FF2B5EF4-FFF2-40B4-BE49-F238E27FC236}">
-                <a16:creationId xmlns:a16="http://schemas.microsoft.com/office/drawing/2014/main" id="{3CB36B4A-D174-4C9D-A7D7-29381447F03F}"/>
+                <a16:creationId xmlns:a16="http://schemas.microsoft.com/office/drawing/2014/main" id="{2A7479FA-6771-4C59-81DC-33D3A5F22604}"/>
               </a:ext>
             </a:extLst>
           </p:cNvPr>
@@ -2731,7 +2731,7 @@
           <p:cNvPr id="7" name="practice-number-0">
             <a:extLst xmlns:a="http://schemas.openxmlformats.org/drawingml/2006/main">
               <a:ext uri="{FF2B5EF4-FFF2-40B4-BE49-F238E27FC236}">
-                <a16:creationId xmlns:a16="http://schemas.microsoft.com/office/drawing/2014/main" id="{BF13C60E-15E5-4B49-988D-A2ECD2FD9B17}"/>
+                <a16:creationId xmlns:a16="http://schemas.microsoft.com/office/drawing/2014/main" id="{EB38649A-548F-4E35-98A4-9F2CACEC5406}"/>
               </a:ext>
             </a:extLst>
           </p:cNvPr>
@@ -2789,7 +2789,7 @@
           <p:cNvPr id="8" name="practice-item-0">
             <a:extLst xmlns:a="http://schemas.openxmlformats.org/drawingml/2006/main">
               <a:ext uri="{FF2B5EF4-FFF2-40B4-BE49-F238E27FC236}">
-                <a16:creationId xmlns:a16="http://schemas.microsoft.com/office/drawing/2014/main" id="{F2C08DC6-C2F9-4F79-ABF1-855BBD4A69B2}"/>
+                <a16:creationId xmlns:a16="http://schemas.microsoft.com/office/drawing/2014/main" id="{7EE4628C-1381-4CEE-8548-DE8649F27D9A}"/>
               </a:ext>
             </a:extLst>
           </p:cNvPr>
@@ -2853,7 +2853,7 @@
           <p:cNvPr id="9" name="practice-connector-0">
             <a:extLst xmlns:a="http://schemas.openxmlformats.org/drawingml/2006/main">
               <a:ext uri="{FF2B5EF4-FFF2-40B4-BE49-F238E27FC236}">
-                <a16:creationId xmlns:a16="http://schemas.microsoft.com/office/drawing/2014/main" id="{DB7E56E2-8DA4-4F2C-B870-12ABDB6945CC}"/>
+                <a16:creationId xmlns:a16="http://schemas.microsoft.com/office/drawing/2014/main" id="{B4A6F457-EEE3-4FB9-8EB7-5F8212858479}"/>
               </a:ext>
             </a:extLst>
           </p:cNvPr>
@@ -2884,7 +2884,7 @@
           <p:cNvPr id="10" name="practice-circle-1">
             <a:extLst xmlns:a="http://schemas.openxmlformats.org/drawingml/2006/main">
               <a:ext uri="{FF2B5EF4-FFF2-40B4-BE49-F238E27FC236}">
-                <a16:creationId xmlns:a16="http://schemas.microsoft.com/office/drawing/2014/main" id="{B0106055-EE39-4E66-BDC5-46799FCAB5BB}"/>
+                <a16:creationId xmlns:a16="http://schemas.microsoft.com/office/drawing/2014/main" id="{CF195665-76EB-4903-A34A-AFD48BDE512E}"/>
               </a:ext>
             </a:extLst>
           </p:cNvPr>
@@ -2917,7 +2917,7 @@
           <p:cNvPr id="11" name="practice-number-1">
             <a:extLst xmlns:a="http://schemas.openxmlformats.org/drawingml/2006/main">
               <a:ext uri="{FF2B5EF4-FFF2-40B4-BE49-F238E27FC236}">
-                <a16:creationId xmlns:a16="http://schemas.microsoft.com/office/drawing/2014/main" id="{9A11C6C4-AC0B-4A98-B23D-512DF7F861E2}"/>
+                <a16:creationId xmlns:a16="http://schemas.microsoft.com/office/drawing/2014/main" id="{A9125940-B602-4950-A8D7-BAA9F01DFAD7}"/>
               </a:ext>
             </a:extLst>
           </p:cNvPr>
@@ -2975,7 +2975,7 @@
           <p:cNvPr id="12" name="practice-item-1">
             <a:extLst xmlns:a="http://schemas.openxmlformats.org/drawingml/2006/main">
               <a:ext uri="{FF2B5EF4-FFF2-40B4-BE49-F238E27FC236}">
-                <a16:creationId xmlns:a16="http://schemas.microsoft.com/office/drawing/2014/main" id="{DCE6DA1B-5339-4CA9-8379-BB3A8A76B2F2}"/>
+                <a16:creationId xmlns:a16="http://schemas.microsoft.com/office/drawing/2014/main" id="{D5BA5E48-42E9-4BDE-A97D-F1E115B8D9E0}"/>
               </a:ext>
             </a:extLst>
           </p:cNvPr>
@@ -3039,7 +3039,7 @@
           <p:cNvPr id="13" name="practice-connector-1">
             <a:extLst xmlns:a="http://schemas.openxmlformats.org/drawingml/2006/main">
               <a:ext uri="{FF2B5EF4-FFF2-40B4-BE49-F238E27FC236}">
-                <a16:creationId xmlns:a16="http://schemas.microsoft.com/office/drawing/2014/main" id="{8DCA4E42-3BE8-4EA9-B017-833AB19E1C8F}"/>
+                <a16:creationId xmlns:a16="http://schemas.microsoft.com/office/drawing/2014/main" id="{869599A1-CDC2-4286-B2E5-51CDA9439572}"/>
               </a:ext>
             </a:extLst>
           </p:cNvPr>
@@ -3070,7 +3070,7 @@
           <p:cNvPr id="14" name="practice-circle-2">
             <a:extLst xmlns:a="http://schemas.openxmlformats.org/drawingml/2006/main">
               <a:ext uri="{FF2B5EF4-FFF2-40B4-BE49-F238E27FC236}">
-                <a16:creationId xmlns:a16="http://schemas.microsoft.com/office/drawing/2014/main" id="{EA212288-EF3C-480B-922D-D4742418F06D}"/>
+                <a16:creationId xmlns:a16="http://schemas.microsoft.com/office/drawing/2014/main" id="{91B61C5D-A4BE-46FE-94AE-90A9118E9DEE}"/>
               </a:ext>
             </a:extLst>
           </p:cNvPr>
@@ -3103,7 +3103,7 @@
           <p:cNvPr id="15" name="practice-number-2">
             <a:extLst xmlns:a="http://schemas.openxmlformats.org/drawingml/2006/main">
               <a:ext uri="{FF2B5EF4-FFF2-40B4-BE49-F238E27FC236}">
-                <a16:creationId xmlns:a16="http://schemas.microsoft.com/office/drawing/2014/main" id="{4DF4738E-D130-4AB7-AE66-E8561A83D24C}"/>
+                <a16:creationId xmlns:a16="http://schemas.microsoft.com/office/drawing/2014/main" id="{50794A06-7A68-4466-BEE9-C743C1515202}"/>
               </a:ext>
             </a:extLst>
           </p:cNvPr>
@@ -3161,7 +3161,7 @@
           <p:cNvPr id="16" name="practice-item-2">
             <a:extLst xmlns:a="http://schemas.openxmlformats.org/drawingml/2006/main">
               <a:ext uri="{FF2B5EF4-FFF2-40B4-BE49-F238E27FC236}">
-                <a16:creationId xmlns:a16="http://schemas.microsoft.com/office/drawing/2014/main" id="{99DDE7DF-1821-4ADF-9217-0305E7C0FC21}"/>
+                <a16:creationId xmlns:a16="http://schemas.microsoft.com/office/drawing/2014/main" id="{6809733A-F882-4D96-ADDF-E6A791C7EC1E}"/>
               </a:ext>
             </a:extLst>
           </p:cNvPr>
@@ -3223,7 +3223,7 @@
     </p:spTree>
     <p:extLst>
       <p:ext uri="{BB962C8B-B14F-4D97-AF65-F5344CB8AC3E}">
-        <p14:creationId xmlns:p14="http://schemas.microsoft.com/office/powerpoint/2010/main" val="701497796"/>
+        <p14:creationId xmlns:p14="http://schemas.microsoft.com/office/powerpoint/2010/main" val="669476249"/>
       </p:ext>
     </p:extLst>
   </p:cSld>
@@ -3254,7 +3254,7 @@
           <p:cNvPr id="1" name="s11-rule">
             <a:extLst xmlns:a="http://schemas.openxmlformats.org/drawingml/2006/main">
               <a:ext uri="{FF2B5EF4-FFF2-40B4-BE49-F238E27FC236}">
-                <a16:creationId xmlns:a16="http://schemas.microsoft.com/office/drawing/2014/main" id="{4AF032BB-B557-47E3-9A39-663385A86FCD}"/>
+                <a16:creationId xmlns:a16="http://schemas.microsoft.com/office/drawing/2014/main" id="{8ECB416E-8513-43CE-A2FB-5A3E24D3EAFC}"/>
               </a:ext>
             </a:extLst>
           </p:cNvPr>
@@ -3287,7 +3287,7 @@
           <p:cNvPr id="2" name="s11-eyebrow">
             <a:extLst xmlns:a="http://schemas.openxmlformats.org/drawingml/2006/main">
               <a:ext uri="{FF2B5EF4-FFF2-40B4-BE49-F238E27FC236}">
-                <a16:creationId xmlns:a16="http://schemas.microsoft.com/office/drawing/2014/main" id="{BCC2C76E-42A3-499A-8D60-41ED99D9FA9E}"/>
+                <a16:creationId xmlns:a16="http://schemas.microsoft.com/office/drawing/2014/main" id="{B0A9D73C-4DEA-4A7D-BAC2-D3B32CE6ACAA}"/>
               </a:ext>
             </a:extLst>
           </p:cNvPr>
@@ -3345,7 +3345,7 @@
           <p:cNvPr id="3" name="s11-title">
             <a:extLst xmlns:a="http://schemas.openxmlformats.org/drawingml/2006/main">
               <a:ext uri="{FF2B5EF4-FFF2-40B4-BE49-F238E27FC236}">
-                <a16:creationId xmlns:a16="http://schemas.microsoft.com/office/drawing/2014/main" id="{C8BF3063-527E-4648-BF79-E3B10E9FA3A0}"/>
+                <a16:creationId xmlns:a16="http://schemas.microsoft.com/office/drawing/2014/main" id="{5552CD9F-3D8C-4AF7-A8CF-ACD65F0ACC65}"/>
               </a:ext>
             </a:extLst>
           </p:cNvPr>
@@ -3403,7 +3403,7 @@
           <p:cNvPr id="4" name="s11-footer">
             <a:extLst xmlns:a="http://schemas.openxmlformats.org/drawingml/2006/main">
               <a:ext uri="{FF2B5EF4-FFF2-40B4-BE49-F238E27FC236}">
-                <a16:creationId xmlns:a16="http://schemas.microsoft.com/office/drawing/2014/main" id="{D466E53D-1367-450F-909C-498E27B00B1F}"/>
+                <a16:creationId xmlns:a16="http://schemas.microsoft.com/office/drawing/2014/main" id="{46908F47-8BD1-4353-9713-F3B3863B83F8}"/>
               </a:ext>
             </a:extLst>
           </p:cNvPr>
@@ -3434,7 +3434,7 @@
           <p:cNvPr id="5" name="s11-identity">
             <a:extLst xmlns:a="http://schemas.openxmlformats.org/drawingml/2006/main">
               <a:ext uri="{FF2B5EF4-FFF2-40B4-BE49-F238E27FC236}">
-                <a16:creationId xmlns:a16="http://schemas.microsoft.com/office/drawing/2014/main" id="{65570866-CE16-4171-B38D-24C4BF5DB509}"/>
+                <a16:creationId xmlns:a16="http://schemas.microsoft.com/office/drawing/2014/main" id="{9CE1D2D7-8361-46D3-98CB-D3FF50195DDA}"/>
               </a:ext>
             </a:extLst>
           </p:cNvPr>
@@ -3492,7 +3492,7 @@
           <p:cNvPr id="6" name="recap-circle-0">
             <a:extLst xmlns:a="http://schemas.openxmlformats.org/drawingml/2006/main">
               <a:ext uri="{FF2B5EF4-FFF2-40B4-BE49-F238E27FC236}">
-                <a16:creationId xmlns:a16="http://schemas.microsoft.com/office/drawing/2014/main" id="{7BAAB69C-5714-4630-A204-C24D10EED94A}"/>
+                <a16:creationId xmlns:a16="http://schemas.microsoft.com/office/drawing/2014/main" id="{E60A11B7-D354-4CB7-8B87-E71BB69ECD06}"/>
               </a:ext>
             </a:extLst>
           </p:cNvPr>
@@ -3525,7 +3525,7 @@
           <p:cNvPr id="7" name="recap-number-0">
             <a:extLst xmlns:a="http://schemas.openxmlformats.org/drawingml/2006/main">
               <a:ext uri="{FF2B5EF4-FFF2-40B4-BE49-F238E27FC236}">
-                <a16:creationId xmlns:a16="http://schemas.microsoft.com/office/drawing/2014/main" id="{01D59162-6381-430C-B28A-FDBF3B591806}"/>
+                <a16:creationId xmlns:a16="http://schemas.microsoft.com/office/drawing/2014/main" id="{CEB67531-DC48-4760-AD1A-0BD44B07DB9B}"/>
               </a:ext>
             </a:extLst>
           </p:cNvPr>
@@ -3583,7 +3583,7 @@
           <p:cNvPr id="8" name="recap-item-0">
             <a:extLst xmlns:a="http://schemas.openxmlformats.org/drawingml/2006/main">
               <a:ext uri="{FF2B5EF4-FFF2-40B4-BE49-F238E27FC236}">
-                <a16:creationId xmlns:a16="http://schemas.microsoft.com/office/drawing/2014/main" id="{8250C9E1-B4C1-48C3-BD1D-4422C6DBD2F3}"/>
+                <a16:creationId xmlns:a16="http://schemas.microsoft.com/office/drawing/2014/main" id="{BFCB3BDA-E409-4942-8C9E-9111B2C58CD0}"/>
               </a:ext>
             </a:extLst>
           </p:cNvPr>
@@ -3647,7 +3647,7 @@
           <p:cNvPr id="9" name="recap-connector-0">
             <a:extLst xmlns:a="http://schemas.openxmlformats.org/drawingml/2006/main">
               <a:ext uri="{FF2B5EF4-FFF2-40B4-BE49-F238E27FC236}">
-                <a16:creationId xmlns:a16="http://schemas.microsoft.com/office/drawing/2014/main" id="{ACDF3A5E-26ED-426B-B6AC-6606405EA624}"/>
+                <a16:creationId xmlns:a16="http://schemas.microsoft.com/office/drawing/2014/main" id="{31540F05-0BD5-4FFC-84DF-A5B8DE72A1F7}"/>
               </a:ext>
             </a:extLst>
           </p:cNvPr>
@@ -3678,7 +3678,7 @@
           <p:cNvPr id="10" name="recap-circle-1">
             <a:extLst xmlns:a="http://schemas.openxmlformats.org/drawingml/2006/main">
               <a:ext uri="{FF2B5EF4-FFF2-40B4-BE49-F238E27FC236}">
-                <a16:creationId xmlns:a16="http://schemas.microsoft.com/office/drawing/2014/main" id="{82AC343D-FAD5-4CA1-B1D6-E68CC1106EDA}"/>
+                <a16:creationId xmlns:a16="http://schemas.microsoft.com/office/drawing/2014/main" id="{DBFC93F7-EDD8-4991-B501-1F963BF49D77}"/>
               </a:ext>
             </a:extLst>
           </p:cNvPr>
@@ -3711,7 +3711,7 @@
           <p:cNvPr id="11" name="recap-number-1">
             <a:extLst xmlns:a="http://schemas.openxmlformats.org/drawingml/2006/main">
               <a:ext uri="{FF2B5EF4-FFF2-40B4-BE49-F238E27FC236}">
-                <a16:creationId xmlns:a16="http://schemas.microsoft.com/office/drawing/2014/main" id="{30BC2339-F47C-42AD-9F12-1B90DA6C35D2}"/>
+                <a16:creationId xmlns:a16="http://schemas.microsoft.com/office/drawing/2014/main" id="{A26890D6-002E-4583-B248-26287173EFCA}"/>
               </a:ext>
             </a:extLst>
           </p:cNvPr>
@@ -3769,7 +3769,7 @@
           <p:cNvPr id="12" name="recap-item-1">
             <a:extLst xmlns:a="http://schemas.openxmlformats.org/drawingml/2006/main">
               <a:ext uri="{FF2B5EF4-FFF2-40B4-BE49-F238E27FC236}">
-                <a16:creationId xmlns:a16="http://schemas.microsoft.com/office/drawing/2014/main" id="{ECE45218-CCD7-44DC-A1D4-D232979B47ED}"/>
+                <a16:creationId xmlns:a16="http://schemas.microsoft.com/office/drawing/2014/main" id="{1769A89A-04BD-44C5-BB36-0253AA2267F9}"/>
               </a:ext>
             </a:extLst>
           </p:cNvPr>
@@ -3833,7 +3833,7 @@
           <p:cNvPr id="13" name="recap-connector-1">
             <a:extLst xmlns:a="http://schemas.openxmlformats.org/drawingml/2006/main">
               <a:ext uri="{FF2B5EF4-FFF2-40B4-BE49-F238E27FC236}">
-                <a16:creationId xmlns:a16="http://schemas.microsoft.com/office/drawing/2014/main" id="{1D1163DA-48A2-433B-B699-2C15C87666AC}"/>
+                <a16:creationId xmlns:a16="http://schemas.microsoft.com/office/drawing/2014/main" id="{2B12CE4F-104E-41DB-B142-8447CD8ABDE4}"/>
               </a:ext>
             </a:extLst>
           </p:cNvPr>
@@ -3864,7 +3864,7 @@
           <p:cNvPr id="14" name="recap-circle-2">
             <a:extLst xmlns:a="http://schemas.openxmlformats.org/drawingml/2006/main">
               <a:ext uri="{FF2B5EF4-FFF2-40B4-BE49-F238E27FC236}">
-                <a16:creationId xmlns:a16="http://schemas.microsoft.com/office/drawing/2014/main" id="{DE6088C5-7895-410E-B461-17B6D26CC63A}"/>
+                <a16:creationId xmlns:a16="http://schemas.microsoft.com/office/drawing/2014/main" id="{CD0CB120-1DB9-420E-B558-B214D6546786}"/>
               </a:ext>
             </a:extLst>
           </p:cNvPr>
@@ -3897,7 +3897,7 @@
           <p:cNvPr id="15" name="recap-number-2">
             <a:extLst xmlns:a="http://schemas.openxmlformats.org/drawingml/2006/main">
               <a:ext uri="{FF2B5EF4-FFF2-40B4-BE49-F238E27FC236}">
-                <a16:creationId xmlns:a16="http://schemas.microsoft.com/office/drawing/2014/main" id="{5F9655BD-3288-4121-ACC5-C90CECE5AE75}"/>
+                <a16:creationId xmlns:a16="http://schemas.microsoft.com/office/drawing/2014/main" id="{0A4154D2-306A-4454-B141-E364B1354CE5}"/>
               </a:ext>
             </a:extLst>
           </p:cNvPr>
@@ -3955,7 +3955,7 @@
           <p:cNvPr id="16" name="recap-item-2">
             <a:extLst xmlns:a="http://schemas.openxmlformats.org/drawingml/2006/main">
               <a:ext uri="{FF2B5EF4-FFF2-40B4-BE49-F238E27FC236}">
-                <a16:creationId xmlns:a16="http://schemas.microsoft.com/office/drawing/2014/main" id="{88A5746C-92CC-4690-86E8-2650B0A4FF4E}"/>
+                <a16:creationId xmlns:a16="http://schemas.microsoft.com/office/drawing/2014/main" id="{A31E3083-7EAC-425B-83E8-948FFD563654}"/>
               </a:ext>
             </a:extLst>
           </p:cNvPr>
@@ -4017,7 +4017,7 @@
     </p:spTree>
     <p:extLst>
       <p:ext uri="{BB962C8B-B14F-4D97-AF65-F5344CB8AC3E}">
-        <p14:creationId xmlns:p14="http://schemas.microsoft.com/office/powerpoint/2010/main" val="2041708223"/>
+        <p14:creationId xmlns:p14="http://schemas.microsoft.com/office/powerpoint/2010/main" val="312450034"/>
       </p:ext>
     </p:extLst>
   </p:cSld>
@@ -4048,7 +4048,7 @@
           <p:cNvPr id="1" name="s12-rule">
             <a:extLst xmlns:a="http://schemas.openxmlformats.org/drawingml/2006/main">
               <a:ext uri="{FF2B5EF4-FFF2-40B4-BE49-F238E27FC236}">
-                <a16:creationId xmlns:a16="http://schemas.microsoft.com/office/drawing/2014/main" id="{878F6390-7B56-4FB6-B570-B6C9BFF3E710}"/>
+                <a16:creationId xmlns:a16="http://schemas.microsoft.com/office/drawing/2014/main" id="{699ADB3A-8114-4127-8B59-19F4CA9301AD}"/>
               </a:ext>
             </a:extLst>
           </p:cNvPr>
@@ -4081,7 +4081,7 @@
           <p:cNvPr id="2" name="s12-eyebrow">
             <a:extLst xmlns:a="http://schemas.openxmlformats.org/drawingml/2006/main">
               <a:ext uri="{FF2B5EF4-FFF2-40B4-BE49-F238E27FC236}">
-                <a16:creationId xmlns:a16="http://schemas.microsoft.com/office/drawing/2014/main" id="{36EBCB7A-DBDF-43AE-B564-B0D2999F1B02}"/>
+                <a16:creationId xmlns:a16="http://schemas.microsoft.com/office/drawing/2014/main" id="{BF772DA3-4FF8-495B-A493-36694177B541}"/>
               </a:ext>
             </a:extLst>
           </p:cNvPr>
@@ -4139,7 +4139,7 @@
           <p:cNvPr id="3" name="s12-title">
             <a:extLst xmlns:a="http://schemas.openxmlformats.org/drawingml/2006/main">
               <a:ext uri="{FF2B5EF4-FFF2-40B4-BE49-F238E27FC236}">
-                <a16:creationId xmlns:a16="http://schemas.microsoft.com/office/drawing/2014/main" id="{D519B7A2-DF15-4E97-90BF-94AF200C5DBC}"/>
+                <a16:creationId xmlns:a16="http://schemas.microsoft.com/office/drawing/2014/main" id="{3A7ADA82-4CF2-4E99-8D7B-E16C063F9E40}"/>
               </a:ext>
             </a:extLst>
           </p:cNvPr>
@@ -4197,7 +4197,7 @@
           <p:cNvPr id="4" name="s12-footer">
             <a:extLst xmlns:a="http://schemas.openxmlformats.org/drawingml/2006/main">
               <a:ext uri="{FF2B5EF4-FFF2-40B4-BE49-F238E27FC236}">
-                <a16:creationId xmlns:a16="http://schemas.microsoft.com/office/drawing/2014/main" id="{FD794E89-C3CA-49C5-AC8F-FBBBA7B0416C}"/>
+                <a16:creationId xmlns:a16="http://schemas.microsoft.com/office/drawing/2014/main" id="{64E7F268-8B1F-4B74-9DDA-434092CE75B5}"/>
               </a:ext>
             </a:extLst>
           </p:cNvPr>
@@ -4228,7 +4228,7 @@
           <p:cNvPr id="5" name="s12-identity">
             <a:extLst xmlns:a="http://schemas.openxmlformats.org/drawingml/2006/main">
               <a:ext uri="{FF2B5EF4-FFF2-40B4-BE49-F238E27FC236}">
-                <a16:creationId xmlns:a16="http://schemas.microsoft.com/office/drawing/2014/main" id="{2249BED8-AD74-45B2-A783-BDA82C56935A}"/>
+                <a16:creationId xmlns:a16="http://schemas.microsoft.com/office/drawing/2014/main" id="{5907A580-E74D-412A-8018-446CF27B69E9}"/>
               </a:ext>
             </a:extLst>
           </p:cNvPr>
@@ -4286,7 +4286,7 @@
           <p:cNvPr id="6" name="source-0">
             <a:extLst xmlns:a="http://schemas.openxmlformats.org/drawingml/2006/main">
               <a:ext uri="{FF2B5EF4-FFF2-40B4-BE49-F238E27FC236}">
-                <a16:creationId xmlns:a16="http://schemas.microsoft.com/office/drawing/2014/main" id="{68F603D7-8420-4A72-940E-0631B353AF4D}"/>
+                <a16:creationId xmlns:a16="http://schemas.microsoft.com/office/drawing/2014/main" id="{29488CA5-8C7B-4CE2-B776-A203846853E9}"/>
               </a:ext>
             </a:extLst>
           </p:cNvPr>
@@ -4350,7 +4350,7 @@
           <p:cNvPr id="7" name="source-1">
             <a:extLst xmlns:a="http://schemas.openxmlformats.org/drawingml/2006/main">
               <a:ext uri="{FF2B5EF4-FFF2-40B4-BE49-F238E27FC236}">
-                <a16:creationId xmlns:a16="http://schemas.microsoft.com/office/drawing/2014/main" id="{AB6BEED8-8C19-405B-AD5D-7AB9B40794E8}"/>
+                <a16:creationId xmlns:a16="http://schemas.microsoft.com/office/drawing/2014/main" id="{B1705C80-A1CA-4B30-BDA3-96D28010B9A7}"/>
               </a:ext>
             </a:extLst>
           </p:cNvPr>
@@ -4414,7 +4414,7 @@
           <p:cNvPr id="8" name="s12-takeaway-rule">
             <a:extLst xmlns:a="http://schemas.openxmlformats.org/drawingml/2006/main">
               <a:ext uri="{FF2B5EF4-FFF2-40B4-BE49-F238E27FC236}">
-                <a16:creationId xmlns:a16="http://schemas.microsoft.com/office/drawing/2014/main" id="{6BD3C839-2C5D-40DA-88FC-AFCD47097243}"/>
+                <a16:creationId xmlns:a16="http://schemas.microsoft.com/office/drawing/2014/main" id="{6492FFE7-2DA5-46A2-A646-D5E9E29F82FB}"/>
               </a:ext>
             </a:extLst>
           </p:cNvPr>
@@ -4447,7 +4447,7 @@
           <p:cNvPr id="9" name="s12-takeaway">
             <a:extLst xmlns:a="http://schemas.openxmlformats.org/drawingml/2006/main">
               <a:ext uri="{FF2B5EF4-FFF2-40B4-BE49-F238E27FC236}">
-                <a16:creationId xmlns:a16="http://schemas.microsoft.com/office/drawing/2014/main" id="{0187AE5E-A91A-49F8-BCA2-20A6360CB9FD}"/>
+                <a16:creationId xmlns:a16="http://schemas.microsoft.com/office/drawing/2014/main" id="{560F2A66-5A74-4F08-BA83-351BA8FE279C}"/>
               </a:ext>
             </a:extLst>
           </p:cNvPr>
@@ -4472,7 +4472,7 @@
         </p:spPr>
         <p:txBody>
           <a:bodyPr xmlns:a="http://schemas.openxmlformats.org/drawingml/2006/main" lIns="0" tIns="0" rIns="0" bIns="0" anchor="ctr">
-            <a:normAutofit fontScale="100000"/>
+            <a:normAutofit fontScale="95911"/>
           </a:bodyPr>
           <a:lstStyle xmlns:a="http://schemas.openxmlformats.org/drawingml/2006/main"/>
           <a:p xmlns:a="http://schemas.openxmlformats.org/drawingml/2006/main">
@@ -4495,7 +4495,7 @@
                 <a:ea typeface="PingFang SC"/>
                 <a:cs typeface="PingFang SC"/>
               </a:rPr>
-              <a:t>公开幻灯片只使用课程原创文字与原生图形；完整论证、链接和事实边界请见本节讲义。</a:t>
+              <a:t>课程精编页用于讲授主线；播放器中的“原课件”模式保留团队 PowerPoint 精选页、真实图片和可播放视频。</a:t>
             </a:r>
           </a:p>
         </p:txBody>
@@ -4503,7 +4503,7 @@
     </p:spTree>
     <p:extLst>
       <p:ext uri="{BB962C8B-B14F-4D97-AF65-F5344CB8AC3E}">
-        <p14:creationId xmlns:p14="http://schemas.microsoft.com/office/powerpoint/2010/main" val="345105269"/>
+        <p14:creationId xmlns:p14="http://schemas.microsoft.com/office/powerpoint/2010/main" val="1816446720"/>
       </p:ext>
     </p:extLst>
   </p:cSld>
@@ -4534,7 +4534,7 @@
           <p:cNvPr id="1" name="s2-rule">
             <a:extLst xmlns:a="http://schemas.openxmlformats.org/drawingml/2006/main">
               <a:ext uri="{FF2B5EF4-FFF2-40B4-BE49-F238E27FC236}">
-                <a16:creationId xmlns:a16="http://schemas.microsoft.com/office/drawing/2014/main" id="{428375CE-67D4-4E37-A354-59C8977C45C7}"/>
+                <a16:creationId xmlns:a16="http://schemas.microsoft.com/office/drawing/2014/main" id="{CCEA6878-E8D3-4105-91DA-F3C8F1B90775}"/>
               </a:ext>
             </a:extLst>
           </p:cNvPr>
@@ -4567,7 +4567,7 @@
           <p:cNvPr id="2" name="s2-eyebrow">
             <a:extLst xmlns:a="http://schemas.openxmlformats.org/drawingml/2006/main">
               <a:ext uri="{FF2B5EF4-FFF2-40B4-BE49-F238E27FC236}">
-                <a16:creationId xmlns:a16="http://schemas.microsoft.com/office/drawing/2014/main" id="{AD10E74B-9D2F-4AF8-8B0E-B1E67276338E}"/>
+                <a16:creationId xmlns:a16="http://schemas.microsoft.com/office/drawing/2014/main" id="{C2061D56-178E-4D17-B630-805A9DD4DDB5}"/>
               </a:ext>
             </a:extLst>
           </p:cNvPr>
@@ -4625,7 +4625,7 @@
           <p:cNvPr id="3" name="s2-title">
             <a:extLst xmlns:a="http://schemas.openxmlformats.org/drawingml/2006/main">
               <a:ext uri="{FF2B5EF4-FFF2-40B4-BE49-F238E27FC236}">
-                <a16:creationId xmlns:a16="http://schemas.microsoft.com/office/drawing/2014/main" id="{C966A8CB-7939-46AE-AAD1-E9749074A874}"/>
+                <a16:creationId xmlns:a16="http://schemas.microsoft.com/office/drawing/2014/main" id="{8987AAF8-321F-4278-90CE-0870CE35A162}"/>
               </a:ext>
             </a:extLst>
           </p:cNvPr>
@@ -4683,7 +4683,7 @@
           <p:cNvPr id="4" name="s2-footer">
             <a:extLst xmlns:a="http://schemas.openxmlformats.org/drawingml/2006/main">
               <a:ext uri="{FF2B5EF4-FFF2-40B4-BE49-F238E27FC236}">
-                <a16:creationId xmlns:a16="http://schemas.microsoft.com/office/drawing/2014/main" id="{80FBBBFC-6EE1-4DF2-A6DB-693F6C6851E5}"/>
+                <a16:creationId xmlns:a16="http://schemas.microsoft.com/office/drawing/2014/main" id="{66D3DC86-A1AF-4CAB-BAED-F45BA147016F}"/>
               </a:ext>
             </a:extLst>
           </p:cNvPr>
@@ -4714,7 +4714,7 @@
           <p:cNvPr id="5" name="s2-identity">
             <a:extLst xmlns:a="http://schemas.openxmlformats.org/drawingml/2006/main">
               <a:ext uri="{FF2B5EF4-FFF2-40B4-BE49-F238E27FC236}">
-                <a16:creationId xmlns:a16="http://schemas.microsoft.com/office/drawing/2014/main" id="{9A3D14A8-EB00-4C5A-9446-8E7D8334899E}"/>
+                <a16:creationId xmlns:a16="http://schemas.microsoft.com/office/drawing/2014/main" id="{B7DD0BCC-7331-4101-80ED-6156A8294BE7}"/>
               </a:ext>
             </a:extLst>
           </p:cNvPr>
@@ -4772,7 +4772,7 @@
           <p:cNvPr id="6" name="objective-1">
             <a:extLst xmlns:a="http://schemas.openxmlformats.org/drawingml/2006/main">
               <a:ext uri="{FF2B5EF4-FFF2-40B4-BE49-F238E27FC236}">
-                <a16:creationId xmlns:a16="http://schemas.microsoft.com/office/drawing/2014/main" id="{6D71889D-3C68-48C5-8017-4DC7C68A4803}"/>
+                <a16:creationId xmlns:a16="http://schemas.microsoft.com/office/drawing/2014/main" id="{F3E2DBAA-E0F2-4A1B-B598-AD2D15F72C1F}"/>
               </a:ext>
             </a:extLst>
           </p:cNvPr>
@@ -4859,7 +4859,7 @@
           <p:cNvPr id="7" name="objective-2">
             <a:extLst xmlns:a="http://schemas.openxmlformats.org/drawingml/2006/main">
               <a:ext uri="{FF2B5EF4-FFF2-40B4-BE49-F238E27FC236}">
-                <a16:creationId xmlns:a16="http://schemas.microsoft.com/office/drawing/2014/main" id="{BDD97A43-0AF5-4EDB-92AE-838CA9F3ED4D}"/>
+                <a16:creationId xmlns:a16="http://schemas.microsoft.com/office/drawing/2014/main" id="{5553DB64-9CA7-483F-89D3-267780AE7196}"/>
               </a:ext>
             </a:extLst>
           </p:cNvPr>
@@ -4946,7 +4946,7 @@
           <p:cNvPr id="8" name="objective-3">
             <a:extLst xmlns:a="http://schemas.openxmlformats.org/drawingml/2006/main">
               <a:ext uri="{FF2B5EF4-FFF2-40B4-BE49-F238E27FC236}">
-                <a16:creationId xmlns:a16="http://schemas.microsoft.com/office/drawing/2014/main" id="{40A7F8AB-0BA7-4F1F-8055-92CF3A8A4167}"/>
+                <a16:creationId xmlns:a16="http://schemas.microsoft.com/office/drawing/2014/main" id="{210E1034-57DE-41C9-BAD6-D176CE263DA5}"/>
               </a:ext>
             </a:extLst>
           </p:cNvPr>
@@ -5033,7 +5033,7 @@
           <p:cNvPr id="9" name="objective-4">
             <a:extLst xmlns:a="http://schemas.openxmlformats.org/drawingml/2006/main">
               <a:ext uri="{FF2B5EF4-FFF2-40B4-BE49-F238E27FC236}">
-                <a16:creationId xmlns:a16="http://schemas.microsoft.com/office/drawing/2014/main" id="{76F4CB2E-AE3D-4CE6-A88D-4BF9A8756888}"/>
+                <a16:creationId xmlns:a16="http://schemas.microsoft.com/office/drawing/2014/main" id="{63F78ADC-459C-4510-B9D0-AF81D3F13199}"/>
               </a:ext>
             </a:extLst>
           </p:cNvPr>
@@ -5118,7 +5118,7 @@
     </p:spTree>
     <p:extLst>
       <p:ext uri="{BB962C8B-B14F-4D97-AF65-F5344CB8AC3E}">
-        <p14:creationId xmlns:p14="http://schemas.microsoft.com/office/powerpoint/2010/main" val="296120658"/>
+        <p14:creationId xmlns:p14="http://schemas.microsoft.com/office/powerpoint/2010/main" val="312387479"/>
       </p:ext>
     </p:extLst>
   </p:cSld>
@@ -5149,7 +5149,7 @@
           <p:cNvPr id="1" name="s3-rule">
             <a:extLst xmlns:a="http://schemas.openxmlformats.org/drawingml/2006/main">
               <a:ext uri="{FF2B5EF4-FFF2-40B4-BE49-F238E27FC236}">
-                <a16:creationId xmlns:a16="http://schemas.microsoft.com/office/drawing/2014/main" id="{2CEF9958-C4FE-4ECF-B694-5B20B569FD94}"/>
+                <a16:creationId xmlns:a16="http://schemas.microsoft.com/office/drawing/2014/main" id="{9C767A09-7340-4E43-9172-9F5E1828BBFA}"/>
               </a:ext>
             </a:extLst>
           </p:cNvPr>
@@ -5182,7 +5182,7 @@
           <p:cNvPr id="2" name="s3-eyebrow">
             <a:extLst xmlns:a="http://schemas.openxmlformats.org/drawingml/2006/main">
               <a:ext uri="{FF2B5EF4-FFF2-40B4-BE49-F238E27FC236}">
-                <a16:creationId xmlns:a16="http://schemas.microsoft.com/office/drawing/2014/main" id="{77E0947A-BB90-41B7-8563-D3F152144CED}"/>
+                <a16:creationId xmlns:a16="http://schemas.microsoft.com/office/drawing/2014/main" id="{7093CDE4-1D6F-40A4-B8D8-B570927B8026}"/>
               </a:ext>
             </a:extLst>
           </p:cNvPr>
@@ -5240,7 +5240,7 @@
           <p:cNvPr id="3" name="s3-title">
             <a:extLst xmlns:a="http://schemas.openxmlformats.org/drawingml/2006/main">
               <a:ext uri="{FF2B5EF4-FFF2-40B4-BE49-F238E27FC236}">
-                <a16:creationId xmlns:a16="http://schemas.microsoft.com/office/drawing/2014/main" id="{E67DBD40-94CC-4ACE-8095-7425C98D0811}"/>
+                <a16:creationId xmlns:a16="http://schemas.microsoft.com/office/drawing/2014/main" id="{083EF1D8-0077-4021-B820-8D58510703D1}"/>
               </a:ext>
             </a:extLst>
           </p:cNvPr>
@@ -5298,7 +5298,7 @@
           <p:cNvPr id="4" name="s3-footer">
             <a:extLst xmlns:a="http://schemas.openxmlformats.org/drawingml/2006/main">
               <a:ext uri="{FF2B5EF4-FFF2-40B4-BE49-F238E27FC236}">
-                <a16:creationId xmlns:a16="http://schemas.microsoft.com/office/drawing/2014/main" id="{462108E4-8B9E-41CE-9897-6CC3FF2E0AEC}"/>
+                <a16:creationId xmlns:a16="http://schemas.microsoft.com/office/drawing/2014/main" id="{296329C7-1324-47DE-8373-76330C0C8F12}"/>
               </a:ext>
             </a:extLst>
           </p:cNvPr>
@@ -5329,7 +5329,7 @@
           <p:cNvPr id="5" name="s3-identity">
             <a:extLst xmlns:a="http://schemas.openxmlformats.org/drawingml/2006/main">
               <a:ext uri="{FF2B5EF4-FFF2-40B4-BE49-F238E27FC236}">
-                <a16:creationId xmlns:a16="http://schemas.microsoft.com/office/drawing/2014/main" id="{BF337E07-1368-4FB7-871A-8CB8309379FE}"/>
+                <a16:creationId xmlns:a16="http://schemas.microsoft.com/office/drawing/2014/main" id="{E6E5ABC2-C7C5-403D-90BB-FFFCB45BE9C0}"/>
               </a:ext>
             </a:extLst>
           </p:cNvPr>
@@ -5387,7 +5387,7 @@
           <p:cNvPr id="6" name="core-no-0">
             <a:extLst xmlns:a="http://schemas.openxmlformats.org/drawingml/2006/main">
               <a:ext uri="{FF2B5EF4-FFF2-40B4-BE49-F238E27FC236}">
-                <a16:creationId xmlns:a16="http://schemas.microsoft.com/office/drawing/2014/main" id="{3A5A43F2-6098-4A10-90C9-60248C12C7C7}"/>
+                <a16:creationId xmlns:a16="http://schemas.microsoft.com/office/drawing/2014/main" id="{B5FD29E5-3DF8-4089-83CF-0D2EAD9D366F}"/>
               </a:ext>
             </a:extLst>
           </p:cNvPr>
@@ -5445,7 +5445,7 @@
           <p:cNvPr id="7" name="core-label-0">
             <a:extLst xmlns:a="http://schemas.openxmlformats.org/drawingml/2006/main">
               <a:ext uri="{FF2B5EF4-FFF2-40B4-BE49-F238E27FC236}">
-                <a16:creationId xmlns:a16="http://schemas.microsoft.com/office/drawing/2014/main" id="{D372F4AA-18DD-412C-B9CB-16E091520B61}"/>
+                <a16:creationId xmlns:a16="http://schemas.microsoft.com/office/drawing/2014/main" id="{A9FE58E5-55AD-4331-93E3-8FE0C9DFBED8}"/>
               </a:ext>
             </a:extLst>
           </p:cNvPr>
@@ -5503,7 +5503,7 @@
           <p:cNvPr id="8" name="core-body-0">
             <a:extLst xmlns:a="http://schemas.openxmlformats.org/drawingml/2006/main">
               <a:ext uri="{FF2B5EF4-FFF2-40B4-BE49-F238E27FC236}">
-                <a16:creationId xmlns:a16="http://schemas.microsoft.com/office/drawing/2014/main" id="{3BEEECC0-53A5-4D2F-830E-6F9647398186}"/>
+                <a16:creationId xmlns:a16="http://schemas.microsoft.com/office/drawing/2014/main" id="{5D16E806-A944-4850-8E79-A7FF9384BF56}"/>
               </a:ext>
             </a:extLst>
           </p:cNvPr>
@@ -5567,7 +5567,7 @@
           <p:cNvPr id="9" name="core-no-1">
             <a:extLst xmlns:a="http://schemas.openxmlformats.org/drawingml/2006/main">
               <a:ext uri="{FF2B5EF4-FFF2-40B4-BE49-F238E27FC236}">
-                <a16:creationId xmlns:a16="http://schemas.microsoft.com/office/drawing/2014/main" id="{A08DFBD7-1AED-4105-B6FF-57E57517455D}"/>
+                <a16:creationId xmlns:a16="http://schemas.microsoft.com/office/drawing/2014/main" id="{BE20CE18-0516-4FFE-ABB4-A48E2593D759}"/>
               </a:ext>
             </a:extLst>
           </p:cNvPr>
@@ -5625,7 +5625,7 @@
           <p:cNvPr id="10" name="core-label-1">
             <a:extLst xmlns:a="http://schemas.openxmlformats.org/drawingml/2006/main">
               <a:ext uri="{FF2B5EF4-FFF2-40B4-BE49-F238E27FC236}">
-                <a16:creationId xmlns:a16="http://schemas.microsoft.com/office/drawing/2014/main" id="{75586ECA-1E22-45B0-8BF0-D98539C9061F}"/>
+                <a16:creationId xmlns:a16="http://schemas.microsoft.com/office/drawing/2014/main" id="{FB603413-C53A-4C97-8CD5-0D3E249CCF6B}"/>
               </a:ext>
             </a:extLst>
           </p:cNvPr>
@@ -5683,7 +5683,7 @@
           <p:cNvPr id="11" name="core-body-1">
             <a:extLst xmlns:a="http://schemas.openxmlformats.org/drawingml/2006/main">
               <a:ext uri="{FF2B5EF4-FFF2-40B4-BE49-F238E27FC236}">
-                <a16:creationId xmlns:a16="http://schemas.microsoft.com/office/drawing/2014/main" id="{6825B548-DEC1-4A5A-B09D-3D4E274B65E4}"/>
+                <a16:creationId xmlns:a16="http://schemas.microsoft.com/office/drawing/2014/main" id="{D6C0D000-09F8-4EA4-B019-4293A7326532}"/>
               </a:ext>
             </a:extLst>
           </p:cNvPr>
@@ -5747,7 +5747,7 @@
           <p:cNvPr id="12" name="s3-takeaway-rule">
             <a:extLst xmlns:a="http://schemas.openxmlformats.org/drawingml/2006/main">
               <a:ext uri="{FF2B5EF4-FFF2-40B4-BE49-F238E27FC236}">
-                <a16:creationId xmlns:a16="http://schemas.microsoft.com/office/drawing/2014/main" id="{7E444806-B4F5-48E1-A266-219D35BCBA2E}"/>
+                <a16:creationId xmlns:a16="http://schemas.microsoft.com/office/drawing/2014/main" id="{3A0A817C-7DD4-4EBA-B59D-D19D96D043AE}"/>
               </a:ext>
             </a:extLst>
           </p:cNvPr>
@@ -5780,7 +5780,7 @@
           <p:cNvPr id="13" name="s3-takeaway">
             <a:extLst xmlns:a="http://schemas.openxmlformats.org/drawingml/2006/main">
               <a:ext uri="{FF2B5EF4-FFF2-40B4-BE49-F238E27FC236}">
-                <a16:creationId xmlns:a16="http://schemas.microsoft.com/office/drawing/2014/main" id="{FAD144E0-13F0-4750-8356-132C6F5D2EBC}"/>
+                <a16:creationId xmlns:a16="http://schemas.microsoft.com/office/drawing/2014/main" id="{57AEF520-F32C-4124-9D38-009E763C94F7}"/>
               </a:ext>
             </a:extLst>
           </p:cNvPr>
@@ -5836,7 +5836,7 @@
     </p:spTree>
     <p:extLst>
       <p:ext uri="{BB962C8B-B14F-4D97-AF65-F5344CB8AC3E}">
-        <p14:creationId xmlns:p14="http://schemas.microsoft.com/office/powerpoint/2010/main" val="345718247"/>
+        <p14:creationId xmlns:p14="http://schemas.microsoft.com/office/powerpoint/2010/main" val="504881014"/>
       </p:ext>
     </p:extLst>
   </p:cSld>
@@ -5867,7 +5867,7 @@
           <p:cNvPr id="1" name="s4-rule">
             <a:extLst xmlns:a="http://schemas.openxmlformats.org/drawingml/2006/main">
               <a:ext uri="{FF2B5EF4-FFF2-40B4-BE49-F238E27FC236}">
-                <a16:creationId xmlns:a16="http://schemas.microsoft.com/office/drawing/2014/main" id="{50819880-03E4-40E1-B340-60F09E2A72F6}"/>
+                <a16:creationId xmlns:a16="http://schemas.microsoft.com/office/drawing/2014/main" id="{87733C54-291F-4749-8346-8F4F232A4710}"/>
               </a:ext>
             </a:extLst>
           </p:cNvPr>
@@ -5900,7 +5900,7 @@
           <p:cNvPr id="2" name="s4-eyebrow">
             <a:extLst xmlns:a="http://schemas.openxmlformats.org/drawingml/2006/main">
               <a:ext uri="{FF2B5EF4-FFF2-40B4-BE49-F238E27FC236}">
-                <a16:creationId xmlns:a16="http://schemas.microsoft.com/office/drawing/2014/main" id="{A8DA5D1A-1FC2-459E-ADEA-CE7A0AA72B3B}"/>
+                <a16:creationId xmlns:a16="http://schemas.microsoft.com/office/drawing/2014/main" id="{8E005D75-A66B-415F-A31B-05D5853670CF}"/>
               </a:ext>
             </a:extLst>
           </p:cNvPr>
@@ -5958,7 +5958,7 @@
           <p:cNvPr id="3" name="s4-title">
             <a:extLst xmlns:a="http://schemas.openxmlformats.org/drawingml/2006/main">
               <a:ext uri="{FF2B5EF4-FFF2-40B4-BE49-F238E27FC236}">
-                <a16:creationId xmlns:a16="http://schemas.microsoft.com/office/drawing/2014/main" id="{A503D7C5-92B7-4485-9603-8A908289CEDF}"/>
+                <a16:creationId xmlns:a16="http://schemas.microsoft.com/office/drawing/2014/main" id="{F712A6B0-F650-4619-950B-7DE6E1B2BAA8}"/>
               </a:ext>
             </a:extLst>
           </p:cNvPr>
@@ -6016,7 +6016,7 @@
           <p:cNvPr id="4" name="s4-footer">
             <a:extLst xmlns:a="http://schemas.openxmlformats.org/drawingml/2006/main">
               <a:ext uri="{FF2B5EF4-FFF2-40B4-BE49-F238E27FC236}">
-                <a16:creationId xmlns:a16="http://schemas.microsoft.com/office/drawing/2014/main" id="{13BBA488-6342-42DC-9AE3-55129304E7EA}"/>
+                <a16:creationId xmlns:a16="http://schemas.microsoft.com/office/drawing/2014/main" id="{43110DBD-CEAF-45F6-BB93-C5DE3118A713}"/>
               </a:ext>
             </a:extLst>
           </p:cNvPr>
@@ -6047,7 +6047,7 @@
           <p:cNvPr id="5" name="s4-identity">
             <a:extLst xmlns:a="http://schemas.openxmlformats.org/drawingml/2006/main">
               <a:ext uri="{FF2B5EF4-FFF2-40B4-BE49-F238E27FC236}">
-                <a16:creationId xmlns:a16="http://schemas.microsoft.com/office/drawing/2014/main" id="{A39F8A92-492F-4390-98A7-C206CB45B4C7}"/>
+                <a16:creationId xmlns:a16="http://schemas.microsoft.com/office/drawing/2014/main" id="{D2719D87-4840-45F9-9232-A5CAA733ECDE}"/>
               </a:ext>
             </a:extLst>
           </p:cNvPr>
@@ -6105,7 +6105,7 @@
           <p:cNvPr id="6" name="core-no-0">
             <a:extLst xmlns:a="http://schemas.openxmlformats.org/drawingml/2006/main">
               <a:ext uri="{FF2B5EF4-FFF2-40B4-BE49-F238E27FC236}">
-                <a16:creationId xmlns:a16="http://schemas.microsoft.com/office/drawing/2014/main" id="{B5927C18-F831-4811-9976-5B20FF34DFC9}"/>
+                <a16:creationId xmlns:a16="http://schemas.microsoft.com/office/drawing/2014/main" id="{6185312C-2C5C-40D7-BC9F-AA95E15BF0FF}"/>
               </a:ext>
             </a:extLst>
           </p:cNvPr>
@@ -6163,7 +6163,7 @@
           <p:cNvPr id="7" name="core-label-0">
             <a:extLst xmlns:a="http://schemas.openxmlformats.org/drawingml/2006/main">
               <a:ext uri="{FF2B5EF4-FFF2-40B4-BE49-F238E27FC236}">
-                <a16:creationId xmlns:a16="http://schemas.microsoft.com/office/drawing/2014/main" id="{077C24CB-518F-47AA-A3DD-048BD65AF46D}"/>
+                <a16:creationId xmlns:a16="http://schemas.microsoft.com/office/drawing/2014/main" id="{5359FEC4-C6B2-4388-989D-4CAB8E608198}"/>
               </a:ext>
             </a:extLst>
           </p:cNvPr>
@@ -6221,7 +6221,7 @@
           <p:cNvPr id="8" name="core-body-0">
             <a:extLst xmlns:a="http://schemas.openxmlformats.org/drawingml/2006/main">
               <a:ext uri="{FF2B5EF4-FFF2-40B4-BE49-F238E27FC236}">
-                <a16:creationId xmlns:a16="http://schemas.microsoft.com/office/drawing/2014/main" id="{D9D1E987-EB39-4780-890F-F5C3C3DC0878}"/>
+                <a16:creationId xmlns:a16="http://schemas.microsoft.com/office/drawing/2014/main" id="{D6DF09F0-8CEF-477C-94FF-8AD3CB9A6161}"/>
               </a:ext>
             </a:extLst>
           </p:cNvPr>
@@ -6285,7 +6285,7 @@
           <p:cNvPr id="9" name="core-no-1">
             <a:extLst xmlns:a="http://schemas.openxmlformats.org/drawingml/2006/main">
               <a:ext uri="{FF2B5EF4-FFF2-40B4-BE49-F238E27FC236}">
-                <a16:creationId xmlns:a16="http://schemas.microsoft.com/office/drawing/2014/main" id="{A9FCF347-C035-4EF8-AE4C-F4E8084C5CFF}"/>
+                <a16:creationId xmlns:a16="http://schemas.microsoft.com/office/drawing/2014/main" id="{CDB8F81F-2852-4897-88D2-69AEFB072CAB}"/>
               </a:ext>
             </a:extLst>
           </p:cNvPr>
@@ -6343,7 +6343,7 @@
           <p:cNvPr id="10" name="core-label-1">
             <a:extLst xmlns:a="http://schemas.openxmlformats.org/drawingml/2006/main">
               <a:ext uri="{FF2B5EF4-FFF2-40B4-BE49-F238E27FC236}">
-                <a16:creationId xmlns:a16="http://schemas.microsoft.com/office/drawing/2014/main" id="{2D079824-32A3-485C-BF9D-726936EBC736}"/>
+                <a16:creationId xmlns:a16="http://schemas.microsoft.com/office/drawing/2014/main" id="{C849037E-43F6-49EA-B3FA-BAB9053C73E8}"/>
               </a:ext>
             </a:extLst>
           </p:cNvPr>
@@ -6401,7 +6401,7 @@
           <p:cNvPr id="11" name="core-body-1">
             <a:extLst xmlns:a="http://schemas.openxmlformats.org/drawingml/2006/main">
               <a:ext uri="{FF2B5EF4-FFF2-40B4-BE49-F238E27FC236}">
-                <a16:creationId xmlns:a16="http://schemas.microsoft.com/office/drawing/2014/main" id="{BC14956A-9157-4870-80AF-4897553020D8}"/>
+                <a16:creationId xmlns:a16="http://schemas.microsoft.com/office/drawing/2014/main" id="{33C37549-53CE-4266-AAD7-24A5009B2760}"/>
               </a:ext>
             </a:extLst>
           </p:cNvPr>
@@ -6465,7 +6465,7 @@
           <p:cNvPr id="12" name="s4-takeaway-rule">
             <a:extLst xmlns:a="http://schemas.openxmlformats.org/drawingml/2006/main">
               <a:ext uri="{FF2B5EF4-FFF2-40B4-BE49-F238E27FC236}">
-                <a16:creationId xmlns:a16="http://schemas.microsoft.com/office/drawing/2014/main" id="{F4DD0A3A-CBBC-45F7-A8EF-26352C237A4C}"/>
+                <a16:creationId xmlns:a16="http://schemas.microsoft.com/office/drawing/2014/main" id="{D87E2CDC-BB45-4DCA-824B-24E52B9E8C66}"/>
               </a:ext>
             </a:extLst>
           </p:cNvPr>
@@ -6498,7 +6498,7 @@
           <p:cNvPr id="13" name="s4-takeaway">
             <a:extLst xmlns:a="http://schemas.openxmlformats.org/drawingml/2006/main">
               <a:ext uri="{FF2B5EF4-FFF2-40B4-BE49-F238E27FC236}">
-                <a16:creationId xmlns:a16="http://schemas.microsoft.com/office/drawing/2014/main" id="{8A9CEBC2-260E-4416-9000-653F587EDA10}"/>
+                <a16:creationId xmlns:a16="http://schemas.microsoft.com/office/drawing/2014/main" id="{F2F41F3A-DC69-406B-943B-CF7E433B396A}"/>
               </a:ext>
             </a:extLst>
           </p:cNvPr>
@@ -6554,7 +6554,7 @@
     </p:spTree>
     <p:extLst>
       <p:ext uri="{BB962C8B-B14F-4D97-AF65-F5344CB8AC3E}">
-        <p14:creationId xmlns:p14="http://schemas.microsoft.com/office/powerpoint/2010/main" val="277639443"/>
+        <p14:creationId xmlns:p14="http://schemas.microsoft.com/office/powerpoint/2010/main" val="1415907300"/>
       </p:ext>
     </p:extLst>
   </p:cSld>
@@ -6585,7 +6585,7 @@
           <p:cNvPr id="1" name="s5-rule">
             <a:extLst xmlns:a="http://schemas.openxmlformats.org/drawingml/2006/main">
               <a:ext uri="{FF2B5EF4-FFF2-40B4-BE49-F238E27FC236}">
-                <a16:creationId xmlns:a16="http://schemas.microsoft.com/office/drawing/2014/main" id="{ADCD6F7A-B312-4447-9153-F799C71D972D}"/>
+                <a16:creationId xmlns:a16="http://schemas.microsoft.com/office/drawing/2014/main" id="{A1354A74-3454-4E80-97BD-C9210D5805A7}"/>
               </a:ext>
             </a:extLst>
           </p:cNvPr>
@@ -6618,7 +6618,7 @@
           <p:cNvPr id="2" name="s5-eyebrow">
             <a:extLst xmlns:a="http://schemas.openxmlformats.org/drawingml/2006/main">
               <a:ext uri="{FF2B5EF4-FFF2-40B4-BE49-F238E27FC236}">
-                <a16:creationId xmlns:a16="http://schemas.microsoft.com/office/drawing/2014/main" id="{58D7329F-506E-4090-BD21-418427AC8DF3}"/>
+                <a16:creationId xmlns:a16="http://schemas.microsoft.com/office/drawing/2014/main" id="{7623B746-E8B3-4C53-A909-7C7605D14C45}"/>
               </a:ext>
             </a:extLst>
           </p:cNvPr>
@@ -6676,7 +6676,7 @@
           <p:cNvPr id="3" name="s5-title">
             <a:extLst xmlns:a="http://schemas.openxmlformats.org/drawingml/2006/main">
               <a:ext uri="{FF2B5EF4-FFF2-40B4-BE49-F238E27FC236}">
-                <a16:creationId xmlns:a16="http://schemas.microsoft.com/office/drawing/2014/main" id="{4B2FB5FA-F275-4719-9AED-6D70AF282137}"/>
+                <a16:creationId xmlns:a16="http://schemas.microsoft.com/office/drawing/2014/main" id="{C1F30BB2-2A54-41C4-BD61-68B087343122}"/>
               </a:ext>
             </a:extLst>
           </p:cNvPr>
@@ -6734,7 +6734,7 @@
           <p:cNvPr id="4" name="s5-footer">
             <a:extLst xmlns:a="http://schemas.openxmlformats.org/drawingml/2006/main">
               <a:ext uri="{FF2B5EF4-FFF2-40B4-BE49-F238E27FC236}">
-                <a16:creationId xmlns:a16="http://schemas.microsoft.com/office/drawing/2014/main" id="{63B0155C-F675-401A-AEB4-05F22A70C53A}"/>
+                <a16:creationId xmlns:a16="http://schemas.microsoft.com/office/drawing/2014/main" id="{5CED7B7B-B587-4748-9784-B99321247E70}"/>
               </a:ext>
             </a:extLst>
           </p:cNvPr>
@@ -6765,7 +6765,7 @@
           <p:cNvPr id="5" name="s5-identity">
             <a:extLst xmlns:a="http://schemas.openxmlformats.org/drawingml/2006/main">
               <a:ext uri="{FF2B5EF4-FFF2-40B4-BE49-F238E27FC236}">
-                <a16:creationId xmlns:a16="http://schemas.microsoft.com/office/drawing/2014/main" id="{D559810D-2B55-4D56-85E4-11C834BB326B}"/>
+                <a16:creationId xmlns:a16="http://schemas.microsoft.com/office/drawing/2014/main" id="{AC5F7D83-52E3-4BF0-8E7E-A3DF7F16A78D}"/>
               </a:ext>
             </a:extLst>
           </p:cNvPr>
@@ -6823,7 +6823,7 @@
           <p:cNvPr id="6" name="core-no-0">
             <a:extLst xmlns:a="http://schemas.openxmlformats.org/drawingml/2006/main">
               <a:ext uri="{FF2B5EF4-FFF2-40B4-BE49-F238E27FC236}">
-                <a16:creationId xmlns:a16="http://schemas.microsoft.com/office/drawing/2014/main" id="{55A9F49A-B9CA-4D79-BFAF-4131980EB6F0}"/>
+                <a16:creationId xmlns:a16="http://schemas.microsoft.com/office/drawing/2014/main" id="{27F39D82-AF87-4EF3-B09B-EB7A7ADA0468}"/>
               </a:ext>
             </a:extLst>
           </p:cNvPr>
@@ -6881,7 +6881,7 @@
           <p:cNvPr id="7" name="core-label-0">
             <a:extLst xmlns:a="http://schemas.openxmlformats.org/drawingml/2006/main">
               <a:ext uri="{FF2B5EF4-FFF2-40B4-BE49-F238E27FC236}">
-                <a16:creationId xmlns:a16="http://schemas.microsoft.com/office/drawing/2014/main" id="{7F28937C-D26D-4A2C-8B48-D974625F0939}"/>
+                <a16:creationId xmlns:a16="http://schemas.microsoft.com/office/drawing/2014/main" id="{28DA83DF-DA23-4F1C-8B17-89DD0E596FB8}"/>
               </a:ext>
             </a:extLst>
           </p:cNvPr>
@@ -6939,7 +6939,7 @@
           <p:cNvPr id="8" name="core-body-0">
             <a:extLst xmlns:a="http://schemas.openxmlformats.org/drawingml/2006/main">
               <a:ext uri="{FF2B5EF4-FFF2-40B4-BE49-F238E27FC236}">
-                <a16:creationId xmlns:a16="http://schemas.microsoft.com/office/drawing/2014/main" id="{9A6A41B2-904D-4768-A231-215035763BDC}"/>
+                <a16:creationId xmlns:a16="http://schemas.microsoft.com/office/drawing/2014/main" id="{234D298A-6BA9-4F82-B3AB-11124BA143F7}"/>
               </a:ext>
             </a:extLst>
           </p:cNvPr>
@@ -7003,7 +7003,7 @@
           <p:cNvPr id="9" name="core-no-1">
             <a:extLst xmlns:a="http://schemas.openxmlformats.org/drawingml/2006/main">
               <a:ext uri="{FF2B5EF4-FFF2-40B4-BE49-F238E27FC236}">
-                <a16:creationId xmlns:a16="http://schemas.microsoft.com/office/drawing/2014/main" id="{C75D5927-5AC5-4B1C-A7A4-E472362D176C}"/>
+                <a16:creationId xmlns:a16="http://schemas.microsoft.com/office/drawing/2014/main" id="{9DAD6DF0-359D-4CFF-A3D7-B75E53302425}"/>
               </a:ext>
             </a:extLst>
           </p:cNvPr>
@@ -7061,7 +7061,7 @@
           <p:cNvPr id="10" name="core-body-1">
             <a:extLst xmlns:a="http://schemas.openxmlformats.org/drawingml/2006/main">
               <a:ext uri="{FF2B5EF4-FFF2-40B4-BE49-F238E27FC236}">
-                <a16:creationId xmlns:a16="http://schemas.microsoft.com/office/drawing/2014/main" id="{97D5B884-CE71-47A6-B005-14BF6AFE36F3}"/>
+                <a16:creationId xmlns:a16="http://schemas.microsoft.com/office/drawing/2014/main" id="{033D2437-51FD-43B4-B616-99D04D64829D}"/>
               </a:ext>
             </a:extLst>
           </p:cNvPr>
@@ -7125,7 +7125,7 @@
           <p:cNvPr id="11" name="s5-takeaway-rule">
             <a:extLst xmlns:a="http://schemas.openxmlformats.org/drawingml/2006/main">
               <a:ext uri="{FF2B5EF4-FFF2-40B4-BE49-F238E27FC236}">
-                <a16:creationId xmlns:a16="http://schemas.microsoft.com/office/drawing/2014/main" id="{0FD2F38B-4A54-443D-BF98-788CA310C63D}"/>
+                <a16:creationId xmlns:a16="http://schemas.microsoft.com/office/drawing/2014/main" id="{58901E4F-B134-4B18-BDCE-EFBA76620B00}"/>
               </a:ext>
             </a:extLst>
           </p:cNvPr>
@@ -7158,7 +7158,7 @@
           <p:cNvPr id="12" name="s5-takeaway">
             <a:extLst xmlns:a="http://schemas.openxmlformats.org/drawingml/2006/main">
               <a:ext uri="{FF2B5EF4-FFF2-40B4-BE49-F238E27FC236}">
-                <a16:creationId xmlns:a16="http://schemas.microsoft.com/office/drawing/2014/main" id="{0EB8EFC5-3738-4D48-96C1-E856B55A1BF3}"/>
+                <a16:creationId xmlns:a16="http://schemas.microsoft.com/office/drawing/2014/main" id="{B373420F-4B09-4823-B079-80E5FE9659A3}"/>
               </a:ext>
             </a:extLst>
           </p:cNvPr>
@@ -7214,7 +7214,7 @@
     </p:spTree>
     <p:extLst>
       <p:ext uri="{BB962C8B-B14F-4D97-AF65-F5344CB8AC3E}">
-        <p14:creationId xmlns:p14="http://schemas.microsoft.com/office/powerpoint/2010/main" val="930482828"/>
+        <p14:creationId xmlns:p14="http://schemas.microsoft.com/office/powerpoint/2010/main" val="1104672805"/>
       </p:ext>
     </p:extLst>
   </p:cSld>
@@ -7245,7 +7245,7 @@
           <p:cNvPr id="1" name="s6-rule">
             <a:extLst xmlns:a="http://schemas.openxmlformats.org/drawingml/2006/main">
               <a:ext uri="{FF2B5EF4-FFF2-40B4-BE49-F238E27FC236}">
-                <a16:creationId xmlns:a16="http://schemas.microsoft.com/office/drawing/2014/main" id="{43A4F660-F13D-4898-82CE-AE1254810E4C}"/>
+                <a16:creationId xmlns:a16="http://schemas.microsoft.com/office/drawing/2014/main" id="{5E901492-EB60-4275-BCCE-FAC87B947325}"/>
               </a:ext>
             </a:extLst>
           </p:cNvPr>
@@ -7278,7 +7278,7 @@
           <p:cNvPr id="2" name="s6-eyebrow">
             <a:extLst xmlns:a="http://schemas.openxmlformats.org/drawingml/2006/main">
               <a:ext uri="{FF2B5EF4-FFF2-40B4-BE49-F238E27FC236}">
-                <a16:creationId xmlns:a16="http://schemas.microsoft.com/office/drawing/2014/main" id="{0F1F23D2-F5A5-4275-AE63-2158E3E5B29B}"/>
+                <a16:creationId xmlns:a16="http://schemas.microsoft.com/office/drawing/2014/main" id="{8A18BF43-61AB-485F-A29A-EC1170BB0516}"/>
               </a:ext>
             </a:extLst>
           </p:cNvPr>
@@ -7336,7 +7336,7 @@
           <p:cNvPr id="3" name="s6-title">
             <a:extLst xmlns:a="http://schemas.openxmlformats.org/drawingml/2006/main">
               <a:ext uri="{FF2B5EF4-FFF2-40B4-BE49-F238E27FC236}">
-                <a16:creationId xmlns:a16="http://schemas.microsoft.com/office/drawing/2014/main" id="{CCF4D067-2056-4DC9-901B-0D0F9E7384E7}"/>
+                <a16:creationId xmlns:a16="http://schemas.microsoft.com/office/drawing/2014/main" id="{96BFEF25-DDEB-42CE-B1B7-FE407A63A2E0}"/>
               </a:ext>
             </a:extLst>
           </p:cNvPr>
@@ -7394,7 +7394,7 @@
           <p:cNvPr id="4" name="s6-footer">
             <a:extLst xmlns:a="http://schemas.openxmlformats.org/drawingml/2006/main">
               <a:ext uri="{FF2B5EF4-FFF2-40B4-BE49-F238E27FC236}">
-                <a16:creationId xmlns:a16="http://schemas.microsoft.com/office/drawing/2014/main" id="{C351AB34-C39B-4469-B52E-EFD34165CFD9}"/>
+                <a16:creationId xmlns:a16="http://schemas.microsoft.com/office/drawing/2014/main" id="{E077B4BB-4D7B-4C19-BDE2-60B84AD48EAA}"/>
               </a:ext>
             </a:extLst>
           </p:cNvPr>
@@ -7425,7 +7425,7 @@
           <p:cNvPr id="5" name="s6-identity">
             <a:extLst xmlns:a="http://schemas.openxmlformats.org/drawingml/2006/main">
               <a:ext uri="{FF2B5EF4-FFF2-40B4-BE49-F238E27FC236}">
-                <a16:creationId xmlns:a16="http://schemas.microsoft.com/office/drawing/2014/main" id="{5D4033EC-D047-40E1-8543-2479C4E04315}"/>
+                <a16:creationId xmlns:a16="http://schemas.microsoft.com/office/drawing/2014/main" id="{91E5A3D6-2E8C-4D73-9C42-818471916459}"/>
               </a:ext>
             </a:extLst>
           </p:cNvPr>
@@ -7483,7 +7483,7 @@
           <p:cNvPr id="6" name="core-no-0">
             <a:extLst xmlns:a="http://schemas.openxmlformats.org/drawingml/2006/main">
               <a:ext uri="{FF2B5EF4-FFF2-40B4-BE49-F238E27FC236}">
-                <a16:creationId xmlns:a16="http://schemas.microsoft.com/office/drawing/2014/main" id="{EBA5C5F6-CCD5-4B28-91BA-916F56A32FEA}"/>
+                <a16:creationId xmlns:a16="http://schemas.microsoft.com/office/drawing/2014/main" id="{8589CDCB-6DF7-44CB-A2D3-9F1751CFA1B2}"/>
               </a:ext>
             </a:extLst>
           </p:cNvPr>
@@ -7541,7 +7541,7 @@
           <p:cNvPr id="7" name="core-label-0">
             <a:extLst xmlns:a="http://schemas.openxmlformats.org/drawingml/2006/main">
               <a:ext uri="{FF2B5EF4-FFF2-40B4-BE49-F238E27FC236}">
-                <a16:creationId xmlns:a16="http://schemas.microsoft.com/office/drawing/2014/main" id="{04A043EE-507E-4FA5-9311-E040E7D3D838}"/>
+                <a16:creationId xmlns:a16="http://schemas.microsoft.com/office/drawing/2014/main" id="{0D7C4208-605F-42DC-AF69-A8A17079D0B3}"/>
               </a:ext>
             </a:extLst>
           </p:cNvPr>
@@ -7599,7 +7599,7 @@
           <p:cNvPr id="8" name="core-body-0">
             <a:extLst xmlns:a="http://schemas.openxmlformats.org/drawingml/2006/main">
               <a:ext uri="{FF2B5EF4-FFF2-40B4-BE49-F238E27FC236}">
-                <a16:creationId xmlns:a16="http://schemas.microsoft.com/office/drawing/2014/main" id="{D7927E10-9F0B-4FD3-A172-BF3A98AEACEE}"/>
+                <a16:creationId xmlns:a16="http://schemas.microsoft.com/office/drawing/2014/main" id="{E030DF26-9674-41BF-83F0-5F2BC91F75DA}"/>
               </a:ext>
             </a:extLst>
           </p:cNvPr>
@@ -7663,7 +7663,7 @@
           <p:cNvPr id="9" name="core-no-1">
             <a:extLst xmlns:a="http://schemas.openxmlformats.org/drawingml/2006/main">
               <a:ext uri="{FF2B5EF4-FFF2-40B4-BE49-F238E27FC236}">
-                <a16:creationId xmlns:a16="http://schemas.microsoft.com/office/drawing/2014/main" id="{82E19430-9FB0-471A-9A2C-A404A65E28CF}"/>
+                <a16:creationId xmlns:a16="http://schemas.microsoft.com/office/drawing/2014/main" id="{A49B79CA-2D11-45D9-A683-85BE29A03E70}"/>
               </a:ext>
             </a:extLst>
           </p:cNvPr>
@@ -7721,7 +7721,7 @@
           <p:cNvPr id="10" name="core-body-1">
             <a:extLst xmlns:a="http://schemas.openxmlformats.org/drawingml/2006/main">
               <a:ext uri="{FF2B5EF4-FFF2-40B4-BE49-F238E27FC236}">
-                <a16:creationId xmlns:a16="http://schemas.microsoft.com/office/drawing/2014/main" id="{706D01D4-49BF-4730-B636-978FF809A47C}"/>
+                <a16:creationId xmlns:a16="http://schemas.microsoft.com/office/drawing/2014/main" id="{B2951F86-1491-460C-87C9-BEE223B785C0}"/>
               </a:ext>
             </a:extLst>
           </p:cNvPr>
@@ -7785,7 +7785,7 @@
           <p:cNvPr id="11" name="s6-takeaway-rule">
             <a:extLst xmlns:a="http://schemas.openxmlformats.org/drawingml/2006/main">
               <a:ext uri="{FF2B5EF4-FFF2-40B4-BE49-F238E27FC236}">
-                <a16:creationId xmlns:a16="http://schemas.microsoft.com/office/drawing/2014/main" id="{D23DDFFD-B783-405B-94AB-AD4B935857CD}"/>
+                <a16:creationId xmlns:a16="http://schemas.microsoft.com/office/drawing/2014/main" id="{8EDF8276-F00F-484D-9798-F496422801BD}"/>
               </a:ext>
             </a:extLst>
           </p:cNvPr>
@@ -7818,7 +7818,7 @@
           <p:cNvPr id="12" name="s6-takeaway">
             <a:extLst xmlns:a="http://schemas.openxmlformats.org/drawingml/2006/main">
               <a:ext uri="{FF2B5EF4-FFF2-40B4-BE49-F238E27FC236}">
-                <a16:creationId xmlns:a16="http://schemas.microsoft.com/office/drawing/2014/main" id="{16FB3687-9C45-4856-9B80-E66403875040}"/>
+                <a16:creationId xmlns:a16="http://schemas.microsoft.com/office/drawing/2014/main" id="{25525A45-86C2-49B2-909B-DB1F0E0DC8E9}"/>
               </a:ext>
             </a:extLst>
           </p:cNvPr>
@@ -7874,7 +7874,7 @@
     </p:spTree>
     <p:extLst>
       <p:ext uri="{BB962C8B-B14F-4D97-AF65-F5344CB8AC3E}">
-        <p14:creationId xmlns:p14="http://schemas.microsoft.com/office/powerpoint/2010/main" val="167811815"/>
+        <p14:creationId xmlns:p14="http://schemas.microsoft.com/office/powerpoint/2010/main" val="1933787403"/>
       </p:ext>
     </p:extLst>
   </p:cSld>
@@ -7905,7 +7905,7 @@
           <p:cNvPr id="1" name="s7-rule">
             <a:extLst xmlns:a="http://schemas.openxmlformats.org/drawingml/2006/main">
               <a:ext uri="{FF2B5EF4-FFF2-40B4-BE49-F238E27FC236}">
-                <a16:creationId xmlns:a16="http://schemas.microsoft.com/office/drawing/2014/main" id="{525F4F19-1D72-43F4-AD51-4AB748219713}"/>
+                <a16:creationId xmlns:a16="http://schemas.microsoft.com/office/drawing/2014/main" id="{36ED295B-0B1C-411C-B34B-7D263032E1D1}"/>
               </a:ext>
             </a:extLst>
           </p:cNvPr>
@@ -7938,7 +7938,7 @@
           <p:cNvPr id="2" name="s7-eyebrow">
             <a:extLst xmlns:a="http://schemas.openxmlformats.org/drawingml/2006/main">
               <a:ext uri="{FF2B5EF4-FFF2-40B4-BE49-F238E27FC236}">
-                <a16:creationId xmlns:a16="http://schemas.microsoft.com/office/drawing/2014/main" id="{09B8E66F-F2C0-4DA7-9053-C79716904608}"/>
+                <a16:creationId xmlns:a16="http://schemas.microsoft.com/office/drawing/2014/main" id="{6FBC2A6D-5E9C-416E-9978-CCFCF11373F9}"/>
               </a:ext>
             </a:extLst>
           </p:cNvPr>
@@ -7996,7 +7996,7 @@
           <p:cNvPr id="3" name="s7-title">
             <a:extLst xmlns:a="http://schemas.openxmlformats.org/drawingml/2006/main">
               <a:ext uri="{FF2B5EF4-FFF2-40B4-BE49-F238E27FC236}">
-                <a16:creationId xmlns:a16="http://schemas.microsoft.com/office/drawing/2014/main" id="{85951F59-5BC7-4A82-B15B-F934D4EF3170}"/>
+                <a16:creationId xmlns:a16="http://schemas.microsoft.com/office/drawing/2014/main" id="{5479A437-8154-4630-90B5-303587CCFD02}"/>
               </a:ext>
             </a:extLst>
           </p:cNvPr>
@@ -8054,7 +8054,7 @@
           <p:cNvPr id="4" name="s7-footer">
             <a:extLst xmlns:a="http://schemas.openxmlformats.org/drawingml/2006/main">
               <a:ext uri="{FF2B5EF4-FFF2-40B4-BE49-F238E27FC236}">
-                <a16:creationId xmlns:a16="http://schemas.microsoft.com/office/drawing/2014/main" id="{A29D3A63-72F8-44A3-BDD0-4DD24A119136}"/>
+                <a16:creationId xmlns:a16="http://schemas.microsoft.com/office/drawing/2014/main" id="{A7E51F92-FD45-4AD7-A951-DE87FCF511C0}"/>
               </a:ext>
             </a:extLst>
           </p:cNvPr>
@@ -8085,7 +8085,7 @@
           <p:cNvPr id="5" name="s7-identity">
             <a:extLst xmlns:a="http://schemas.openxmlformats.org/drawingml/2006/main">
               <a:ext uri="{FF2B5EF4-FFF2-40B4-BE49-F238E27FC236}">
-                <a16:creationId xmlns:a16="http://schemas.microsoft.com/office/drawing/2014/main" id="{92DE1392-DB0A-461C-A97D-2481F4EAAACC}"/>
+                <a16:creationId xmlns:a16="http://schemas.microsoft.com/office/drawing/2014/main" id="{CD39119E-34E2-434D-8CDA-E7102F6F8462}"/>
               </a:ext>
             </a:extLst>
           </p:cNvPr>
@@ -8143,7 +8143,7 @@
           <p:cNvPr id="6" name="core-no-0">
             <a:extLst xmlns:a="http://schemas.openxmlformats.org/drawingml/2006/main">
               <a:ext uri="{FF2B5EF4-FFF2-40B4-BE49-F238E27FC236}">
-                <a16:creationId xmlns:a16="http://schemas.microsoft.com/office/drawing/2014/main" id="{20BB828B-9E18-4A48-A811-6CB0E95C5250}"/>
+                <a16:creationId xmlns:a16="http://schemas.microsoft.com/office/drawing/2014/main" id="{B45E15B3-93E6-42A7-8D8E-0CB227D12B14}"/>
               </a:ext>
             </a:extLst>
           </p:cNvPr>
@@ -8201,7 +8201,7 @@
           <p:cNvPr id="7" name="core-label-0">
             <a:extLst xmlns:a="http://schemas.openxmlformats.org/drawingml/2006/main">
               <a:ext uri="{FF2B5EF4-FFF2-40B4-BE49-F238E27FC236}">
-                <a16:creationId xmlns:a16="http://schemas.microsoft.com/office/drawing/2014/main" id="{2255C251-39E9-4DB4-8D04-65A6DDBCB13A}"/>
+                <a16:creationId xmlns:a16="http://schemas.microsoft.com/office/drawing/2014/main" id="{DA046262-CFF4-4FD1-9199-ED998BEF6770}"/>
               </a:ext>
             </a:extLst>
           </p:cNvPr>
@@ -8259,7 +8259,7 @@
           <p:cNvPr id="8" name="core-body-0">
             <a:extLst xmlns:a="http://schemas.openxmlformats.org/drawingml/2006/main">
               <a:ext uri="{FF2B5EF4-FFF2-40B4-BE49-F238E27FC236}">
-                <a16:creationId xmlns:a16="http://schemas.microsoft.com/office/drawing/2014/main" id="{59EFB1F8-EA8D-4279-9808-8CC8EBA5731E}"/>
+                <a16:creationId xmlns:a16="http://schemas.microsoft.com/office/drawing/2014/main" id="{49617082-FE22-4BFB-B784-8DA2E1FB14B7}"/>
               </a:ext>
             </a:extLst>
           </p:cNvPr>
@@ -8323,7 +8323,7 @@
           <p:cNvPr id="9" name="core-no-1">
             <a:extLst xmlns:a="http://schemas.openxmlformats.org/drawingml/2006/main">
               <a:ext uri="{FF2B5EF4-FFF2-40B4-BE49-F238E27FC236}">
-                <a16:creationId xmlns:a16="http://schemas.microsoft.com/office/drawing/2014/main" id="{1A0C2AE4-C6D1-46CE-9AC6-E72DDF53F41E}"/>
+                <a16:creationId xmlns:a16="http://schemas.microsoft.com/office/drawing/2014/main" id="{206DDE55-94AF-484C-86F4-FB027537706F}"/>
               </a:ext>
             </a:extLst>
           </p:cNvPr>
@@ -8381,7 +8381,7 @@
           <p:cNvPr id="10" name="core-body-1">
             <a:extLst xmlns:a="http://schemas.openxmlformats.org/drawingml/2006/main">
               <a:ext uri="{FF2B5EF4-FFF2-40B4-BE49-F238E27FC236}">
-                <a16:creationId xmlns:a16="http://schemas.microsoft.com/office/drawing/2014/main" id="{BEC6208A-84EE-4D65-94A6-A5EA68AC45F7}"/>
+                <a16:creationId xmlns:a16="http://schemas.microsoft.com/office/drawing/2014/main" id="{017754F2-6960-49C7-8611-F0AFF83A7CFB}"/>
               </a:ext>
             </a:extLst>
           </p:cNvPr>
@@ -8445,7 +8445,7 @@
           <p:cNvPr id="11" name="s7-takeaway-rule">
             <a:extLst xmlns:a="http://schemas.openxmlformats.org/drawingml/2006/main">
               <a:ext uri="{FF2B5EF4-FFF2-40B4-BE49-F238E27FC236}">
-                <a16:creationId xmlns:a16="http://schemas.microsoft.com/office/drawing/2014/main" id="{D75B1C26-ECB1-4D77-99E5-4F316C96B754}"/>
+                <a16:creationId xmlns:a16="http://schemas.microsoft.com/office/drawing/2014/main" id="{BAAE3D45-7C1B-44B4-9D4E-B82245089DC4}"/>
               </a:ext>
             </a:extLst>
           </p:cNvPr>
@@ -8478,7 +8478,7 @@
           <p:cNvPr id="12" name="s7-takeaway">
             <a:extLst xmlns:a="http://schemas.openxmlformats.org/drawingml/2006/main">
               <a:ext uri="{FF2B5EF4-FFF2-40B4-BE49-F238E27FC236}">
-                <a16:creationId xmlns:a16="http://schemas.microsoft.com/office/drawing/2014/main" id="{D635AD62-0DBF-4C9B-99F4-D062EE8F0A50}"/>
+                <a16:creationId xmlns:a16="http://schemas.microsoft.com/office/drawing/2014/main" id="{3CDAD593-AFC7-4166-AAEB-82EB751A4EAE}"/>
               </a:ext>
             </a:extLst>
           </p:cNvPr>
@@ -8534,7 +8534,7 @@
     </p:spTree>
     <p:extLst>
       <p:ext uri="{BB962C8B-B14F-4D97-AF65-F5344CB8AC3E}">
-        <p14:creationId xmlns:p14="http://schemas.microsoft.com/office/powerpoint/2010/main" val="501658257"/>
+        <p14:creationId xmlns:p14="http://schemas.microsoft.com/office/powerpoint/2010/main" val="734406646"/>
       </p:ext>
     </p:extLst>
   </p:cSld>
@@ -8565,7 +8565,7 @@
           <p:cNvPr id="1" name="s8-rule">
             <a:extLst xmlns:a="http://schemas.openxmlformats.org/drawingml/2006/main">
               <a:ext uri="{FF2B5EF4-FFF2-40B4-BE49-F238E27FC236}">
-                <a16:creationId xmlns:a16="http://schemas.microsoft.com/office/drawing/2014/main" id="{FC25B89A-1BBA-44FD-B072-717D3AF4B0DE}"/>
+                <a16:creationId xmlns:a16="http://schemas.microsoft.com/office/drawing/2014/main" id="{AC2737F6-62FD-4479-88A4-BF2637FA2FE0}"/>
               </a:ext>
             </a:extLst>
           </p:cNvPr>
@@ -8598,7 +8598,7 @@
           <p:cNvPr id="2" name="s8-eyebrow">
             <a:extLst xmlns:a="http://schemas.openxmlformats.org/drawingml/2006/main">
               <a:ext uri="{FF2B5EF4-FFF2-40B4-BE49-F238E27FC236}">
-                <a16:creationId xmlns:a16="http://schemas.microsoft.com/office/drawing/2014/main" id="{54C44897-D741-46FA-8861-AB5D412CB989}"/>
+                <a16:creationId xmlns:a16="http://schemas.microsoft.com/office/drawing/2014/main" id="{505C63EB-1E07-484B-BA1F-94CF21C1F4BC}"/>
               </a:ext>
             </a:extLst>
           </p:cNvPr>
@@ -8656,7 +8656,7 @@
           <p:cNvPr id="3" name="s8-title">
             <a:extLst xmlns:a="http://schemas.openxmlformats.org/drawingml/2006/main">
               <a:ext uri="{FF2B5EF4-FFF2-40B4-BE49-F238E27FC236}">
-                <a16:creationId xmlns:a16="http://schemas.microsoft.com/office/drawing/2014/main" id="{597EDE9A-42FC-41D9-B16E-28283EDF0A35}"/>
+                <a16:creationId xmlns:a16="http://schemas.microsoft.com/office/drawing/2014/main" id="{2FEFCD2E-EB1C-4CA1-B394-E95735CE658E}"/>
               </a:ext>
             </a:extLst>
           </p:cNvPr>
@@ -8714,7 +8714,7 @@
           <p:cNvPr id="4" name="s8-footer">
             <a:extLst xmlns:a="http://schemas.openxmlformats.org/drawingml/2006/main">
               <a:ext uri="{FF2B5EF4-FFF2-40B4-BE49-F238E27FC236}">
-                <a16:creationId xmlns:a16="http://schemas.microsoft.com/office/drawing/2014/main" id="{DA864F43-774E-455C-88D8-A22EBDDC1770}"/>
+                <a16:creationId xmlns:a16="http://schemas.microsoft.com/office/drawing/2014/main" id="{B0740F0D-0AF2-4EA0-8EE2-7AF2F98881F9}"/>
               </a:ext>
             </a:extLst>
           </p:cNvPr>
@@ -8745,7 +8745,7 @@
           <p:cNvPr id="5" name="s8-identity">
             <a:extLst xmlns:a="http://schemas.openxmlformats.org/drawingml/2006/main">
               <a:ext uri="{FF2B5EF4-FFF2-40B4-BE49-F238E27FC236}">
-                <a16:creationId xmlns:a16="http://schemas.microsoft.com/office/drawing/2014/main" id="{F7338C8F-B79C-4876-8024-C1F3AD1B3AE7}"/>
+                <a16:creationId xmlns:a16="http://schemas.microsoft.com/office/drawing/2014/main" id="{C12F61B2-B6A7-4B4F-B853-4F95B5E33359}"/>
               </a:ext>
             </a:extLst>
           </p:cNvPr>
@@ -8803,7 +8803,7 @@
           <p:cNvPr id="6" name="core-no-0">
             <a:extLst xmlns:a="http://schemas.openxmlformats.org/drawingml/2006/main">
               <a:ext uri="{FF2B5EF4-FFF2-40B4-BE49-F238E27FC236}">
-                <a16:creationId xmlns:a16="http://schemas.microsoft.com/office/drawing/2014/main" id="{F110FB81-BF48-4AFE-BD23-5D0D2B7FF2F0}"/>
+                <a16:creationId xmlns:a16="http://schemas.microsoft.com/office/drawing/2014/main" id="{C801E336-5C30-4F1E-A107-B6543971593F}"/>
               </a:ext>
             </a:extLst>
           </p:cNvPr>
@@ -8861,7 +8861,7 @@
           <p:cNvPr id="7" name="core-label-0">
             <a:extLst xmlns:a="http://schemas.openxmlformats.org/drawingml/2006/main">
               <a:ext uri="{FF2B5EF4-FFF2-40B4-BE49-F238E27FC236}">
-                <a16:creationId xmlns:a16="http://schemas.microsoft.com/office/drawing/2014/main" id="{3F1F4206-66C7-478B-A7EF-918FC5223471}"/>
+                <a16:creationId xmlns:a16="http://schemas.microsoft.com/office/drawing/2014/main" id="{6226887D-9009-481A-940F-387C22E1B950}"/>
               </a:ext>
             </a:extLst>
           </p:cNvPr>
@@ -8919,7 +8919,7 @@
           <p:cNvPr id="8" name="core-body-0">
             <a:extLst xmlns:a="http://schemas.openxmlformats.org/drawingml/2006/main">
               <a:ext uri="{FF2B5EF4-FFF2-40B4-BE49-F238E27FC236}">
-                <a16:creationId xmlns:a16="http://schemas.microsoft.com/office/drawing/2014/main" id="{BAFEF8B1-08DA-490D-BC28-ED3F9E53F493}"/>
+                <a16:creationId xmlns:a16="http://schemas.microsoft.com/office/drawing/2014/main" id="{FCE44152-AA56-4557-81DA-00CD59E2723E}"/>
               </a:ext>
             </a:extLst>
           </p:cNvPr>
@@ -8983,7 +8983,7 @@
           <p:cNvPr id="9" name="core-no-1">
             <a:extLst xmlns:a="http://schemas.openxmlformats.org/drawingml/2006/main">
               <a:ext uri="{FF2B5EF4-FFF2-40B4-BE49-F238E27FC236}">
-                <a16:creationId xmlns:a16="http://schemas.microsoft.com/office/drawing/2014/main" id="{6AEA418C-0206-4A52-B155-116C3207AF6F}"/>
+                <a16:creationId xmlns:a16="http://schemas.microsoft.com/office/drawing/2014/main" id="{0D7D143B-98F3-4BB3-9FBC-6EA6F2CD6D58}"/>
               </a:ext>
             </a:extLst>
           </p:cNvPr>
@@ -9041,7 +9041,7 @@
           <p:cNvPr id="10" name="core-body-1">
             <a:extLst xmlns:a="http://schemas.openxmlformats.org/drawingml/2006/main">
               <a:ext uri="{FF2B5EF4-FFF2-40B4-BE49-F238E27FC236}">
-                <a16:creationId xmlns:a16="http://schemas.microsoft.com/office/drawing/2014/main" id="{3F96588E-822B-469C-903E-269195B65A63}"/>
+                <a16:creationId xmlns:a16="http://schemas.microsoft.com/office/drawing/2014/main" id="{9EBE3EF6-8146-4DB0-952F-813AA98431FC}"/>
               </a:ext>
             </a:extLst>
           </p:cNvPr>
@@ -9105,7 +9105,7 @@
           <p:cNvPr id="11" name="s8-takeaway-rule">
             <a:extLst xmlns:a="http://schemas.openxmlformats.org/drawingml/2006/main">
               <a:ext uri="{FF2B5EF4-FFF2-40B4-BE49-F238E27FC236}">
-                <a16:creationId xmlns:a16="http://schemas.microsoft.com/office/drawing/2014/main" id="{EDB7A790-B9D2-497B-941D-50B25B16CF55}"/>
+                <a16:creationId xmlns:a16="http://schemas.microsoft.com/office/drawing/2014/main" id="{59B2DB8E-BB84-42A6-A2C5-BC798A36F31A}"/>
               </a:ext>
             </a:extLst>
           </p:cNvPr>
@@ -9138,7 +9138,7 @@
           <p:cNvPr id="12" name="s8-takeaway">
             <a:extLst xmlns:a="http://schemas.openxmlformats.org/drawingml/2006/main">
               <a:ext uri="{FF2B5EF4-FFF2-40B4-BE49-F238E27FC236}">
-                <a16:creationId xmlns:a16="http://schemas.microsoft.com/office/drawing/2014/main" id="{BFA642C7-598F-49E5-BD05-DC6393EFCC1C}"/>
+                <a16:creationId xmlns:a16="http://schemas.microsoft.com/office/drawing/2014/main" id="{CA6B9A50-FFC9-43E3-9F44-FB10B0F1DACD}"/>
               </a:ext>
             </a:extLst>
           </p:cNvPr>
@@ -9194,7 +9194,7 @@
     </p:spTree>
     <p:extLst>
       <p:ext uri="{BB962C8B-B14F-4D97-AF65-F5344CB8AC3E}">
-        <p14:creationId xmlns:p14="http://schemas.microsoft.com/office/powerpoint/2010/main" val="68051104"/>
+        <p14:creationId xmlns:p14="http://schemas.microsoft.com/office/powerpoint/2010/main" val="1874230097"/>
       </p:ext>
     </p:extLst>
   </p:cSld>
@@ -9225,7 +9225,7 @@
           <p:cNvPr id="1" name="s9-rule">
             <a:extLst xmlns:a="http://schemas.openxmlformats.org/drawingml/2006/main">
               <a:ext uri="{FF2B5EF4-FFF2-40B4-BE49-F238E27FC236}">
-                <a16:creationId xmlns:a16="http://schemas.microsoft.com/office/drawing/2014/main" id="{6CF4B4C3-8F5A-4AB4-A2BF-48E73DDA4D7B}"/>
+                <a16:creationId xmlns:a16="http://schemas.microsoft.com/office/drawing/2014/main" id="{0772B381-DC1E-46CE-A772-2A064C43CD98}"/>
               </a:ext>
             </a:extLst>
           </p:cNvPr>
@@ -9258,7 +9258,7 @@
           <p:cNvPr id="2" name="s9-eyebrow">
             <a:extLst xmlns:a="http://schemas.openxmlformats.org/drawingml/2006/main">
               <a:ext uri="{FF2B5EF4-FFF2-40B4-BE49-F238E27FC236}">
-                <a16:creationId xmlns:a16="http://schemas.microsoft.com/office/drawing/2014/main" id="{52B31DA1-256E-47D6-AA75-6AA348696C11}"/>
+                <a16:creationId xmlns:a16="http://schemas.microsoft.com/office/drawing/2014/main" id="{9C4CA37E-8A05-4011-B333-8249BACB80BE}"/>
               </a:ext>
             </a:extLst>
           </p:cNvPr>
@@ -9316,7 +9316,7 @@
           <p:cNvPr id="3" name="s9-title">
             <a:extLst xmlns:a="http://schemas.openxmlformats.org/drawingml/2006/main">
               <a:ext uri="{FF2B5EF4-FFF2-40B4-BE49-F238E27FC236}">
-                <a16:creationId xmlns:a16="http://schemas.microsoft.com/office/drawing/2014/main" id="{CDE49C6B-F296-4364-B7F2-4FFA3E4F66BF}"/>
+                <a16:creationId xmlns:a16="http://schemas.microsoft.com/office/drawing/2014/main" id="{2F855107-E97A-47B6-B07D-8C1A16DFC9A5}"/>
               </a:ext>
             </a:extLst>
           </p:cNvPr>
@@ -9374,7 +9374,7 @@
           <p:cNvPr id="4" name="s9-footer">
             <a:extLst xmlns:a="http://schemas.openxmlformats.org/drawingml/2006/main">
               <a:ext uri="{FF2B5EF4-FFF2-40B4-BE49-F238E27FC236}">
-                <a16:creationId xmlns:a16="http://schemas.microsoft.com/office/drawing/2014/main" id="{9A073F02-6172-49F5-A408-A52809BE9A39}"/>
+                <a16:creationId xmlns:a16="http://schemas.microsoft.com/office/drawing/2014/main" id="{4E6B4808-4E37-4E01-AA33-470D1DAE78DA}"/>
               </a:ext>
             </a:extLst>
           </p:cNvPr>
@@ -9405,7 +9405,7 @@
           <p:cNvPr id="5" name="s9-identity">
             <a:extLst xmlns:a="http://schemas.openxmlformats.org/drawingml/2006/main">
               <a:ext uri="{FF2B5EF4-FFF2-40B4-BE49-F238E27FC236}">
-                <a16:creationId xmlns:a16="http://schemas.microsoft.com/office/drawing/2014/main" id="{052518ED-32AC-4B4D-A028-06A9BF11E775}"/>
+                <a16:creationId xmlns:a16="http://schemas.microsoft.com/office/drawing/2014/main" id="{7F601639-6D4B-4EC3-A003-A8F61CFE62FB}"/>
               </a:ext>
             </a:extLst>
           </p:cNvPr>
@@ -9463,7 +9463,7 @@
           <p:cNvPr id="6" name="case-title">
             <a:extLst xmlns:a="http://schemas.openxmlformats.org/drawingml/2006/main">
               <a:ext uri="{FF2B5EF4-FFF2-40B4-BE49-F238E27FC236}">
-                <a16:creationId xmlns:a16="http://schemas.microsoft.com/office/drawing/2014/main" id="{F85D90B8-6559-46B7-A6CE-DDD18E4A2F36}"/>
+                <a16:creationId xmlns:a16="http://schemas.microsoft.com/office/drawing/2014/main" id="{1318C648-1FFA-4839-99C9-1E826BC438BF}"/>
               </a:ext>
             </a:extLst>
           </p:cNvPr>
@@ -9527,7 +9527,7 @@
           <p:cNvPr id="7" name="case-row-0">
             <a:extLst xmlns:a="http://schemas.openxmlformats.org/drawingml/2006/main">
               <a:ext uri="{FF2B5EF4-FFF2-40B4-BE49-F238E27FC236}">
-                <a16:creationId xmlns:a16="http://schemas.microsoft.com/office/drawing/2014/main" id="{0FDA863C-7B54-4571-B872-432F8BBC6C1B}"/>
+                <a16:creationId xmlns:a16="http://schemas.microsoft.com/office/drawing/2014/main" id="{90505CC3-8DB5-42F8-88FA-CFE3431433AF}"/>
               </a:ext>
             </a:extLst>
           </p:cNvPr>
@@ -9591,7 +9591,7 @@
           <p:cNvPr id="8" name="case-row-1">
             <a:extLst xmlns:a="http://schemas.openxmlformats.org/drawingml/2006/main">
               <a:ext uri="{FF2B5EF4-FFF2-40B4-BE49-F238E27FC236}">
-                <a16:creationId xmlns:a16="http://schemas.microsoft.com/office/drawing/2014/main" id="{BD80CC60-D21B-4812-BB70-FA660E513323}"/>
+                <a16:creationId xmlns:a16="http://schemas.microsoft.com/office/drawing/2014/main" id="{296E7BAB-78D5-486A-A594-4076A6A8CE93}"/>
               </a:ext>
             </a:extLst>
           </p:cNvPr>
@@ -9655,7 +9655,7 @@
           <p:cNvPr id="9" name="case-row-2">
             <a:extLst xmlns:a="http://schemas.openxmlformats.org/drawingml/2006/main">
               <a:ext uri="{FF2B5EF4-FFF2-40B4-BE49-F238E27FC236}">
-                <a16:creationId xmlns:a16="http://schemas.microsoft.com/office/drawing/2014/main" id="{A0BBC3CC-D3B5-457B-A353-44ECA0EA7746}"/>
+                <a16:creationId xmlns:a16="http://schemas.microsoft.com/office/drawing/2014/main" id="{890CA103-6390-4474-8E85-C8C13916C246}"/>
               </a:ext>
             </a:extLst>
           </p:cNvPr>
@@ -9719,7 +9719,7 @@
           <p:cNvPr id="10" name="case-row-3">
             <a:extLst xmlns:a="http://schemas.openxmlformats.org/drawingml/2006/main">
               <a:ext uri="{FF2B5EF4-FFF2-40B4-BE49-F238E27FC236}">
-                <a16:creationId xmlns:a16="http://schemas.microsoft.com/office/drawing/2014/main" id="{4F4C92A7-FE27-4A97-8C6F-0F4D86E13B9D}"/>
+                <a16:creationId xmlns:a16="http://schemas.microsoft.com/office/drawing/2014/main" id="{C717DE60-5918-405C-BD82-F6CDA230595F}"/>
               </a:ext>
             </a:extLst>
           </p:cNvPr>
@@ -9783,7 +9783,7 @@
           <p:cNvPr id="11" name="case-row-4">
             <a:extLst xmlns:a="http://schemas.openxmlformats.org/drawingml/2006/main">
               <a:ext uri="{FF2B5EF4-FFF2-40B4-BE49-F238E27FC236}">
-                <a16:creationId xmlns:a16="http://schemas.microsoft.com/office/drawing/2014/main" id="{957B26AB-D08A-4356-9F5A-9EADED286FAF}"/>
+                <a16:creationId xmlns:a16="http://schemas.microsoft.com/office/drawing/2014/main" id="{96090E86-FA3C-4795-85B9-90415764239F}"/>
               </a:ext>
             </a:extLst>
           </p:cNvPr>
@@ -9847,7 +9847,7 @@
           <p:cNvPr id="12" name="s9-takeaway-rule">
             <a:extLst xmlns:a="http://schemas.openxmlformats.org/drawingml/2006/main">
               <a:ext uri="{FF2B5EF4-FFF2-40B4-BE49-F238E27FC236}">
-                <a16:creationId xmlns:a16="http://schemas.microsoft.com/office/drawing/2014/main" id="{95267491-6D90-4F39-BD43-2B3B1FAAAA0A}"/>
+                <a16:creationId xmlns:a16="http://schemas.microsoft.com/office/drawing/2014/main" id="{0C4172A9-1983-4312-A4CD-814B1BB416C8}"/>
               </a:ext>
             </a:extLst>
           </p:cNvPr>
@@ -9880,7 +9880,7 @@
           <p:cNvPr id="13" name="s9-takeaway">
             <a:extLst xmlns:a="http://schemas.openxmlformats.org/drawingml/2006/main">
               <a:ext uri="{FF2B5EF4-FFF2-40B4-BE49-F238E27FC236}">
-                <a16:creationId xmlns:a16="http://schemas.microsoft.com/office/drawing/2014/main" id="{9158CC47-6A2D-4540-9692-A3DD40EF76E4}"/>
+                <a16:creationId xmlns:a16="http://schemas.microsoft.com/office/drawing/2014/main" id="{390F3FC8-C483-4A12-A1E4-F68FFFFE6397}"/>
               </a:ext>
             </a:extLst>
           </p:cNvPr>
@@ -9936,7 +9936,7 @@
     </p:spTree>
     <p:extLst>
       <p:ext uri="{BB962C8B-B14F-4D97-AF65-F5344CB8AC3E}">
-        <p14:creationId xmlns:p14="http://schemas.microsoft.com/office/powerpoint/2010/main" val="257631629"/>
+        <p14:creationId xmlns:p14="http://schemas.microsoft.com/office/powerpoint/2010/main" val="741690800"/>
       </p:ext>
     </p:extLst>
   </p:cSld>

--- a/docs/public/course-assets/course-pptx/ag-003.pptx
+++ b/docs/public/course-assets/course-pptx/ag-003.pptx
@@ -2,24 +2,24 @@
 <file path=ppt/presentation.xml><?xml version="1.0" encoding="utf-8"?>
 <p:presentation xmlns:p="http://schemas.openxmlformats.org/presentationml/2006/main">
   <p:sldMasterIdLst>
-    <p:sldMasterId xmlns:r="http://schemas.openxmlformats.org/officeDocument/2006/relationships" id="2147483648" r:id="R3f7b42d1dc5d49f5"/>
+    <p:sldMasterId xmlns:r="http://schemas.openxmlformats.org/officeDocument/2006/relationships" id="2147483648" r:id="R69fc9fd0b8cc4900"/>
   </p:sldMasterIdLst>
   <p:notesMasterIdLst>
-    <p:notesMasterId xmlns:r="http://schemas.openxmlformats.org/officeDocument/2006/relationships" r:id="R814babb0d2af48fd"/>
+    <p:notesMasterId xmlns:r="http://schemas.openxmlformats.org/officeDocument/2006/relationships" r:id="Rcbffd85f55224698"/>
   </p:notesMasterIdLst>
   <p:sldIdLst>
-    <p:sldId xmlns:r="http://schemas.openxmlformats.org/officeDocument/2006/relationships" id="256" r:id="Rb77786ca16264bcc"/>
-    <p:sldId xmlns:r="http://schemas.openxmlformats.org/officeDocument/2006/relationships" id="257" r:id="Ra88f5b2082ef46ef"/>
-    <p:sldId xmlns:r="http://schemas.openxmlformats.org/officeDocument/2006/relationships" id="258" r:id="Rad730505b1e44706"/>
-    <p:sldId xmlns:r="http://schemas.openxmlformats.org/officeDocument/2006/relationships" id="259" r:id="R490b4d81c57d4db8"/>
-    <p:sldId xmlns:r="http://schemas.openxmlformats.org/officeDocument/2006/relationships" id="260" r:id="R85d604f5bc744ef2"/>
-    <p:sldId xmlns:r="http://schemas.openxmlformats.org/officeDocument/2006/relationships" id="261" r:id="R154a10c6ea6b472f"/>
-    <p:sldId xmlns:r="http://schemas.openxmlformats.org/officeDocument/2006/relationships" id="262" r:id="R1ba1f3533d5142c1"/>
-    <p:sldId xmlns:r="http://schemas.openxmlformats.org/officeDocument/2006/relationships" id="263" r:id="R01baecf89b1a41e5"/>
-    <p:sldId xmlns:r="http://schemas.openxmlformats.org/officeDocument/2006/relationships" id="264" r:id="Rb82424e37a0f4d1b"/>
-    <p:sldId xmlns:r="http://schemas.openxmlformats.org/officeDocument/2006/relationships" id="265" r:id="R87df2135a49b4218"/>
-    <p:sldId xmlns:r="http://schemas.openxmlformats.org/officeDocument/2006/relationships" id="266" r:id="Rf49a6e0228f749bd"/>
-    <p:sldId xmlns:r="http://schemas.openxmlformats.org/officeDocument/2006/relationships" id="267" r:id="Rabeb99013d4c4d97"/>
+    <p:sldId xmlns:r="http://schemas.openxmlformats.org/officeDocument/2006/relationships" id="256" r:id="R5149076084db48e3"/>
+    <p:sldId xmlns:r="http://schemas.openxmlformats.org/officeDocument/2006/relationships" id="257" r:id="R9bdb1c10321048d6"/>
+    <p:sldId xmlns:r="http://schemas.openxmlformats.org/officeDocument/2006/relationships" id="258" r:id="R5d65c482ef444921"/>
+    <p:sldId xmlns:r="http://schemas.openxmlformats.org/officeDocument/2006/relationships" id="259" r:id="R86ddc99b800c4b13"/>
+    <p:sldId xmlns:r="http://schemas.openxmlformats.org/officeDocument/2006/relationships" id="260" r:id="R232cad95c0834d07"/>
+    <p:sldId xmlns:r="http://schemas.openxmlformats.org/officeDocument/2006/relationships" id="261" r:id="R5c7389ff75a04a68"/>
+    <p:sldId xmlns:r="http://schemas.openxmlformats.org/officeDocument/2006/relationships" id="262" r:id="R536bae84911448e2"/>
+    <p:sldId xmlns:r="http://schemas.openxmlformats.org/officeDocument/2006/relationships" id="263" r:id="Rb49dea6e70584ca4"/>
+    <p:sldId xmlns:r="http://schemas.openxmlformats.org/officeDocument/2006/relationships" id="264" r:id="R0d1ee28f41014f83"/>
+    <p:sldId xmlns:r="http://schemas.openxmlformats.org/officeDocument/2006/relationships" id="265" r:id="R362b7aec9190439f"/>
+    <p:sldId xmlns:r="http://schemas.openxmlformats.org/officeDocument/2006/relationships" id="266" r:id="R01988a272d234d18"/>
+    <p:sldId xmlns:r="http://schemas.openxmlformats.org/officeDocument/2006/relationships" id="267" r:id="R39a2184b74e34c2c"/>
   </p:sldIdLst>
   <p:sldSz cx="12192000" cy="6858000"/>
   <p:notesSz cx="6858000" cy="9144000"/>
@@ -1338,7 +1338,7 @@
   </p:cSld>
   <p:clrMap bg1="lt1" tx1="dk1" bg2="lt2" tx2="dk2" accent1="accent1" accent2="accent2" accent3="accent3" accent4="accent4" accent5="accent5" accent6="accent6" hlink="hlink" folHlink="folHlink"/>
   <p:sldLayoutIdLst>
-    <p:sldLayoutId xmlns:r="http://schemas.openxmlformats.org/officeDocument/2006/relationships" id="2147483649" r:id="R6f025058b16c444b"/>
+    <p:sldLayoutId xmlns:r="http://schemas.openxmlformats.org/officeDocument/2006/relationships" id="2147483649" r:id="R56b28bd153a1454d"/>
   </p:sldLayoutIdLst>
   <p:txStyles>
     <p:titleStyle>
@@ -1889,7 +1889,7 @@
           <p:cNvPr id="1" name="cover-rule">
             <a:extLst xmlns:a="http://schemas.openxmlformats.org/drawingml/2006/main">
               <a:ext uri="{FF2B5EF4-FFF2-40B4-BE49-F238E27FC236}">
-                <a16:creationId xmlns:a16="http://schemas.microsoft.com/office/drawing/2014/main" id="{52BF9CF8-6FAA-4DA0-9F5A-F5C275E0872D}"/>
+                <a16:creationId xmlns:a16="http://schemas.microsoft.com/office/drawing/2014/main" id="{280E931E-A627-45C3-A40F-354EC6B5559D}"/>
               </a:ext>
             </a:extLst>
           </p:cNvPr>
@@ -1922,7 +1922,7 @@
           <p:cNvPr id="2" name="cover-ring-1">
             <a:extLst xmlns:a="http://schemas.openxmlformats.org/drawingml/2006/main">
               <a:ext uri="{FF2B5EF4-FFF2-40B4-BE49-F238E27FC236}">
-                <a16:creationId xmlns:a16="http://schemas.microsoft.com/office/drawing/2014/main" id="{6B088163-21CE-4A13-A661-C93624AB92FA}"/>
+                <a16:creationId xmlns:a16="http://schemas.microsoft.com/office/drawing/2014/main" id="{AB91C1F0-F1B0-485F-9096-22FBBD604058}"/>
               </a:ext>
             </a:extLst>
           </p:cNvPr>
@@ -1953,7 +1953,7 @@
           <p:cNvPr id="3" name="cover-ring-2">
             <a:extLst xmlns:a="http://schemas.openxmlformats.org/drawingml/2006/main">
               <a:ext uri="{FF2B5EF4-FFF2-40B4-BE49-F238E27FC236}">
-                <a16:creationId xmlns:a16="http://schemas.microsoft.com/office/drawing/2014/main" id="{6D38F79E-A42E-42C1-8ED8-E66F0C7445FA}"/>
+                <a16:creationId xmlns:a16="http://schemas.microsoft.com/office/drawing/2014/main" id="{F223BBDA-91EE-4611-988D-67F05DB83245}"/>
               </a:ext>
             </a:extLst>
           </p:cNvPr>
@@ -1984,7 +1984,7 @@
           <p:cNvPr id="4" name="cover-core">
             <a:extLst xmlns:a="http://schemas.openxmlformats.org/drawingml/2006/main">
               <a:ext uri="{FF2B5EF4-FFF2-40B4-BE49-F238E27FC236}">
-                <a16:creationId xmlns:a16="http://schemas.microsoft.com/office/drawing/2014/main" id="{352BE2BF-3042-4952-A1C5-55B1606E62D4}"/>
+                <a16:creationId xmlns:a16="http://schemas.microsoft.com/office/drawing/2014/main" id="{09AF301D-FF38-4B17-9A01-6C7CA31052BD}"/>
               </a:ext>
             </a:extLst>
           </p:cNvPr>
@@ -2017,7 +2017,7 @@
           <p:cNvPr id="5" name="cover-line-1">
             <a:extLst xmlns:a="http://schemas.openxmlformats.org/drawingml/2006/main">
               <a:ext uri="{FF2B5EF4-FFF2-40B4-BE49-F238E27FC236}">
-                <a16:creationId xmlns:a16="http://schemas.microsoft.com/office/drawing/2014/main" id="{9123DC6B-06CC-49FC-B5F7-13773CE19A6D}"/>
+                <a16:creationId xmlns:a16="http://schemas.microsoft.com/office/drawing/2014/main" id="{A513738F-8BA0-49AC-AA3E-27F436F29CED}"/>
               </a:ext>
             </a:extLst>
           </p:cNvPr>
@@ -2048,7 +2048,7 @@
           <p:cNvPr id="6" name="cover-line-2">
             <a:extLst xmlns:a="http://schemas.openxmlformats.org/drawingml/2006/main">
               <a:ext uri="{FF2B5EF4-FFF2-40B4-BE49-F238E27FC236}">
-                <a16:creationId xmlns:a16="http://schemas.microsoft.com/office/drawing/2014/main" id="{9D46CB26-BC7E-4D18-96FA-BB53AC34762F}"/>
+                <a16:creationId xmlns:a16="http://schemas.microsoft.com/office/drawing/2014/main" id="{436474D1-9F77-4A77-B751-21C788CDE294}"/>
               </a:ext>
             </a:extLst>
           </p:cNvPr>
@@ -2079,7 +2079,7 @@
           <p:cNvPr id="7" name="cover-eyebrow">
             <a:extLst xmlns:a="http://schemas.openxmlformats.org/drawingml/2006/main">
               <a:ext uri="{FF2B5EF4-FFF2-40B4-BE49-F238E27FC236}">
-                <a16:creationId xmlns:a16="http://schemas.microsoft.com/office/drawing/2014/main" id="{9C16AF86-4484-4B66-855B-CFDC4FA2F521}"/>
+                <a16:creationId xmlns:a16="http://schemas.microsoft.com/office/drawing/2014/main" id="{63600EA3-2586-4147-B662-5A8E99D2F9CD}"/>
               </a:ext>
             </a:extLst>
           </p:cNvPr>
@@ -2137,7 +2137,7 @@
           <p:cNvPr id="8" name="cover-title">
             <a:extLst xmlns:a="http://schemas.openxmlformats.org/drawingml/2006/main">
               <a:ext uri="{FF2B5EF4-FFF2-40B4-BE49-F238E27FC236}">
-                <a16:creationId xmlns:a16="http://schemas.microsoft.com/office/drawing/2014/main" id="{6B0B2BB9-565D-416D-8147-FF1BCC7C98B0}"/>
+                <a16:creationId xmlns:a16="http://schemas.microsoft.com/office/drawing/2014/main" id="{9360EC80-A822-4F75-9F79-3C827C2AF33E}"/>
               </a:ext>
             </a:extLst>
           </p:cNvPr>
@@ -2195,7 +2195,7 @@
           <p:cNvPr id="9" name="cover-subtitle">
             <a:extLst xmlns:a="http://schemas.openxmlformats.org/drawingml/2006/main">
               <a:ext uri="{FF2B5EF4-FFF2-40B4-BE49-F238E27FC236}">
-                <a16:creationId xmlns:a16="http://schemas.microsoft.com/office/drawing/2014/main" id="{8FB6EB08-563C-4265-A784-762C2E007CD1}"/>
+                <a16:creationId xmlns:a16="http://schemas.microsoft.com/office/drawing/2014/main" id="{4993AAEB-2D49-47AD-AE7B-C045EA4BBF87}"/>
               </a:ext>
             </a:extLst>
           </p:cNvPr>
@@ -2257,7 +2257,7 @@
           <p:cNvPr id="10" name="cover-lead">
             <a:extLst xmlns:a="http://schemas.openxmlformats.org/drawingml/2006/main">
               <a:ext uri="{FF2B5EF4-FFF2-40B4-BE49-F238E27FC236}">
-                <a16:creationId xmlns:a16="http://schemas.microsoft.com/office/drawing/2014/main" id="{B42375F0-206B-418C-8960-BBE48DDEEDC6}"/>
+                <a16:creationId xmlns:a16="http://schemas.microsoft.com/office/drawing/2014/main" id="{202D7611-039B-4EC9-ADBC-84297419D5C8}"/>
               </a:ext>
             </a:extLst>
           </p:cNvPr>
@@ -2315,7 +2315,7 @@
           <p:cNvPr id="11" name="cover-course">
             <a:extLst xmlns:a="http://schemas.openxmlformats.org/drawingml/2006/main">
               <a:ext uri="{FF2B5EF4-FFF2-40B4-BE49-F238E27FC236}">
-                <a16:creationId xmlns:a16="http://schemas.microsoft.com/office/drawing/2014/main" id="{3CFDA47F-77A1-4511-B39D-D7ECDD3DB956}"/>
+                <a16:creationId xmlns:a16="http://schemas.microsoft.com/office/drawing/2014/main" id="{B6A18B18-7953-4556-A752-FD48C4759C06}"/>
               </a:ext>
             </a:extLst>
           </p:cNvPr>
@@ -2373,7 +2373,7 @@
           <p:cNvPr id="12" name="cover-id">
             <a:extLst xmlns:a="http://schemas.openxmlformats.org/drawingml/2006/main">
               <a:ext uri="{FF2B5EF4-FFF2-40B4-BE49-F238E27FC236}">
-                <a16:creationId xmlns:a16="http://schemas.microsoft.com/office/drawing/2014/main" id="{1D110061-E0CA-4275-8655-7366505FD5DB}"/>
+                <a16:creationId xmlns:a16="http://schemas.microsoft.com/office/drawing/2014/main" id="{1C402C3B-EB90-4B9C-9832-A3969825E41A}"/>
               </a:ext>
             </a:extLst>
           </p:cNvPr>
@@ -2429,7 +2429,7 @@
     </p:spTree>
     <p:extLst>
       <p:ext uri="{BB962C8B-B14F-4D97-AF65-F5344CB8AC3E}">
-        <p14:creationId xmlns:p14="http://schemas.microsoft.com/office/powerpoint/2010/main" val="232050607"/>
+        <p14:creationId xmlns:p14="http://schemas.microsoft.com/office/powerpoint/2010/main" val="266230477"/>
       </p:ext>
     </p:extLst>
   </p:cSld>
@@ -2460,7 +2460,7 @@
           <p:cNvPr id="1" name="s10-rule">
             <a:extLst xmlns:a="http://schemas.openxmlformats.org/drawingml/2006/main">
               <a:ext uri="{FF2B5EF4-FFF2-40B4-BE49-F238E27FC236}">
-                <a16:creationId xmlns:a16="http://schemas.microsoft.com/office/drawing/2014/main" id="{7CDB37F3-ECB9-4CB0-9DBA-1308D6089EAE}"/>
+                <a16:creationId xmlns:a16="http://schemas.microsoft.com/office/drawing/2014/main" id="{82054A59-8AEF-4CB4-88CD-265EC34E6259}"/>
               </a:ext>
             </a:extLst>
           </p:cNvPr>
@@ -2493,7 +2493,7 @@
           <p:cNvPr id="2" name="s10-eyebrow">
             <a:extLst xmlns:a="http://schemas.openxmlformats.org/drawingml/2006/main">
               <a:ext uri="{FF2B5EF4-FFF2-40B4-BE49-F238E27FC236}">
-                <a16:creationId xmlns:a16="http://schemas.microsoft.com/office/drawing/2014/main" id="{594BA76B-FF6B-447D-994C-90F91D0FD03A}"/>
+                <a16:creationId xmlns:a16="http://schemas.microsoft.com/office/drawing/2014/main" id="{D874E7B0-A132-4BE2-B6FB-4D22F7F8519B}"/>
               </a:ext>
             </a:extLst>
           </p:cNvPr>
@@ -2551,7 +2551,7 @@
           <p:cNvPr id="3" name="s10-title">
             <a:extLst xmlns:a="http://schemas.openxmlformats.org/drawingml/2006/main">
               <a:ext uri="{FF2B5EF4-FFF2-40B4-BE49-F238E27FC236}">
-                <a16:creationId xmlns:a16="http://schemas.microsoft.com/office/drawing/2014/main" id="{FF725665-0ED5-4F52-91CC-261FE1FEEB02}"/>
+                <a16:creationId xmlns:a16="http://schemas.microsoft.com/office/drawing/2014/main" id="{EC989C11-6285-4EEE-BEF3-CF112A9630F9}"/>
               </a:ext>
             </a:extLst>
           </p:cNvPr>
@@ -2609,7 +2609,7 @@
           <p:cNvPr id="4" name="s10-footer">
             <a:extLst xmlns:a="http://schemas.openxmlformats.org/drawingml/2006/main">
               <a:ext uri="{FF2B5EF4-FFF2-40B4-BE49-F238E27FC236}">
-                <a16:creationId xmlns:a16="http://schemas.microsoft.com/office/drawing/2014/main" id="{E0EE304B-EE5C-4281-AA01-39D5B79106CF}"/>
+                <a16:creationId xmlns:a16="http://schemas.microsoft.com/office/drawing/2014/main" id="{71911E9B-A2D1-4E4C-A23D-D6E8E012F24A}"/>
               </a:ext>
             </a:extLst>
           </p:cNvPr>
@@ -2640,7 +2640,7 @@
           <p:cNvPr id="5" name="s10-identity">
             <a:extLst xmlns:a="http://schemas.openxmlformats.org/drawingml/2006/main">
               <a:ext uri="{FF2B5EF4-FFF2-40B4-BE49-F238E27FC236}">
-                <a16:creationId xmlns:a16="http://schemas.microsoft.com/office/drawing/2014/main" id="{43F084E0-A114-4320-9020-331F6F57B4C9}"/>
+                <a16:creationId xmlns:a16="http://schemas.microsoft.com/office/drawing/2014/main" id="{C5C643A1-A83E-4271-BDD7-4815C0606488}"/>
               </a:ext>
             </a:extLst>
           </p:cNvPr>
@@ -2698,7 +2698,7 @@
           <p:cNvPr id="6" name="practice-circle-0">
             <a:extLst xmlns:a="http://schemas.openxmlformats.org/drawingml/2006/main">
               <a:ext uri="{FF2B5EF4-FFF2-40B4-BE49-F238E27FC236}">
-                <a16:creationId xmlns:a16="http://schemas.microsoft.com/office/drawing/2014/main" id="{2A7479FA-6771-4C59-81DC-33D3A5F22604}"/>
+                <a16:creationId xmlns:a16="http://schemas.microsoft.com/office/drawing/2014/main" id="{DFC092F6-A929-4535-A1BE-24C0CAA594F7}"/>
               </a:ext>
             </a:extLst>
           </p:cNvPr>
@@ -2731,7 +2731,7 @@
           <p:cNvPr id="7" name="practice-number-0">
             <a:extLst xmlns:a="http://schemas.openxmlformats.org/drawingml/2006/main">
               <a:ext uri="{FF2B5EF4-FFF2-40B4-BE49-F238E27FC236}">
-                <a16:creationId xmlns:a16="http://schemas.microsoft.com/office/drawing/2014/main" id="{EB38649A-548F-4E35-98A4-9F2CACEC5406}"/>
+                <a16:creationId xmlns:a16="http://schemas.microsoft.com/office/drawing/2014/main" id="{7215FE58-22CE-4C84-83FA-892BEC352D81}"/>
               </a:ext>
             </a:extLst>
           </p:cNvPr>
@@ -2789,7 +2789,7 @@
           <p:cNvPr id="8" name="practice-item-0">
             <a:extLst xmlns:a="http://schemas.openxmlformats.org/drawingml/2006/main">
               <a:ext uri="{FF2B5EF4-FFF2-40B4-BE49-F238E27FC236}">
-                <a16:creationId xmlns:a16="http://schemas.microsoft.com/office/drawing/2014/main" id="{7EE4628C-1381-4CEE-8548-DE8649F27D9A}"/>
+                <a16:creationId xmlns:a16="http://schemas.microsoft.com/office/drawing/2014/main" id="{D550F1D8-BE3A-422A-AA3C-74296027E0F1}"/>
               </a:ext>
             </a:extLst>
           </p:cNvPr>
@@ -2853,7 +2853,7 @@
           <p:cNvPr id="9" name="practice-connector-0">
             <a:extLst xmlns:a="http://schemas.openxmlformats.org/drawingml/2006/main">
               <a:ext uri="{FF2B5EF4-FFF2-40B4-BE49-F238E27FC236}">
-                <a16:creationId xmlns:a16="http://schemas.microsoft.com/office/drawing/2014/main" id="{B4A6F457-EEE3-4FB9-8EB7-5F8212858479}"/>
+                <a16:creationId xmlns:a16="http://schemas.microsoft.com/office/drawing/2014/main" id="{09E9607B-DFB6-446B-A087-262D91D33751}"/>
               </a:ext>
             </a:extLst>
           </p:cNvPr>
@@ -2884,7 +2884,7 @@
           <p:cNvPr id="10" name="practice-circle-1">
             <a:extLst xmlns:a="http://schemas.openxmlformats.org/drawingml/2006/main">
               <a:ext uri="{FF2B5EF4-FFF2-40B4-BE49-F238E27FC236}">
-                <a16:creationId xmlns:a16="http://schemas.microsoft.com/office/drawing/2014/main" id="{CF195665-76EB-4903-A34A-AFD48BDE512E}"/>
+                <a16:creationId xmlns:a16="http://schemas.microsoft.com/office/drawing/2014/main" id="{369D5EB6-E52D-4775-8537-84F382E5220F}"/>
               </a:ext>
             </a:extLst>
           </p:cNvPr>
@@ -2917,7 +2917,7 @@
           <p:cNvPr id="11" name="practice-number-1">
             <a:extLst xmlns:a="http://schemas.openxmlformats.org/drawingml/2006/main">
               <a:ext uri="{FF2B5EF4-FFF2-40B4-BE49-F238E27FC236}">
-                <a16:creationId xmlns:a16="http://schemas.microsoft.com/office/drawing/2014/main" id="{A9125940-B602-4950-A8D7-BAA9F01DFAD7}"/>
+                <a16:creationId xmlns:a16="http://schemas.microsoft.com/office/drawing/2014/main" id="{0C42534B-CD9C-487F-8095-4779263A4CA9}"/>
               </a:ext>
             </a:extLst>
           </p:cNvPr>
@@ -2975,7 +2975,7 @@
           <p:cNvPr id="12" name="practice-item-1">
             <a:extLst xmlns:a="http://schemas.openxmlformats.org/drawingml/2006/main">
               <a:ext uri="{FF2B5EF4-FFF2-40B4-BE49-F238E27FC236}">
-                <a16:creationId xmlns:a16="http://schemas.microsoft.com/office/drawing/2014/main" id="{D5BA5E48-42E9-4BDE-A97D-F1E115B8D9E0}"/>
+                <a16:creationId xmlns:a16="http://schemas.microsoft.com/office/drawing/2014/main" id="{051EBBD4-2BDB-4F06-9264-E5B9059FA216}"/>
               </a:ext>
             </a:extLst>
           </p:cNvPr>
@@ -3039,7 +3039,7 @@
           <p:cNvPr id="13" name="practice-connector-1">
             <a:extLst xmlns:a="http://schemas.openxmlformats.org/drawingml/2006/main">
               <a:ext uri="{FF2B5EF4-FFF2-40B4-BE49-F238E27FC236}">
-                <a16:creationId xmlns:a16="http://schemas.microsoft.com/office/drawing/2014/main" id="{869599A1-CDC2-4286-B2E5-51CDA9439572}"/>
+                <a16:creationId xmlns:a16="http://schemas.microsoft.com/office/drawing/2014/main" id="{211C2CCC-46DF-4734-B717-4D6D29EB6274}"/>
               </a:ext>
             </a:extLst>
           </p:cNvPr>
@@ -3070,7 +3070,7 @@
           <p:cNvPr id="14" name="practice-circle-2">
             <a:extLst xmlns:a="http://schemas.openxmlformats.org/drawingml/2006/main">
               <a:ext uri="{FF2B5EF4-FFF2-40B4-BE49-F238E27FC236}">
-                <a16:creationId xmlns:a16="http://schemas.microsoft.com/office/drawing/2014/main" id="{91B61C5D-A4BE-46FE-94AE-90A9118E9DEE}"/>
+                <a16:creationId xmlns:a16="http://schemas.microsoft.com/office/drawing/2014/main" id="{B16AC87C-A4B8-442B-868D-DE8C3DFAF480}"/>
               </a:ext>
             </a:extLst>
           </p:cNvPr>
@@ -3103,7 +3103,7 @@
           <p:cNvPr id="15" name="practice-number-2">
             <a:extLst xmlns:a="http://schemas.openxmlformats.org/drawingml/2006/main">
               <a:ext uri="{FF2B5EF4-FFF2-40B4-BE49-F238E27FC236}">
-                <a16:creationId xmlns:a16="http://schemas.microsoft.com/office/drawing/2014/main" id="{50794A06-7A68-4466-BEE9-C743C1515202}"/>
+                <a16:creationId xmlns:a16="http://schemas.microsoft.com/office/drawing/2014/main" id="{9D796D2A-D9E1-479D-B1EC-5399BF529500}"/>
               </a:ext>
             </a:extLst>
           </p:cNvPr>
@@ -3161,7 +3161,7 @@
           <p:cNvPr id="16" name="practice-item-2">
             <a:extLst xmlns:a="http://schemas.openxmlformats.org/drawingml/2006/main">
               <a:ext uri="{FF2B5EF4-FFF2-40B4-BE49-F238E27FC236}">
-                <a16:creationId xmlns:a16="http://schemas.microsoft.com/office/drawing/2014/main" id="{6809733A-F882-4D96-ADDF-E6A791C7EC1E}"/>
+                <a16:creationId xmlns:a16="http://schemas.microsoft.com/office/drawing/2014/main" id="{8B365A22-EEBA-41A3-8F4C-83AD51EF8870}"/>
               </a:ext>
             </a:extLst>
           </p:cNvPr>
@@ -3223,7 +3223,7 @@
     </p:spTree>
     <p:extLst>
       <p:ext uri="{BB962C8B-B14F-4D97-AF65-F5344CB8AC3E}">
-        <p14:creationId xmlns:p14="http://schemas.microsoft.com/office/powerpoint/2010/main" val="669476249"/>
+        <p14:creationId xmlns:p14="http://schemas.microsoft.com/office/powerpoint/2010/main" val="1338350712"/>
       </p:ext>
     </p:extLst>
   </p:cSld>
@@ -3254,7 +3254,7 @@
           <p:cNvPr id="1" name="s11-rule">
             <a:extLst xmlns:a="http://schemas.openxmlformats.org/drawingml/2006/main">
               <a:ext uri="{FF2B5EF4-FFF2-40B4-BE49-F238E27FC236}">
-                <a16:creationId xmlns:a16="http://schemas.microsoft.com/office/drawing/2014/main" id="{8ECB416E-8513-43CE-A2FB-5A3E24D3EAFC}"/>
+                <a16:creationId xmlns:a16="http://schemas.microsoft.com/office/drawing/2014/main" id="{0D8CE630-BC7E-43A6-9CF3-9151923BA575}"/>
               </a:ext>
             </a:extLst>
           </p:cNvPr>
@@ -3287,7 +3287,7 @@
           <p:cNvPr id="2" name="s11-eyebrow">
             <a:extLst xmlns:a="http://schemas.openxmlformats.org/drawingml/2006/main">
               <a:ext uri="{FF2B5EF4-FFF2-40B4-BE49-F238E27FC236}">
-                <a16:creationId xmlns:a16="http://schemas.microsoft.com/office/drawing/2014/main" id="{B0A9D73C-4DEA-4A7D-BAC2-D3B32CE6ACAA}"/>
+                <a16:creationId xmlns:a16="http://schemas.microsoft.com/office/drawing/2014/main" id="{BD84CF3A-4D73-4DF5-A47C-B47DB3612DE5}"/>
               </a:ext>
             </a:extLst>
           </p:cNvPr>
@@ -3345,7 +3345,7 @@
           <p:cNvPr id="3" name="s11-title">
             <a:extLst xmlns:a="http://schemas.openxmlformats.org/drawingml/2006/main">
               <a:ext uri="{FF2B5EF4-FFF2-40B4-BE49-F238E27FC236}">
-                <a16:creationId xmlns:a16="http://schemas.microsoft.com/office/drawing/2014/main" id="{5552CD9F-3D8C-4AF7-A8CF-ACD65F0ACC65}"/>
+                <a16:creationId xmlns:a16="http://schemas.microsoft.com/office/drawing/2014/main" id="{E3B8DADB-82D0-4787-9A54-1B96CB87B4AA}"/>
               </a:ext>
             </a:extLst>
           </p:cNvPr>
@@ -3403,7 +3403,7 @@
           <p:cNvPr id="4" name="s11-footer">
             <a:extLst xmlns:a="http://schemas.openxmlformats.org/drawingml/2006/main">
               <a:ext uri="{FF2B5EF4-FFF2-40B4-BE49-F238E27FC236}">
-                <a16:creationId xmlns:a16="http://schemas.microsoft.com/office/drawing/2014/main" id="{46908F47-8BD1-4353-9713-F3B3863B83F8}"/>
+                <a16:creationId xmlns:a16="http://schemas.microsoft.com/office/drawing/2014/main" id="{E5BBEEAF-B522-418D-88F0-DEB5CC79DDA7}"/>
               </a:ext>
             </a:extLst>
           </p:cNvPr>
@@ -3434,7 +3434,7 @@
           <p:cNvPr id="5" name="s11-identity">
             <a:extLst xmlns:a="http://schemas.openxmlformats.org/drawingml/2006/main">
               <a:ext uri="{FF2B5EF4-FFF2-40B4-BE49-F238E27FC236}">
-                <a16:creationId xmlns:a16="http://schemas.microsoft.com/office/drawing/2014/main" id="{9CE1D2D7-8361-46D3-98CB-D3FF50195DDA}"/>
+                <a16:creationId xmlns:a16="http://schemas.microsoft.com/office/drawing/2014/main" id="{70B730FC-470E-4577-B0BD-817AF0E8D634}"/>
               </a:ext>
             </a:extLst>
           </p:cNvPr>
@@ -3492,7 +3492,7 @@
           <p:cNvPr id="6" name="recap-circle-0">
             <a:extLst xmlns:a="http://schemas.openxmlformats.org/drawingml/2006/main">
               <a:ext uri="{FF2B5EF4-FFF2-40B4-BE49-F238E27FC236}">
-                <a16:creationId xmlns:a16="http://schemas.microsoft.com/office/drawing/2014/main" id="{E60A11B7-D354-4CB7-8B87-E71BB69ECD06}"/>
+                <a16:creationId xmlns:a16="http://schemas.microsoft.com/office/drawing/2014/main" id="{E48A1128-49E9-4C25-8EA5-1C631A2A59BE}"/>
               </a:ext>
             </a:extLst>
           </p:cNvPr>
@@ -3525,7 +3525,7 @@
           <p:cNvPr id="7" name="recap-number-0">
             <a:extLst xmlns:a="http://schemas.openxmlformats.org/drawingml/2006/main">
               <a:ext uri="{FF2B5EF4-FFF2-40B4-BE49-F238E27FC236}">
-                <a16:creationId xmlns:a16="http://schemas.microsoft.com/office/drawing/2014/main" id="{CEB67531-DC48-4760-AD1A-0BD44B07DB9B}"/>
+                <a16:creationId xmlns:a16="http://schemas.microsoft.com/office/drawing/2014/main" id="{137B7B14-1C96-415C-AE35-674EBFCF41FC}"/>
               </a:ext>
             </a:extLst>
           </p:cNvPr>
@@ -3583,7 +3583,7 @@
           <p:cNvPr id="8" name="recap-item-0">
             <a:extLst xmlns:a="http://schemas.openxmlformats.org/drawingml/2006/main">
               <a:ext uri="{FF2B5EF4-FFF2-40B4-BE49-F238E27FC236}">
-                <a16:creationId xmlns:a16="http://schemas.microsoft.com/office/drawing/2014/main" id="{BFCB3BDA-E409-4942-8C9E-9111B2C58CD0}"/>
+                <a16:creationId xmlns:a16="http://schemas.microsoft.com/office/drawing/2014/main" id="{B2A21049-7442-47E7-81BD-BB639B07EF3C}"/>
               </a:ext>
             </a:extLst>
           </p:cNvPr>
@@ -3647,7 +3647,7 @@
           <p:cNvPr id="9" name="recap-connector-0">
             <a:extLst xmlns:a="http://schemas.openxmlformats.org/drawingml/2006/main">
               <a:ext uri="{FF2B5EF4-FFF2-40B4-BE49-F238E27FC236}">
-                <a16:creationId xmlns:a16="http://schemas.microsoft.com/office/drawing/2014/main" id="{31540F05-0BD5-4FFC-84DF-A5B8DE72A1F7}"/>
+                <a16:creationId xmlns:a16="http://schemas.microsoft.com/office/drawing/2014/main" id="{81408188-B0E5-4C40-90E5-06F87ADA8923}"/>
               </a:ext>
             </a:extLst>
           </p:cNvPr>
@@ -3678,7 +3678,7 @@
           <p:cNvPr id="10" name="recap-circle-1">
             <a:extLst xmlns:a="http://schemas.openxmlformats.org/drawingml/2006/main">
               <a:ext uri="{FF2B5EF4-FFF2-40B4-BE49-F238E27FC236}">
-                <a16:creationId xmlns:a16="http://schemas.microsoft.com/office/drawing/2014/main" id="{DBFC93F7-EDD8-4991-B501-1F963BF49D77}"/>
+                <a16:creationId xmlns:a16="http://schemas.microsoft.com/office/drawing/2014/main" id="{ECFF9639-5AC0-40B9-8ED1-9AF01A3F2835}"/>
               </a:ext>
             </a:extLst>
           </p:cNvPr>
@@ -3711,7 +3711,7 @@
           <p:cNvPr id="11" name="recap-number-1">
             <a:extLst xmlns:a="http://schemas.openxmlformats.org/drawingml/2006/main">
               <a:ext uri="{FF2B5EF4-FFF2-40B4-BE49-F238E27FC236}">
-                <a16:creationId xmlns:a16="http://schemas.microsoft.com/office/drawing/2014/main" id="{A26890D6-002E-4583-B248-26287173EFCA}"/>
+                <a16:creationId xmlns:a16="http://schemas.microsoft.com/office/drawing/2014/main" id="{11AA7367-A44E-4610-A810-71E4082CFE97}"/>
               </a:ext>
             </a:extLst>
           </p:cNvPr>
@@ -3769,7 +3769,7 @@
           <p:cNvPr id="12" name="recap-item-1">
             <a:extLst xmlns:a="http://schemas.openxmlformats.org/drawingml/2006/main">
               <a:ext uri="{FF2B5EF4-FFF2-40B4-BE49-F238E27FC236}">
-                <a16:creationId xmlns:a16="http://schemas.microsoft.com/office/drawing/2014/main" id="{1769A89A-04BD-44C5-BB36-0253AA2267F9}"/>
+                <a16:creationId xmlns:a16="http://schemas.microsoft.com/office/drawing/2014/main" id="{ECDD7954-A5F5-42BA-BDA2-FD36213B37DB}"/>
               </a:ext>
             </a:extLst>
           </p:cNvPr>
@@ -3833,7 +3833,7 @@
           <p:cNvPr id="13" name="recap-connector-1">
             <a:extLst xmlns:a="http://schemas.openxmlformats.org/drawingml/2006/main">
               <a:ext uri="{FF2B5EF4-FFF2-40B4-BE49-F238E27FC236}">
-                <a16:creationId xmlns:a16="http://schemas.microsoft.com/office/drawing/2014/main" id="{2B12CE4F-104E-41DB-B142-8447CD8ABDE4}"/>
+                <a16:creationId xmlns:a16="http://schemas.microsoft.com/office/drawing/2014/main" id="{8A97357C-70A0-4CAE-84E3-6EB6440AD20B}"/>
               </a:ext>
             </a:extLst>
           </p:cNvPr>
@@ -3864,7 +3864,7 @@
           <p:cNvPr id="14" name="recap-circle-2">
             <a:extLst xmlns:a="http://schemas.openxmlformats.org/drawingml/2006/main">
               <a:ext uri="{FF2B5EF4-FFF2-40B4-BE49-F238E27FC236}">
-                <a16:creationId xmlns:a16="http://schemas.microsoft.com/office/drawing/2014/main" id="{CD0CB120-1DB9-420E-B558-B214D6546786}"/>
+                <a16:creationId xmlns:a16="http://schemas.microsoft.com/office/drawing/2014/main" id="{5AD4E8E7-0301-48DB-B8A1-E2884B4CC2D5}"/>
               </a:ext>
             </a:extLst>
           </p:cNvPr>
@@ -3897,7 +3897,7 @@
           <p:cNvPr id="15" name="recap-number-2">
             <a:extLst xmlns:a="http://schemas.openxmlformats.org/drawingml/2006/main">
               <a:ext uri="{FF2B5EF4-FFF2-40B4-BE49-F238E27FC236}">
-                <a16:creationId xmlns:a16="http://schemas.microsoft.com/office/drawing/2014/main" id="{0A4154D2-306A-4454-B141-E364B1354CE5}"/>
+                <a16:creationId xmlns:a16="http://schemas.microsoft.com/office/drawing/2014/main" id="{B7CB1E6B-16DB-409A-B64A-2D16277B48F8}"/>
               </a:ext>
             </a:extLst>
           </p:cNvPr>
@@ -3955,7 +3955,7 @@
           <p:cNvPr id="16" name="recap-item-2">
             <a:extLst xmlns:a="http://schemas.openxmlformats.org/drawingml/2006/main">
               <a:ext uri="{FF2B5EF4-FFF2-40B4-BE49-F238E27FC236}">
-                <a16:creationId xmlns:a16="http://schemas.microsoft.com/office/drawing/2014/main" id="{A31E3083-7EAC-425B-83E8-948FFD563654}"/>
+                <a16:creationId xmlns:a16="http://schemas.microsoft.com/office/drawing/2014/main" id="{BD539888-DC3C-425E-B34B-99BE9200EFCE}"/>
               </a:ext>
             </a:extLst>
           </p:cNvPr>
@@ -4017,7 +4017,7 @@
     </p:spTree>
     <p:extLst>
       <p:ext uri="{BB962C8B-B14F-4D97-AF65-F5344CB8AC3E}">
-        <p14:creationId xmlns:p14="http://schemas.microsoft.com/office/powerpoint/2010/main" val="312450034"/>
+        <p14:creationId xmlns:p14="http://schemas.microsoft.com/office/powerpoint/2010/main" val="1666144713"/>
       </p:ext>
     </p:extLst>
   </p:cSld>
@@ -4048,7 +4048,7 @@
           <p:cNvPr id="1" name="s12-rule">
             <a:extLst xmlns:a="http://schemas.openxmlformats.org/drawingml/2006/main">
               <a:ext uri="{FF2B5EF4-FFF2-40B4-BE49-F238E27FC236}">
-                <a16:creationId xmlns:a16="http://schemas.microsoft.com/office/drawing/2014/main" id="{699ADB3A-8114-4127-8B59-19F4CA9301AD}"/>
+                <a16:creationId xmlns:a16="http://schemas.microsoft.com/office/drawing/2014/main" id="{962DEE7A-1B68-48B1-9DC2-EA2876F6EFFC}"/>
               </a:ext>
             </a:extLst>
           </p:cNvPr>
@@ -4081,7 +4081,7 @@
           <p:cNvPr id="2" name="s12-eyebrow">
             <a:extLst xmlns:a="http://schemas.openxmlformats.org/drawingml/2006/main">
               <a:ext uri="{FF2B5EF4-FFF2-40B4-BE49-F238E27FC236}">
-                <a16:creationId xmlns:a16="http://schemas.microsoft.com/office/drawing/2014/main" id="{BF772DA3-4FF8-495B-A493-36694177B541}"/>
+                <a16:creationId xmlns:a16="http://schemas.microsoft.com/office/drawing/2014/main" id="{DAD9292D-AD66-4B80-BA70-C5BA94637A75}"/>
               </a:ext>
             </a:extLst>
           </p:cNvPr>
@@ -4139,7 +4139,7 @@
           <p:cNvPr id="3" name="s12-title">
             <a:extLst xmlns:a="http://schemas.openxmlformats.org/drawingml/2006/main">
               <a:ext uri="{FF2B5EF4-FFF2-40B4-BE49-F238E27FC236}">
-                <a16:creationId xmlns:a16="http://schemas.microsoft.com/office/drawing/2014/main" id="{3A7ADA82-4CF2-4E99-8D7B-E16C063F9E40}"/>
+                <a16:creationId xmlns:a16="http://schemas.microsoft.com/office/drawing/2014/main" id="{A1B68526-1A3C-4005-B6E8-4C860551A1EA}"/>
               </a:ext>
             </a:extLst>
           </p:cNvPr>
@@ -4197,7 +4197,7 @@
           <p:cNvPr id="4" name="s12-footer">
             <a:extLst xmlns:a="http://schemas.openxmlformats.org/drawingml/2006/main">
               <a:ext uri="{FF2B5EF4-FFF2-40B4-BE49-F238E27FC236}">
-                <a16:creationId xmlns:a16="http://schemas.microsoft.com/office/drawing/2014/main" id="{64E7F268-8B1F-4B74-9DDA-434092CE75B5}"/>
+                <a16:creationId xmlns:a16="http://schemas.microsoft.com/office/drawing/2014/main" id="{A7717F79-E60B-4AE0-BDDC-BE321DC2617C}"/>
               </a:ext>
             </a:extLst>
           </p:cNvPr>
@@ -4228,7 +4228,7 @@
           <p:cNvPr id="5" name="s12-identity">
             <a:extLst xmlns:a="http://schemas.openxmlformats.org/drawingml/2006/main">
               <a:ext uri="{FF2B5EF4-FFF2-40B4-BE49-F238E27FC236}">
-                <a16:creationId xmlns:a16="http://schemas.microsoft.com/office/drawing/2014/main" id="{5907A580-E74D-412A-8018-446CF27B69E9}"/>
+                <a16:creationId xmlns:a16="http://schemas.microsoft.com/office/drawing/2014/main" id="{292BD3B2-91F6-41FA-9654-319A8EFE0324}"/>
               </a:ext>
             </a:extLst>
           </p:cNvPr>
@@ -4286,7 +4286,7 @@
           <p:cNvPr id="6" name="source-0">
             <a:extLst xmlns:a="http://schemas.openxmlformats.org/drawingml/2006/main">
               <a:ext uri="{FF2B5EF4-FFF2-40B4-BE49-F238E27FC236}">
-                <a16:creationId xmlns:a16="http://schemas.microsoft.com/office/drawing/2014/main" id="{29488CA5-8C7B-4CE2-B776-A203846853E9}"/>
+                <a16:creationId xmlns:a16="http://schemas.microsoft.com/office/drawing/2014/main" id="{2AEA65BD-896E-4E5D-BBD5-A050EEA6745F}"/>
               </a:ext>
             </a:extLst>
           </p:cNvPr>
@@ -4350,7 +4350,7 @@
           <p:cNvPr id="7" name="source-1">
             <a:extLst xmlns:a="http://schemas.openxmlformats.org/drawingml/2006/main">
               <a:ext uri="{FF2B5EF4-FFF2-40B4-BE49-F238E27FC236}">
-                <a16:creationId xmlns:a16="http://schemas.microsoft.com/office/drawing/2014/main" id="{B1705C80-A1CA-4B30-BDA3-96D28010B9A7}"/>
+                <a16:creationId xmlns:a16="http://schemas.microsoft.com/office/drawing/2014/main" id="{9A9C2BA2-9C0C-45FE-BEC9-D199A71DDEC3}"/>
               </a:ext>
             </a:extLst>
           </p:cNvPr>
@@ -4414,7 +4414,7 @@
           <p:cNvPr id="8" name="s12-takeaway-rule">
             <a:extLst xmlns:a="http://schemas.openxmlformats.org/drawingml/2006/main">
               <a:ext uri="{FF2B5EF4-FFF2-40B4-BE49-F238E27FC236}">
-                <a16:creationId xmlns:a16="http://schemas.microsoft.com/office/drawing/2014/main" id="{6492FFE7-2DA5-46A2-A646-D5E9E29F82FB}"/>
+                <a16:creationId xmlns:a16="http://schemas.microsoft.com/office/drawing/2014/main" id="{8073ADFC-1118-45DA-B758-746C19FDA989}"/>
               </a:ext>
             </a:extLst>
           </p:cNvPr>
@@ -4447,7 +4447,7 @@
           <p:cNvPr id="9" name="s12-takeaway">
             <a:extLst xmlns:a="http://schemas.openxmlformats.org/drawingml/2006/main">
               <a:ext uri="{FF2B5EF4-FFF2-40B4-BE49-F238E27FC236}">
-                <a16:creationId xmlns:a16="http://schemas.microsoft.com/office/drawing/2014/main" id="{560F2A66-5A74-4F08-BA83-351BA8FE279C}"/>
+                <a16:creationId xmlns:a16="http://schemas.microsoft.com/office/drawing/2014/main" id="{709D3D6B-6D1C-4920-A082-08EC98654EB0}"/>
               </a:ext>
             </a:extLst>
           </p:cNvPr>
@@ -4472,7 +4472,7 @@
         </p:spPr>
         <p:txBody>
           <a:bodyPr xmlns:a="http://schemas.openxmlformats.org/drawingml/2006/main" lIns="0" tIns="0" rIns="0" bIns="0" anchor="ctr">
-            <a:normAutofit fontScale="95911"/>
+            <a:normAutofit fontScale="100000"/>
           </a:bodyPr>
           <a:lstStyle xmlns:a="http://schemas.openxmlformats.org/drawingml/2006/main"/>
           <a:p xmlns:a="http://schemas.openxmlformats.org/drawingml/2006/main">
@@ -4495,7 +4495,7 @@
                 <a:ea typeface="PingFang SC"/>
                 <a:cs typeface="PingFang SC"/>
               </a:rPr>
-              <a:t>课程精编页用于讲授主线；播放器中的“原课件”模式保留团队 PowerPoint 精选页、真实图片和可播放视频。</a:t>
+              <a:t>课程正文与幻灯片共享同一知识主线，图片和视频用于帮助理解本节概念与案例。</a:t>
             </a:r>
           </a:p>
         </p:txBody>
@@ -4503,7 +4503,7 @@
     </p:spTree>
     <p:extLst>
       <p:ext uri="{BB962C8B-B14F-4D97-AF65-F5344CB8AC3E}">
-        <p14:creationId xmlns:p14="http://schemas.microsoft.com/office/powerpoint/2010/main" val="1816446720"/>
+        <p14:creationId xmlns:p14="http://schemas.microsoft.com/office/powerpoint/2010/main" val="2093500205"/>
       </p:ext>
     </p:extLst>
   </p:cSld>
@@ -4534,7 +4534,7 @@
           <p:cNvPr id="1" name="s2-rule">
             <a:extLst xmlns:a="http://schemas.openxmlformats.org/drawingml/2006/main">
               <a:ext uri="{FF2B5EF4-FFF2-40B4-BE49-F238E27FC236}">
-                <a16:creationId xmlns:a16="http://schemas.microsoft.com/office/drawing/2014/main" id="{CCEA6878-E8D3-4105-91DA-F3C8F1B90775}"/>
+                <a16:creationId xmlns:a16="http://schemas.microsoft.com/office/drawing/2014/main" id="{1D91DA60-5276-4E81-A98B-6B559C836084}"/>
               </a:ext>
             </a:extLst>
           </p:cNvPr>
@@ -4567,7 +4567,7 @@
           <p:cNvPr id="2" name="s2-eyebrow">
             <a:extLst xmlns:a="http://schemas.openxmlformats.org/drawingml/2006/main">
               <a:ext uri="{FF2B5EF4-FFF2-40B4-BE49-F238E27FC236}">
-                <a16:creationId xmlns:a16="http://schemas.microsoft.com/office/drawing/2014/main" id="{C2061D56-178E-4D17-B630-805A9DD4DDB5}"/>
+                <a16:creationId xmlns:a16="http://schemas.microsoft.com/office/drawing/2014/main" id="{7D6B0348-0504-474A-A1F7-D623C68A0858}"/>
               </a:ext>
             </a:extLst>
           </p:cNvPr>
@@ -4625,7 +4625,7 @@
           <p:cNvPr id="3" name="s2-title">
             <a:extLst xmlns:a="http://schemas.openxmlformats.org/drawingml/2006/main">
               <a:ext uri="{FF2B5EF4-FFF2-40B4-BE49-F238E27FC236}">
-                <a16:creationId xmlns:a16="http://schemas.microsoft.com/office/drawing/2014/main" id="{8987AAF8-321F-4278-90CE-0870CE35A162}"/>
+                <a16:creationId xmlns:a16="http://schemas.microsoft.com/office/drawing/2014/main" id="{2115714D-486F-46B0-81F3-A45E25161144}"/>
               </a:ext>
             </a:extLst>
           </p:cNvPr>
@@ -4683,7 +4683,7 @@
           <p:cNvPr id="4" name="s2-footer">
             <a:extLst xmlns:a="http://schemas.openxmlformats.org/drawingml/2006/main">
               <a:ext uri="{FF2B5EF4-FFF2-40B4-BE49-F238E27FC236}">
-                <a16:creationId xmlns:a16="http://schemas.microsoft.com/office/drawing/2014/main" id="{66D3DC86-A1AF-4CAB-BAED-F45BA147016F}"/>
+                <a16:creationId xmlns:a16="http://schemas.microsoft.com/office/drawing/2014/main" id="{77FC6B5F-3127-4930-868D-9F6DB7CA47B5}"/>
               </a:ext>
             </a:extLst>
           </p:cNvPr>
@@ -4714,7 +4714,7 @@
           <p:cNvPr id="5" name="s2-identity">
             <a:extLst xmlns:a="http://schemas.openxmlformats.org/drawingml/2006/main">
               <a:ext uri="{FF2B5EF4-FFF2-40B4-BE49-F238E27FC236}">
-                <a16:creationId xmlns:a16="http://schemas.microsoft.com/office/drawing/2014/main" id="{B7DD0BCC-7331-4101-80ED-6156A8294BE7}"/>
+                <a16:creationId xmlns:a16="http://schemas.microsoft.com/office/drawing/2014/main" id="{A1CED6D6-C655-432D-B55A-EC843BFFAF00}"/>
               </a:ext>
             </a:extLst>
           </p:cNvPr>
@@ -4772,7 +4772,7 @@
           <p:cNvPr id="6" name="objective-1">
             <a:extLst xmlns:a="http://schemas.openxmlformats.org/drawingml/2006/main">
               <a:ext uri="{FF2B5EF4-FFF2-40B4-BE49-F238E27FC236}">
-                <a16:creationId xmlns:a16="http://schemas.microsoft.com/office/drawing/2014/main" id="{F3E2DBAA-E0F2-4A1B-B598-AD2D15F72C1F}"/>
+                <a16:creationId xmlns:a16="http://schemas.microsoft.com/office/drawing/2014/main" id="{CCFC7C9D-AD02-45EC-AB00-33DCC2FE86E9}"/>
               </a:ext>
             </a:extLst>
           </p:cNvPr>
@@ -4859,7 +4859,7 @@
           <p:cNvPr id="7" name="objective-2">
             <a:extLst xmlns:a="http://schemas.openxmlformats.org/drawingml/2006/main">
               <a:ext uri="{FF2B5EF4-FFF2-40B4-BE49-F238E27FC236}">
-                <a16:creationId xmlns:a16="http://schemas.microsoft.com/office/drawing/2014/main" id="{5553DB64-9CA7-483F-89D3-267780AE7196}"/>
+                <a16:creationId xmlns:a16="http://schemas.microsoft.com/office/drawing/2014/main" id="{E29166D4-93CE-45B3-8F9B-6F4C89938A33}"/>
               </a:ext>
             </a:extLst>
           </p:cNvPr>
@@ -4946,7 +4946,7 @@
           <p:cNvPr id="8" name="objective-3">
             <a:extLst xmlns:a="http://schemas.openxmlformats.org/drawingml/2006/main">
               <a:ext uri="{FF2B5EF4-FFF2-40B4-BE49-F238E27FC236}">
-                <a16:creationId xmlns:a16="http://schemas.microsoft.com/office/drawing/2014/main" id="{210E1034-57DE-41C9-BAD6-D176CE263DA5}"/>
+                <a16:creationId xmlns:a16="http://schemas.microsoft.com/office/drawing/2014/main" id="{7B47067E-8DF8-4076-8A40-D2B6408157A5}"/>
               </a:ext>
             </a:extLst>
           </p:cNvPr>
@@ -5033,7 +5033,7 @@
           <p:cNvPr id="9" name="objective-4">
             <a:extLst xmlns:a="http://schemas.openxmlformats.org/drawingml/2006/main">
               <a:ext uri="{FF2B5EF4-FFF2-40B4-BE49-F238E27FC236}">
-                <a16:creationId xmlns:a16="http://schemas.microsoft.com/office/drawing/2014/main" id="{63F78ADC-459C-4510-B9D0-AF81D3F13199}"/>
+                <a16:creationId xmlns:a16="http://schemas.microsoft.com/office/drawing/2014/main" id="{AF0C8CFD-8A87-42E9-A7B1-54FA17C59BEC}"/>
               </a:ext>
             </a:extLst>
           </p:cNvPr>
@@ -5118,7 +5118,7 @@
     </p:spTree>
     <p:extLst>
       <p:ext uri="{BB962C8B-B14F-4D97-AF65-F5344CB8AC3E}">
-        <p14:creationId xmlns:p14="http://schemas.microsoft.com/office/powerpoint/2010/main" val="312387479"/>
+        <p14:creationId xmlns:p14="http://schemas.microsoft.com/office/powerpoint/2010/main" val="1292571977"/>
       </p:ext>
     </p:extLst>
   </p:cSld>
@@ -5149,7 +5149,7 @@
           <p:cNvPr id="1" name="s3-rule">
             <a:extLst xmlns:a="http://schemas.openxmlformats.org/drawingml/2006/main">
               <a:ext uri="{FF2B5EF4-FFF2-40B4-BE49-F238E27FC236}">
-                <a16:creationId xmlns:a16="http://schemas.microsoft.com/office/drawing/2014/main" id="{9C767A09-7340-4E43-9172-9F5E1828BBFA}"/>
+                <a16:creationId xmlns:a16="http://schemas.microsoft.com/office/drawing/2014/main" id="{CB932B67-A572-4DD3-A32E-E03D6CA1C3AA}"/>
               </a:ext>
             </a:extLst>
           </p:cNvPr>
@@ -5182,7 +5182,7 @@
           <p:cNvPr id="2" name="s3-eyebrow">
             <a:extLst xmlns:a="http://schemas.openxmlformats.org/drawingml/2006/main">
               <a:ext uri="{FF2B5EF4-FFF2-40B4-BE49-F238E27FC236}">
-                <a16:creationId xmlns:a16="http://schemas.microsoft.com/office/drawing/2014/main" id="{7093CDE4-1D6F-40A4-B8D8-B570927B8026}"/>
+                <a16:creationId xmlns:a16="http://schemas.microsoft.com/office/drawing/2014/main" id="{ACF62C28-2EE0-40A3-AD0F-C9306D44FCAC}"/>
               </a:ext>
             </a:extLst>
           </p:cNvPr>
@@ -5240,7 +5240,7 @@
           <p:cNvPr id="3" name="s3-title">
             <a:extLst xmlns:a="http://schemas.openxmlformats.org/drawingml/2006/main">
               <a:ext uri="{FF2B5EF4-FFF2-40B4-BE49-F238E27FC236}">
-                <a16:creationId xmlns:a16="http://schemas.microsoft.com/office/drawing/2014/main" id="{083EF1D8-0077-4021-B820-8D58510703D1}"/>
+                <a16:creationId xmlns:a16="http://schemas.microsoft.com/office/drawing/2014/main" id="{68CE3C34-1D5A-425C-823F-5D82B2C1C57E}"/>
               </a:ext>
             </a:extLst>
           </p:cNvPr>
@@ -5298,7 +5298,7 @@
           <p:cNvPr id="4" name="s3-footer">
             <a:extLst xmlns:a="http://schemas.openxmlformats.org/drawingml/2006/main">
               <a:ext uri="{FF2B5EF4-FFF2-40B4-BE49-F238E27FC236}">
-                <a16:creationId xmlns:a16="http://schemas.microsoft.com/office/drawing/2014/main" id="{296329C7-1324-47DE-8373-76330C0C8F12}"/>
+                <a16:creationId xmlns:a16="http://schemas.microsoft.com/office/drawing/2014/main" id="{B9446B7E-02FA-4605-B481-8A7BDCB94A34}"/>
               </a:ext>
             </a:extLst>
           </p:cNvPr>
@@ -5329,7 +5329,7 @@
           <p:cNvPr id="5" name="s3-identity">
             <a:extLst xmlns:a="http://schemas.openxmlformats.org/drawingml/2006/main">
               <a:ext uri="{FF2B5EF4-FFF2-40B4-BE49-F238E27FC236}">
-                <a16:creationId xmlns:a16="http://schemas.microsoft.com/office/drawing/2014/main" id="{E6E5ABC2-C7C5-403D-90BB-FFFCB45BE9C0}"/>
+                <a16:creationId xmlns:a16="http://schemas.microsoft.com/office/drawing/2014/main" id="{5D23EFBA-2074-4BD8-B7D1-88DAFA1FEEF5}"/>
               </a:ext>
             </a:extLst>
           </p:cNvPr>
@@ -5387,7 +5387,7 @@
           <p:cNvPr id="6" name="core-no-0">
             <a:extLst xmlns:a="http://schemas.openxmlformats.org/drawingml/2006/main">
               <a:ext uri="{FF2B5EF4-FFF2-40B4-BE49-F238E27FC236}">
-                <a16:creationId xmlns:a16="http://schemas.microsoft.com/office/drawing/2014/main" id="{B5FD29E5-3DF8-4089-83CF-0D2EAD9D366F}"/>
+                <a16:creationId xmlns:a16="http://schemas.microsoft.com/office/drawing/2014/main" id="{02EA1A7E-0E57-4D5E-80C8-64486538BB2F}"/>
               </a:ext>
             </a:extLst>
           </p:cNvPr>
@@ -5445,7 +5445,7 @@
           <p:cNvPr id="7" name="core-label-0">
             <a:extLst xmlns:a="http://schemas.openxmlformats.org/drawingml/2006/main">
               <a:ext uri="{FF2B5EF4-FFF2-40B4-BE49-F238E27FC236}">
-                <a16:creationId xmlns:a16="http://schemas.microsoft.com/office/drawing/2014/main" id="{A9FE58E5-55AD-4331-93E3-8FE0C9DFBED8}"/>
+                <a16:creationId xmlns:a16="http://schemas.microsoft.com/office/drawing/2014/main" id="{B1494A14-348D-4E8E-BA24-534686A1E262}"/>
               </a:ext>
             </a:extLst>
           </p:cNvPr>
@@ -5503,7 +5503,7 @@
           <p:cNvPr id="8" name="core-body-0">
             <a:extLst xmlns:a="http://schemas.openxmlformats.org/drawingml/2006/main">
               <a:ext uri="{FF2B5EF4-FFF2-40B4-BE49-F238E27FC236}">
-                <a16:creationId xmlns:a16="http://schemas.microsoft.com/office/drawing/2014/main" id="{5D16E806-A944-4850-8E79-A7FF9384BF56}"/>
+                <a16:creationId xmlns:a16="http://schemas.microsoft.com/office/drawing/2014/main" id="{B7DD6565-FAA0-4D43-88B4-1C0B7D8888C7}"/>
               </a:ext>
             </a:extLst>
           </p:cNvPr>
@@ -5567,7 +5567,7 @@
           <p:cNvPr id="9" name="core-no-1">
             <a:extLst xmlns:a="http://schemas.openxmlformats.org/drawingml/2006/main">
               <a:ext uri="{FF2B5EF4-FFF2-40B4-BE49-F238E27FC236}">
-                <a16:creationId xmlns:a16="http://schemas.microsoft.com/office/drawing/2014/main" id="{BE20CE18-0516-4FFE-ABB4-A48E2593D759}"/>
+                <a16:creationId xmlns:a16="http://schemas.microsoft.com/office/drawing/2014/main" id="{1F90C9E1-1E83-46D0-AAF9-07A7FE565454}"/>
               </a:ext>
             </a:extLst>
           </p:cNvPr>
@@ -5625,7 +5625,7 @@
           <p:cNvPr id="10" name="core-label-1">
             <a:extLst xmlns:a="http://schemas.openxmlformats.org/drawingml/2006/main">
               <a:ext uri="{FF2B5EF4-FFF2-40B4-BE49-F238E27FC236}">
-                <a16:creationId xmlns:a16="http://schemas.microsoft.com/office/drawing/2014/main" id="{FB603413-C53A-4C97-8CD5-0D3E249CCF6B}"/>
+                <a16:creationId xmlns:a16="http://schemas.microsoft.com/office/drawing/2014/main" id="{3274E981-B742-4A38-9FCD-FC212F0E04D2}"/>
               </a:ext>
             </a:extLst>
           </p:cNvPr>
@@ -5683,7 +5683,7 @@
           <p:cNvPr id="11" name="core-body-1">
             <a:extLst xmlns:a="http://schemas.openxmlformats.org/drawingml/2006/main">
               <a:ext uri="{FF2B5EF4-FFF2-40B4-BE49-F238E27FC236}">
-                <a16:creationId xmlns:a16="http://schemas.microsoft.com/office/drawing/2014/main" id="{D6C0D000-09F8-4EA4-B019-4293A7326532}"/>
+                <a16:creationId xmlns:a16="http://schemas.microsoft.com/office/drawing/2014/main" id="{56FBBC54-453B-486E-89A5-43BF498D6991}"/>
               </a:ext>
             </a:extLst>
           </p:cNvPr>
@@ -5747,7 +5747,7 @@
           <p:cNvPr id="12" name="s3-takeaway-rule">
             <a:extLst xmlns:a="http://schemas.openxmlformats.org/drawingml/2006/main">
               <a:ext uri="{FF2B5EF4-FFF2-40B4-BE49-F238E27FC236}">
-                <a16:creationId xmlns:a16="http://schemas.microsoft.com/office/drawing/2014/main" id="{3A0A817C-7DD4-4EBA-B59D-D19D96D043AE}"/>
+                <a16:creationId xmlns:a16="http://schemas.microsoft.com/office/drawing/2014/main" id="{06E8F918-B8F2-46A4-A601-CE14ED116D07}"/>
               </a:ext>
             </a:extLst>
           </p:cNvPr>
@@ -5780,7 +5780,7 @@
           <p:cNvPr id="13" name="s3-takeaway">
             <a:extLst xmlns:a="http://schemas.openxmlformats.org/drawingml/2006/main">
               <a:ext uri="{FF2B5EF4-FFF2-40B4-BE49-F238E27FC236}">
-                <a16:creationId xmlns:a16="http://schemas.microsoft.com/office/drawing/2014/main" id="{57AEF520-F32C-4124-9D38-009E763C94F7}"/>
+                <a16:creationId xmlns:a16="http://schemas.microsoft.com/office/drawing/2014/main" id="{C1E80A47-C3A1-40E2-B144-1E7C0C9879E9}"/>
               </a:ext>
             </a:extLst>
           </p:cNvPr>
@@ -5836,7 +5836,7 @@
     </p:spTree>
     <p:extLst>
       <p:ext uri="{BB962C8B-B14F-4D97-AF65-F5344CB8AC3E}">
-        <p14:creationId xmlns:p14="http://schemas.microsoft.com/office/powerpoint/2010/main" val="504881014"/>
+        <p14:creationId xmlns:p14="http://schemas.microsoft.com/office/powerpoint/2010/main" val="1481234613"/>
       </p:ext>
     </p:extLst>
   </p:cSld>
@@ -5867,7 +5867,7 @@
           <p:cNvPr id="1" name="s4-rule">
             <a:extLst xmlns:a="http://schemas.openxmlformats.org/drawingml/2006/main">
               <a:ext uri="{FF2B5EF4-FFF2-40B4-BE49-F238E27FC236}">
-                <a16:creationId xmlns:a16="http://schemas.microsoft.com/office/drawing/2014/main" id="{87733C54-291F-4749-8346-8F4F232A4710}"/>
+                <a16:creationId xmlns:a16="http://schemas.microsoft.com/office/drawing/2014/main" id="{3E04E3FA-77CA-46FB-A53C-1C2CBC51F99E}"/>
               </a:ext>
             </a:extLst>
           </p:cNvPr>
@@ -5900,7 +5900,7 @@
           <p:cNvPr id="2" name="s4-eyebrow">
             <a:extLst xmlns:a="http://schemas.openxmlformats.org/drawingml/2006/main">
               <a:ext uri="{FF2B5EF4-FFF2-40B4-BE49-F238E27FC236}">
-                <a16:creationId xmlns:a16="http://schemas.microsoft.com/office/drawing/2014/main" id="{8E005D75-A66B-415F-A31B-05D5853670CF}"/>
+                <a16:creationId xmlns:a16="http://schemas.microsoft.com/office/drawing/2014/main" id="{6A622617-07ED-4F88-B2BF-674413961E5B}"/>
               </a:ext>
             </a:extLst>
           </p:cNvPr>
@@ -5958,7 +5958,7 @@
           <p:cNvPr id="3" name="s4-title">
             <a:extLst xmlns:a="http://schemas.openxmlformats.org/drawingml/2006/main">
               <a:ext uri="{FF2B5EF4-FFF2-40B4-BE49-F238E27FC236}">
-                <a16:creationId xmlns:a16="http://schemas.microsoft.com/office/drawing/2014/main" id="{F712A6B0-F650-4619-950B-7DE6E1B2BAA8}"/>
+                <a16:creationId xmlns:a16="http://schemas.microsoft.com/office/drawing/2014/main" id="{284FEBEB-F9B8-4664-B8B4-D9F3449CB3E1}"/>
               </a:ext>
             </a:extLst>
           </p:cNvPr>
@@ -6016,7 +6016,7 @@
           <p:cNvPr id="4" name="s4-footer">
             <a:extLst xmlns:a="http://schemas.openxmlformats.org/drawingml/2006/main">
               <a:ext uri="{FF2B5EF4-FFF2-40B4-BE49-F238E27FC236}">
-                <a16:creationId xmlns:a16="http://schemas.microsoft.com/office/drawing/2014/main" id="{43110DBD-CEAF-45F6-BB93-C5DE3118A713}"/>
+                <a16:creationId xmlns:a16="http://schemas.microsoft.com/office/drawing/2014/main" id="{998B8918-2022-4963-B0F2-1803002C74B3}"/>
               </a:ext>
             </a:extLst>
           </p:cNvPr>
@@ -6047,7 +6047,7 @@
           <p:cNvPr id="5" name="s4-identity">
             <a:extLst xmlns:a="http://schemas.openxmlformats.org/drawingml/2006/main">
               <a:ext uri="{FF2B5EF4-FFF2-40B4-BE49-F238E27FC236}">
-                <a16:creationId xmlns:a16="http://schemas.microsoft.com/office/drawing/2014/main" id="{D2719D87-4840-45F9-9232-A5CAA733ECDE}"/>
+                <a16:creationId xmlns:a16="http://schemas.microsoft.com/office/drawing/2014/main" id="{A53878C3-BC1C-4A8B-8639-CC96C572CD39}"/>
               </a:ext>
             </a:extLst>
           </p:cNvPr>
@@ -6105,7 +6105,7 @@
           <p:cNvPr id="6" name="core-no-0">
             <a:extLst xmlns:a="http://schemas.openxmlformats.org/drawingml/2006/main">
               <a:ext uri="{FF2B5EF4-FFF2-40B4-BE49-F238E27FC236}">
-                <a16:creationId xmlns:a16="http://schemas.microsoft.com/office/drawing/2014/main" id="{6185312C-2C5C-40D7-BC9F-AA95E15BF0FF}"/>
+                <a16:creationId xmlns:a16="http://schemas.microsoft.com/office/drawing/2014/main" id="{52BEE174-F2B5-4BBF-B076-778F7E6F78CD}"/>
               </a:ext>
             </a:extLst>
           </p:cNvPr>
@@ -6163,7 +6163,7 @@
           <p:cNvPr id="7" name="core-label-0">
             <a:extLst xmlns:a="http://schemas.openxmlformats.org/drawingml/2006/main">
               <a:ext uri="{FF2B5EF4-FFF2-40B4-BE49-F238E27FC236}">
-                <a16:creationId xmlns:a16="http://schemas.microsoft.com/office/drawing/2014/main" id="{5359FEC4-C6B2-4388-989D-4CAB8E608198}"/>
+                <a16:creationId xmlns:a16="http://schemas.microsoft.com/office/drawing/2014/main" id="{517D8E2C-07F9-48CC-8E0A-1E4CD47F1A9D}"/>
               </a:ext>
             </a:extLst>
           </p:cNvPr>
@@ -6221,7 +6221,7 @@
           <p:cNvPr id="8" name="core-body-0">
             <a:extLst xmlns:a="http://schemas.openxmlformats.org/drawingml/2006/main">
               <a:ext uri="{FF2B5EF4-FFF2-40B4-BE49-F238E27FC236}">
-                <a16:creationId xmlns:a16="http://schemas.microsoft.com/office/drawing/2014/main" id="{D6DF09F0-8CEF-477C-94FF-8AD3CB9A6161}"/>
+                <a16:creationId xmlns:a16="http://schemas.microsoft.com/office/drawing/2014/main" id="{87C7ACC8-6497-4E1E-BB60-603EACB96944}"/>
               </a:ext>
             </a:extLst>
           </p:cNvPr>
@@ -6285,7 +6285,7 @@
           <p:cNvPr id="9" name="core-no-1">
             <a:extLst xmlns:a="http://schemas.openxmlformats.org/drawingml/2006/main">
               <a:ext uri="{FF2B5EF4-FFF2-40B4-BE49-F238E27FC236}">
-                <a16:creationId xmlns:a16="http://schemas.microsoft.com/office/drawing/2014/main" id="{CDB8F81F-2852-4897-88D2-69AEFB072CAB}"/>
+                <a16:creationId xmlns:a16="http://schemas.microsoft.com/office/drawing/2014/main" id="{65495837-2050-4D97-8105-C628AAD9C126}"/>
               </a:ext>
             </a:extLst>
           </p:cNvPr>
@@ -6343,7 +6343,7 @@
           <p:cNvPr id="10" name="core-label-1">
             <a:extLst xmlns:a="http://schemas.openxmlformats.org/drawingml/2006/main">
               <a:ext uri="{FF2B5EF4-FFF2-40B4-BE49-F238E27FC236}">
-                <a16:creationId xmlns:a16="http://schemas.microsoft.com/office/drawing/2014/main" id="{C849037E-43F6-49EA-B3FA-BAB9053C73E8}"/>
+                <a16:creationId xmlns:a16="http://schemas.microsoft.com/office/drawing/2014/main" id="{397A170C-5EE7-4227-AEF5-709E3E462683}"/>
               </a:ext>
             </a:extLst>
           </p:cNvPr>
@@ -6401,7 +6401,7 @@
           <p:cNvPr id="11" name="core-body-1">
             <a:extLst xmlns:a="http://schemas.openxmlformats.org/drawingml/2006/main">
               <a:ext uri="{FF2B5EF4-FFF2-40B4-BE49-F238E27FC236}">
-                <a16:creationId xmlns:a16="http://schemas.microsoft.com/office/drawing/2014/main" id="{33C37549-53CE-4266-AAD7-24A5009B2760}"/>
+                <a16:creationId xmlns:a16="http://schemas.microsoft.com/office/drawing/2014/main" id="{000983B6-175D-49F5-8AD5-BDC90B3962F6}"/>
               </a:ext>
             </a:extLst>
           </p:cNvPr>
@@ -6465,7 +6465,7 @@
           <p:cNvPr id="12" name="s4-takeaway-rule">
             <a:extLst xmlns:a="http://schemas.openxmlformats.org/drawingml/2006/main">
               <a:ext uri="{FF2B5EF4-FFF2-40B4-BE49-F238E27FC236}">
-                <a16:creationId xmlns:a16="http://schemas.microsoft.com/office/drawing/2014/main" id="{D87E2CDC-BB45-4DCA-824B-24E52B9E8C66}"/>
+                <a16:creationId xmlns:a16="http://schemas.microsoft.com/office/drawing/2014/main" id="{C0A87061-A3E7-4AC9-BDDA-6BE51D9C0B05}"/>
               </a:ext>
             </a:extLst>
           </p:cNvPr>
@@ -6498,7 +6498,7 @@
           <p:cNvPr id="13" name="s4-takeaway">
             <a:extLst xmlns:a="http://schemas.openxmlformats.org/drawingml/2006/main">
               <a:ext uri="{FF2B5EF4-FFF2-40B4-BE49-F238E27FC236}">
-                <a16:creationId xmlns:a16="http://schemas.microsoft.com/office/drawing/2014/main" id="{F2F41F3A-DC69-406B-943B-CF7E433B396A}"/>
+                <a16:creationId xmlns:a16="http://schemas.microsoft.com/office/drawing/2014/main" id="{BA63A2EF-F2DB-4471-BD23-D994BB95EBE0}"/>
               </a:ext>
             </a:extLst>
           </p:cNvPr>
@@ -6554,7 +6554,7 @@
     </p:spTree>
     <p:extLst>
       <p:ext uri="{BB962C8B-B14F-4D97-AF65-F5344CB8AC3E}">
-        <p14:creationId xmlns:p14="http://schemas.microsoft.com/office/powerpoint/2010/main" val="1415907300"/>
+        <p14:creationId xmlns:p14="http://schemas.microsoft.com/office/powerpoint/2010/main" val="1273621118"/>
       </p:ext>
     </p:extLst>
   </p:cSld>
@@ -6585,7 +6585,7 @@
           <p:cNvPr id="1" name="s5-rule">
             <a:extLst xmlns:a="http://schemas.openxmlformats.org/drawingml/2006/main">
               <a:ext uri="{FF2B5EF4-FFF2-40B4-BE49-F238E27FC236}">
-                <a16:creationId xmlns:a16="http://schemas.microsoft.com/office/drawing/2014/main" id="{A1354A74-3454-4E80-97BD-C9210D5805A7}"/>
+                <a16:creationId xmlns:a16="http://schemas.microsoft.com/office/drawing/2014/main" id="{8F8C82CF-7CA6-4915-93F9-EAB8B2950B4D}"/>
               </a:ext>
             </a:extLst>
           </p:cNvPr>
@@ -6618,7 +6618,7 @@
           <p:cNvPr id="2" name="s5-eyebrow">
             <a:extLst xmlns:a="http://schemas.openxmlformats.org/drawingml/2006/main">
               <a:ext uri="{FF2B5EF4-FFF2-40B4-BE49-F238E27FC236}">
-                <a16:creationId xmlns:a16="http://schemas.microsoft.com/office/drawing/2014/main" id="{7623B746-E8B3-4C53-A909-7C7605D14C45}"/>
+                <a16:creationId xmlns:a16="http://schemas.microsoft.com/office/drawing/2014/main" id="{D5855840-6B4B-4167-A915-FD9225C15677}"/>
               </a:ext>
             </a:extLst>
           </p:cNvPr>
@@ -6676,7 +6676,7 @@
           <p:cNvPr id="3" name="s5-title">
             <a:extLst xmlns:a="http://schemas.openxmlformats.org/drawingml/2006/main">
               <a:ext uri="{FF2B5EF4-FFF2-40B4-BE49-F238E27FC236}">
-                <a16:creationId xmlns:a16="http://schemas.microsoft.com/office/drawing/2014/main" id="{C1F30BB2-2A54-41C4-BD61-68B087343122}"/>
+                <a16:creationId xmlns:a16="http://schemas.microsoft.com/office/drawing/2014/main" id="{DEA5718D-1801-445A-8E3F-FACB5632DDF3}"/>
               </a:ext>
             </a:extLst>
           </p:cNvPr>
@@ -6734,7 +6734,7 @@
           <p:cNvPr id="4" name="s5-footer">
             <a:extLst xmlns:a="http://schemas.openxmlformats.org/drawingml/2006/main">
               <a:ext uri="{FF2B5EF4-FFF2-40B4-BE49-F238E27FC236}">
-                <a16:creationId xmlns:a16="http://schemas.microsoft.com/office/drawing/2014/main" id="{5CED7B7B-B587-4748-9784-B99321247E70}"/>
+                <a16:creationId xmlns:a16="http://schemas.microsoft.com/office/drawing/2014/main" id="{26EBDD0C-5D61-42FA-BB7B-CE605DD5EEAD}"/>
               </a:ext>
             </a:extLst>
           </p:cNvPr>
@@ -6765,7 +6765,7 @@
           <p:cNvPr id="5" name="s5-identity">
             <a:extLst xmlns:a="http://schemas.openxmlformats.org/drawingml/2006/main">
               <a:ext uri="{FF2B5EF4-FFF2-40B4-BE49-F238E27FC236}">
-                <a16:creationId xmlns:a16="http://schemas.microsoft.com/office/drawing/2014/main" id="{AC5F7D83-52E3-4BF0-8E7E-A3DF7F16A78D}"/>
+                <a16:creationId xmlns:a16="http://schemas.microsoft.com/office/drawing/2014/main" id="{64CBA5AA-C0FF-4510-AAE0-8B822ED7BCD7}"/>
               </a:ext>
             </a:extLst>
           </p:cNvPr>
@@ -6823,7 +6823,7 @@
           <p:cNvPr id="6" name="core-no-0">
             <a:extLst xmlns:a="http://schemas.openxmlformats.org/drawingml/2006/main">
               <a:ext uri="{FF2B5EF4-FFF2-40B4-BE49-F238E27FC236}">
-                <a16:creationId xmlns:a16="http://schemas.microsoft.com/office/drawing/2014/main" id="{27F39D82-AF87-4EF3-B09B-EB7A7ADA0468}"/>
+                <a16:creationId xmlns:a16="http://schemas.microsoft.com/office/drawing/2014/main" id="{2894E1AB-8261-499C-8435-A77352371BA8}"/>
               </a:ext>
             </a:extLst>
           </p:cNvPr>
@@ -6881,7 +6881,7 @@
           <p:cNvPr id="7" name="core-label-0">
             <a:extLst xmlns:a="http://schemas.openxmlformats.org/drawingml/2006/main">
               <a:ext uri="{FF2B5EF4-FFF2-40B4-BE49-F238E27FC236}">
-                <a16:creationId xmlns:a16="http://schemas.microsoft.com/office/drawing/2014/main" id="{28DA83DF-DA23-4F1C-8B17-89DD0E596FB8}"/>
+                <a16:creationId xmlns:a16="http://schemas.microsoft.com/office/drawing/2014/main" id="{6FA48B35-0FEA-43EA-BB49-BEE5299C6563}"/>
               </a:ext>
             </a:extLst>
           </p:cNvPr>
@@ -6939,7 +6939,7 @@
           <p:cNvPr id="8" name="core-body-0">
             <a:extLst xmlns:a="http://schemas.openxmlformats.org/drawingml/2006/main">
               <a:ext uri="{FF2B5EF4-FFF2-40B4-BE49-F238E27FC236}">
-                <a16:creationId xmlns:a16="http://schemas.microsoft.com/office/drawing/2014/main" id="{234D298A-6BA9-4F82-B3AB-11124BA143F7}"/>
+                <a16:creationId xmlns:a16="http://schemas.microsoft.com/office/drawing/2014/main" id="{8EFC4E04-6E5D-4147-9E6A-1892BE4B11C7}"/>
               </a:ext>
             </a:extLst>
           </p:cNvPr>
@@ -7003,7 +7003,7 @@
           <p:cNvPr id="9" name="core-no-1">
             <a:extLst xmlns:a="http://schemas.openxmlformats.org/drawingml/2006/main">
               <a:ext uri="{FF2B5EF4-FFF2-40B4-BE49-F238E27FC236}">
-                <a16:creationId xmlns:a16="http://schemas.microsoft.com/office/drawing/2014/main" id="{9DAD6DF0-359D-4CFF-A3D7-B75E53302425}"/>
+                <a16:creationId xmlns:a16="http://schemas.microsoft.com/office/drawing/2014/main" id="{080B7906-0192-45C3-9477-D0C0E0B065A9}"/>
               </a:ext>
             </a:extLst>
           </p:cNvPr>
@@ -7061,7 +7061,7 @@
           <p:cNvPr id="10" name="core-body-1">
             <a:extLst xmlns:a="http://schemas.openxmlformats.org/drawingml/2006/main">
               <a:ext uri="{FF2B5EF4-FFF2-40B4-BE49-F238E27FC236}">
-                <a16:creationId xmlns:a16="http://schemas.microsoft.com/office/drawing/2014/main" id="{033D2437-51FD-43B4-B616-99D04D64829D}"/>
+                <a16:creationId xmlns:a16="http://schemas.microsoft.com/office/drawing/2014/main" id="{7DFF7B30-AF4F-43BB-8B95-857624143671}"/>
               </a:ext>
             </a:extLst>
           </p:cNvPr>
@@ -7125,7 +7125,7 @@
           <p:cNvPr id="11" name="s5-takeaway-rule">
             <a:extLst xmlns:a="http://schemas.openxmlformats.org/drawingml/2006/main">
               <a:ext uri="{FF2B5EF4-FFF2-40B4-BE49-F238E27FC236}">
-                <a16:creationId xmlns:a16="http://schemas.microsoft.com/office/drawing/2014/main" id="{58901E4F-B134-4B18-BDCE-EFBA76620B00}"/>
+                <a16:creationId xmlns:a16="http://schemas.microsoft.com/office/drawing/2014/main" id="{4DEA692F-152E-4893-8EF2-45499AE49BB7}"/>
               </a:ext>
             </a:extLst>
           </p:cNvPr>
@@ -7158,7 +7158,7 @@
           <p:cNvPr id="12" name="s5-takeaway">
             <a:extLst xmlns:a="http://schemas.openxmlformats.org/drawingml/2006/main">
               <a:ext uri="{FF2B5EF4-FFF2-40B4-BE49-F238E27FC236}">
-                <a16:creationId xmlns:a16="http://schemas.microsoft.com/office/drawing/2014/main" id="{B373420F-4B09-4823-B079-80E5FE9659A3}"/>
+                <a16:creationId xmlns:a16="http://schemas.microsoft.com/office/drawing/2014/main" id="{35A485EF-E352-4746-83A8-19F91F146F15}"/>
               </a:ext>
             </a:extLst>
           </p:cNvPr>
@@ -7214,7 +7214,7 @@
     </p:spTree>
     <p:extLst>
       <p:ext uri="{BB962C8B-B14F-4D97-AF65-F5344CB8AC3E}">
-        <p14:creationId xmlns:p14="http://schemas.microsoft.com/office/powerpoint/2010/main" val="1104672805"/>
+        <p14:creationId xmlns:p14="http://schemas.microsoft.com/office/powerpoint/2010/main" val="940360584"/>
       </p:ext>
     </p:extLst>
   </p:cSld>
@@ -7245,7 +7245,7 @@
           <p:cNvPr id="1" name="s6-rule">
             <a:extLst xmlns:a="http://schemas.openxmlformats.org/drawingml/2006/main">
               <a:ext uri="{FF2B5EF4-FFF2-40B4-BE49-F238E27FC236}">
-                <a16:creationId xmlns:a16="http://schemas.microsoft.com/office/drawing/2014/main" id="{5E901492-EB60-4275-BCCE-FAC87B947325}"/>
+                <a16:creationId xmlns:a16="http://schemas.microsoft.com/office/drawing/2014/main" id="{A8355D79-E157-4FCA-9616-CAA2C4A20BB7}"/>
               </a:ext>
             </a:extLst>
           </p:cNvPr>
@@ -7278,7 +7278,7 @@
           <p:cNvPr id="2" name="s6-eyebrow">
             <a:extLst xmlns:a="http://schemas.openxmlformats.org/drawingml/2006/main">
               <a:ext uri="{FF2B5EF4-FFF2-40B4-BE49-F238E27FC236}">
-                <a16:creationId xmlns:a16="http://schemas.microsoft.com/office/drawing/2014/main" id="{8A18BF43-61AB-485F-A29A-EC1170BB0516}"/>
+                <a16:creationId xmlns:a16="http://schemas.microsoft.com/office/drawing/2014/main" id="{B025808C-FFF3-4EAB-B779-5667E88B82AD}"/>
               </a:ext>
             </a:extLst>
           </p:cNvPr>
@@ -7336,7 +7336,7 @@
           <p:cNvPr id="3" name="s6-title">
             <a:extLst xmlns:a="http://schemas.openxmlformats.org/drawingml/2006/main">
               <a:ext uri="{FF2B5EF4-FFF2-40B4-BE49-F238E27FC236}">
-                <a16:creationId xmlns:a16="http://schemas.microsoft.com/office/drawing/2014/main" id="{96BFEF25-DDEB-42CE-B1B7-FE407A63A2E0}"/>
+                <a16:creationId xmlns:a16="http://schemas.microsoft.com/office/drawing/2014/main" id="{34F78C99-FAA9-4DAD-A515-1F90B2108C41}"/>
               </a:ext>
             </a:extLst>
           </p:cNvPr>
@@ -7394,7 +7394,7 @@
           <p:cNvPr id="4" name="s6-footer">
             <a:extLst xmlns:a="http://schemas.openxmlformats.org/drawingml/2006/main">
               <a:ext uri="{FF2B5EF4-FFF2-40B4-BE49-F238E27FC236}">
-                <a16:creationId xmlns:a16="http://schemas.microsoft.com/office/drawing/2014/main" id="{E077B4BB-4D7B-4C19-BDE2-60B84AD48EAA}"/>
+                <a16:creationId xmlns:a16="http://schemas.microsoft.com/office/drawing/2014/main" id="{0DBCB827-37C5-4EDB-AD09-A482300D2195}"/>
               </a:ext>
             </a:extLst>
           </p:cNvPr>
@@ -7425,7 +7425,7 @@
           <p:cNvPr id="5" name="s6-identity">
             <a:extLst xmlns:a="http://schemas.openxmlformats.org/drawingml/2006/main">
               <a:ext uri="{FF2B5EF4-FFF2-40B4-BE49-F238E27FC236}">
-                <a16:creationId xmlns:a16="http://schemas.microsoft.com/office/drawing/2014/main" id="{91E5A3D6-2E8C-4D73-9C42-818471916459}"/>
+                <a16:creationId xmlns:a16="http://schemas.microsoft.com/office/drawing/2014/main" id="{7C91CA90-73B3-4B51-9FBB-8A37DD1F9057}"/>
               </a:ext>
             </a:extLst>
           </p:cNvPr>
@@ -7483,7 +7483,7 @@
           <p:cNvPr id="6" name="core-no-0">
             <a:extLst xmlns:a="http://schemas.openxmlformats.org/drawingml/2006/main">
               <a:ext uri="{FF2B5EF4-FFF2-40B4-BE49-F238E27FC236}">
-                <a16:creationId xmlns:a16="http://schemas.microsoft.com/office/drawing/2014/main" id="{8589CDCB-6DF7-44CB-A2D3-9F1751CFA1B2}"/>
+                <a16:creationId xmlns:a16="http://schemas.microsoft.com/office/drawing/2014/main" id="{DBF3A1E8-2560-40A1-B1FA-A874F500C42E}"/>
               </a:ext>
             </a:extLst>
           </p:cNvPr>
@@ -7541,7 +7541,7 @@
           <p:cNvPr id="7" name="core-label-0">
             <a:extLst xmlns:a="http://schemas.openxmlformats.org/drawingml/2006/main">
               <a:ext uri="{FF2B5EF4-FFF2-40B4-BE49-F238E27FC236}">
-                <a16:creationId xmlns:a16="http://schemas.microsoft.com/office/drawing/2014/main" id="{0D7C4208-605F-42DC-AF69-A8A17079D0B3}"/>
+                <a16:creationId xmlns:a16="http://schemas.microsoft.com/office/drawing/2014/main" id="{E3043B2B-C600-4640-8100-B25B1A303A8E}"/>
               </a:ext>
             </a:extLst>
           </p:cNvPr>
@@ -7599,7 +7599,7 @@
           <p:cNvPr id="8" name="core-body-0">
             <a:extLst xmlns:a="http://schemas.openxmlformats.org/drawingml/2006/main">
               <a:ext uri="{FF2B5EF4-FFF2-40B4-BE49-F238E27FC236}">
-                <a16:creationId xmlns:a16="http://schemas.microsoft.com/office/drawing/2014/main" id="{E030DF26-9674-41BF-83F0-5F2BC91F75DA}"/>
+                <a16:creationId xmlns:a16="http://schemas.microsoft.com/office/drawing/2014/main" id="{546AF1A2-52CA-4E9C-8CD0-1CA4EE64AFC4}"/>
               </a:ext>
             </a:extLst>
           </p:cNvPr>
@@ -7663,7 +7663,7 @@
           <p:cNvPr id="9" name="core-no-1">
             <a:extLst xmlns:a="http://schemas.openxmlformats.org/drawingml/2006/main">
               <a:ext uri="{FF2B5EF4-FFF2-40B4-BE49-F238E27FC236}">
-                <a16:creationId xmlns:a16="http://schemas.microsoft.com/office/drawing/2014/main" id="{A49B79CA-2D11-45D9-A683-85BE29A03E70}"/>
+                <a16:creationId xmlns:a16="http://schemas.microsoft.com/office/drawing/2014/main" id="{A30A865B-AFF5-4844-BCAF-AA79A6EF63C6}"/>
               </a:ext>
             </a:extLst>
           </p:cNvPr>
@@ -7721,7 +7721,7 @@
           <p:cNvPr id="10" name="core-body-1">
             <a:extLst xmlns:a="http://schemas.openxmlformats.org/drawingml/2006/main">
               <a:ext uri="{FF2B5EF4-FFF2-40B4-BE49-F238E27FC236}">
-                <a16:creationId xmlns:a16="http://schemas.microsoft.com/office/drawing/2014/main" id="{B2951F86-1491-460C-87C9-BEE223B785C0}"/>
+                <a16:creationId xmlns:a16="http://schemas.microsoft.com/office/drawing/2014/main" id="{73620546-8EBE-4621-8A4C-C66DDFB4A9F9}"/>
               </a:ext>
             </a:extLst>
           </p:cNvPr>
@@ -7785,7 +7785,7 @@
           <p:cNvPr id="11" name="s6-takeaway-rule">
             <a:extLst xmlns:a="http://schemas.openxmlformats.org/drawingml/2006/main">
               <a:ext uri="{FF2B5EF4-FFF2-40B4-BE49-F238E27FC236}">
-                <a16:creationId xmlns:a16="http://schemas.microsoft.com/office/drawing/2014/main" id="{8EDF8276-F00F-484D-9798-F496422801BD}"/>
+                <a16:creationId xmlns:a16="http://schemas.microsoft.com/office/drawing/2014/main" id="{110A8234-58E4-48F8-BC41-2F45CA8F9A6A}"/>
               </a:ext>
             </a:extLst>
           </p:cNvPr>
@@ -7818,7 +7818,7 @@
           <p:cNvPr id="12" name="s6-takeaway">
             <a:extLst xmlns:a="http://schemas.openxmlformats.org/drawingml/2006/main">
               <a:ext uri="{FF2B5EF4-FFF2-40B4-BE49-F238E27FC236}">
-                <a16:creationId xmlns:a16="http://schemas.microsoft.com/office/drawing/2014/main" id="{25525A45-86C2-49B2-909B-DB1F0E0DC8E9}"/>
+                <a16:creationId xmlns:a16="http://schemas.microsoft.com/office/drawing/2014/main" id="{7FEF1E29-A247-428E-8597-CB1F7DDD7925}"/>
               </a:ext>
             </a:extLst>
           </p:cNvPr>
@@ -7874,7 +7874,7 @@
     </p:spTree>
     <p:extLst>
       <p:ext uri="{BB962C8B-B14F-4D97-AF65-F5344CB8AC3E}">
-        <p14:creationId xmlns:p14="http://schemas.microsoft.com/office/powerpoint/2010/main" val="1933787403"/>
+        <p14:creationId xmlns:p14="http://schemas.microsoft.com/office/powerpoint/2010/main" val="225577693"/>
       </p:ext>
     </p:extLst>
   </p:cSld>
@@ -7905,7 +7905,7 @@
           <p:cNvPr id="1" name="s7-rule">
             <a:extLst xmlns:a="http://schemas.openxmlformats.org/drawingml/2006/main">
               <a:ext uri="{FF2B5EF4-FFF2-40B4-BE49-F238E27FC236}">
-                <a16:creationId xmlns:a16="http://schemas.microsoft.com/office/drawing/2014/main" id="{36ED295B-0B1C-411C-B34B-7D263032E1D1}"/>
+                <a16:creationId xmlns:a16="http://schemas.microsoft.com/office/drawing/2014/main" id="{6DF495FA-069D-4150-97DC-B2BEE03E6B45}"/>
               </a:ext>
             </a:extLst>
           </p:cNvPr>
@@ -7938,7 +7938,7 @@
           <p:cNvPr id="2" name="s7-eyebrow">
             <a:extLst xmlns:a="http://schemas.openxmlformats.org/drawingml/2006/main">
               <a:ext uri="{FF2B5EF4-FFF2-40B4-BE49-F238E27FC236}">
-                <a16:creationId xmlns:a16="http://schemas.microsoft.com/office/drawing/2014/main" id="{6FBC2A6D-5E9C-416E-9978-CCFCF11373F9}"/>
+                <a16:creationId xmlns:a16="http://schemas.microsoft.com/office/drawing/2014/main" id="{493AF01E-2246-413F-991C-EDC40C1EC2F5}"/>
               </a:ext>
             </a:extLst>
           </p:cNvPr>
@@ -7996,7 +7996,7 @@
           <p:cNvPr id="3" name="s7-title">
             <a:extLst xmlns:a="http://schemas.openxmlformats.org/drawingml/2006/main">
               <a:ext uri="{FF2B5EF4-FFF2-40B4-BE49-F238E27FC236}">
-                <a16:creationId xmlns:a16="http://schemas.microsoft.com/office/drawing/2014/main" id="{5479A437-8154-4630-90B5-303587CCFD02}"/>
+                <a16:creationId xmlns:a16="http://schemas.microsoft.com/office/drawing/2014/main" id="{8085DF7A-1832-4EC2-8705-590EB5DBC93D}"/>
               </a:ext>
             </a:extLst>
           </p:cNvPr>
@@ -8054,7 +8054,7 @@
           <p:cNvPr id="4" name="s7-footer">
             <a:extLst xmlns:a="http://schemas.openxmlformats.org/drawingml/2006/main">
               <a:ext uri="{FF2B5EF4-FFF2-40B4-BE49-F238E27FC236}">
-                <a16:creationId xmlns:a16="http://schemas.microsoft.com/office/drawing/2014/main" id="{A7E51F92-FD45-4AD7-A951-DE87FCF511C0}"/>
+                <a16:creationId xmlns:a16="http://schemas.microsoft.com/office/drawing/2014/main" id="{585E12D9-8302-43F1-B8B2-ACADAD7D6171}"/>
               </a:ext>
             </a:extLst>
           </p:cNvPr>
@@ -8085,7 +8085,7 @@
           <p:cNvPr id="5" name="s7-identity">
             <a:extLst xmlns:a="http://schemas.openxmlformats.org/drawingml/2006/main">
               <a:ext uri="{FF2B5EF4-FFF2-40B4-BE49-F238E27FC236}">
-                <a16:creationId xmlns:a16="http://schemas.microsoft.com/office/drawing/2014/main" id="{CD39119E-34E2-434D-8CDA-E7102F6F8462}"/>
+                <a16:creationId xmlns:a16="http://schemas.microsoft.com/office/drawing/2014/main" id="{6FFDB5CE-9EA8-419D-9312-73C86B5DD66D}"/>
               </a:ext>
             </a:extLst>
           </p:cNvPr>
@@ -8143,7 +8143,7 @@
           <p:cNvPr id="6" name="core-no-0">
             <a:extLst xmlns:a="http://schemas.openxmlformats.org/drawingml/2006/main">
               <a:ext uri="{FF2B5EF4-FFF2-40B4-BE49-F238E27FC236}">
-                <a16:creationId xmlns:a16="http://schemas.microsoft.com/office/drawing/2014/main" id="{B45E15B3-93E6-42A7-8D8E-0CB227D12B14}"/>
+                <a16:creationId xmlns:a16="http://schemas.microsoft.com/office/drawing/2014/main" id="{7CAA8FB6-1119-4878-991A-5B6B59CF84F0}"/>
               </a:ext>
             </a:extLst>
           </p:cNvPr>
@@ -8201,7 +8201,7 @@
           <p:cNvPr id="7" name="core-label-0">
             <a:extLst xmlns:a="http://schemas.openxmlformats.org/drawingml/2006/main">
               <a:ext uri="{FF2B5EF4-FFF2-40B4-BE49-F238E27FC236}">
-                <a16:creationId xmlns:a16="http://schemas.microsoft.com/office/drawing/2014/main" id="{DA046262-CFF4-4FD1-9199-ED998BEF6770}"/>
+                <a16:creationId xmlns:a16="http://schemas.microsoft.com/office/drawing/2014/main" id="{ACD24284-C42E-4200-9D4C-633714AC191B}"/>
               </a:ext>
             </a:extLst>
           </p:cNvPr>
@@ -8259,7 +8259,7 @@
           <p:cNvPr id="8" name="core-body-0">
             <a:extLst xmlns:a="http://schemas.openxmlformats.org/drawingml/2006/main">
               <a:ext uri="{FF2B5EF4-FFF2-40B4-BE49-F238E27FC236}">
-                <a16:creationId xmlns:a16="http://schemas.microsoft.com/office/drawing/2014/main" id="{49617082-FE22-4BFB-B784-8DA2E1FB14B7}"/>
+                <a16:creationId xmlns:a16="http://schemas.microsoft.com/office/drawing/2014/main" id="{13B7DD5C-91A1-430B-9573-A594CF33AB23}"/>
               </a:ext>
             </a:extLst>
           </p:cNvPr>
@@ -8323,7 +8323,7 @@
           <p:cNvPr id="9" name="core-no-1">
             <a:extLst xmlns:a="http://schemas.openxmlformats.org/drawingml/2006/main">
               <a:ext uri="{FF2B5EF4-FFF2-40B4-BE49-F238E27FC236}">
-                <a16:creationId xmlns:a16="http://schemas.microsoft.com/office/drawing/2014/main" id="{206DDE55-94AF-484C-86F4-FB027537706F}"/>
+                <a16:creationId xmlns:a16="http://schemas.microsoft.com/office/drawing/2014/main" id="{E62542F9-E29A-4DB5-ACB9-6ACA532BE4A7}"/>
               </a:ext>
             </a:extLst>
           </p:cNvPr>
@@ -8381,7 +8381,7 @@
           <p:cNvPr id="10" name="core-body-1">
             <a:extLst xmlns:a="http://schemas.openxmlformats.org/drawingml/2006/main">
               <a:ext uri="{FF2B5EF4-FFF2-40B4-BE49-F238E27FC236}">
-                <a16:creationId xmlns:a16="http://schemas.microsoft.com/office/drawing/2014/main" id="{017754F2-6960-49C7-8611-F0AFF83A7CFB}"/>
+                <a16:creationId xmlns:a16="http://schemas.microsoft.com/office/drawing/2014/main" id="{518CBA3A-4D8D-4575-9B4B-4BE4DE4EEDFD}"/>
               </a:ext>
             </a:extLst>
           </p:cNvPr>
@@ -8445,7 +8445,7 @@
           <p:cNvPr id="11" name="s7-takeaway-rule">
             <a:extLst xmlns:a="http://schemas.openxmlformats.org/drawingml/2006/main">
               <a:ext uri="{FF2B5EF4-FFF2-40B4-BE49-F238E27FC236}">
-                <a16:creationId xmlns:a16="http://schemas.microsoft.com/office/drawing/2014/main" id="{BAAE3D45-7C1B-44B4-9D4E-B82245089DC4}"/>
+                <a16:creationId xmlns:a16="http://schemas.microsoft.com/office/drawing/2014/main" id="{012A44EA-643F-4635-AFDC-55E94AE0FF38}"/>
               </a:ext>
             </a:extLst>
           </p:cNvPr>
@@ -8478,7 +8478,7 @@
           <p:cNvPr id="12" name="s7-takeaway">
             <a:extLst xmlns:a="http://schemas.openxmlformats.org/drawingml/2006/main">
               <a:ext uri="{FF2B5EF4-FFF2-40B4-BE49-F238E27FC236}">
-                <a16:creationId xmlns:a16="http://schemas.microsoft.com/office/drawing/2014/main" id="{3CDAD593-AFC7-4166-AAEB-82EB751A4EAE}"/>
+                <a16:creationId xmlns:a16="http://schemas.microsoft.com/office/drawing/2014/main" id="{6118D0CC-D5A0-449D-82B8-FC74A1D93B60}"/>
               </a:ext>
             </a:extLst>
           </p:cNvPr>
@@ -8534,7 +8534,7 @@
     </p:spTree>
     <p:extLst>
       <p:ext uri="{BB962C8B-B14F-4D97-AF65-F5344CB8AC3E}">
-        <p14:creationId xmlns:p14="http://schemas.microsoft.com/office/powerpoint/2010/main" val="734406646"/>
+        <p14:creationId xmlns:p14="http://schemas.microsoft.com/office/powerpoint/2010/main" val="1225741594"/>
       </p:ext>
     </p:extLst>
   </p:cSld>
@@ -8565,7 +8565,7 @@
           <p:cNvPr id="1" name="s8-rule">
             <a:extLst xmlns:a="http://schemas.openxmlformats.org/drawingml/2006/main">
               <a:ext uri="{FF2B5EF4-FFF2-40B4-BE49-F238E27FC236}">
-                <a16:creationId xmlns:a16="http://schemas.microsoft.com/office/drawing/2014/main" id="{AC2737F6-62FD-4479-88A4-BF2637FA2FE0}"/>
+                <a16:creationId xmlns:a16="http://schemas.microsoft.com/office/drawing/2014/main" id="{89861426-70AB-4C54-8822-A830BDCF33A0}"/>
               </a:ext>
             </a:extLst>
           </p:cNvPr>
@@ -8598,7 +8598,7 @@
           <p:cNvPr id="2" name="s8-eyebrow">
             <a:extLst xmlns:a="http://schemas.openxmlformats.org/drawingml/2006/main">
               <a:ext uri="{FF2B5EF4-FFF2-40B4-BE49-F238E27FC236}">
-                <a16:creationId xmlns:a16="http://schemas.microsoft.com/office/drawing/2014/main" id="{505C63EB-1E07-484B-BA1F-94CF21C1F4BC}"/>
+                <a16:creationId xmlns:a16="http://schemas.microsoft.com/office/drawing/2014/main" id="{52B53700-4D35-48B2-BA29-D2EF40C445D4}"/>
               </a:ext>
             </a:extLst>
           </p:cNvPr>
@@ -8656,7 +8656,7 @@
           <p:cNvPr id="3" name="s8-title">
             <a:extLst xmlns:a="http://schemas.openxmlformats.org/drawingml/2006/main">
               <a:ext uri="{FF2B5EF4-FFF2-40B4-BE49-F238E27FC236}">
-                <a16:creationId xmlns:a16="http://schemas.microsoft.com/office/drawing/2014/main" id="{2FEFCD2E-EB1C-4CA1-B394-E95735CE658E}"/>
+                <a16:creationId xmlns:a16="http://schemas.microsoft.com/office/drawing/2014/main" id="{86318521-C35C-4A37-A1B9-D1E5AC1056C1}"/>
               </a:ext>
             </a:extLst>
           </p:cNvPr>
@@ -8714,7 +8714,7 @@
           <p:cNvPr id="4" name="s8-footer">
             <a:extLst xmlns:a="http://schemas.openxmlformats.org/drawingml/2006/main">
               <a:ext uri="{FF2B5EF4-FFF2-40B4-BE49-F238E27FC236}">
-                <a16:creationId xmlns:a16="http://schemas.microsoft.com/office/drawing/2014/main" id="{B0740F0D-0AF2-4EA0-8EE2-7AF2F98881F9}"/>
+                <a16:creationId xmlns:a16="http://schemas.microsoft.com/office/drawing/2014/main" id="{BEB9BE94-AC04-46EE-A849-47D6C5BE8D7C}"/>
               </a:ext>
             </a:extLst>
           </p:cNvPr>
@@ -8745,7 +8745,7 @@
           <p:cNvPr id="5" name="s8-identity">
             <a:extLst xmlns:a="http://schemas.openxmlformats.org/drawingml/2006/main">
               <a:ext uri="{FF2B5EF4-FFF2-40B4-BE49-F238E27FC236}">
-                <a16:creationId xmlns:a16="http://schemas.microsoft.com/office/drawing/2014/main" id="{C12F61B2-B6A7-4B4F-B853-4F95B5E33359}"/>
+                <a16:creationId xmlns:a16="http://schemas.microsoft.com/office/drawing/2014/main" id="{286DE8C1-618E-482C-A099-DFC91D68B8F4}"/>
               </a:ext>
             </a:extLst>
           </p:cNvPr>
@@ -8803,7 +8803,7 @@
           <p:cNvPr id="6" name="core-no-0">
             <a:extLst xmlns:a="http://schemas.openxmlformats.org/drawingml/2006/main">
               <a:ext uri="{FF2B5EF4-FFF2-40B4-BE49-F238E27FC236}">
-                <a16:creationId xmlns:a16="http://schemas.microsoft.com/office/drawing/2014/main" id="{C801E336-5C30-4F1E-A107-B6543971593F}"/>
+                <a16:creationId xmlns:a16="http://schemas.microsoft.com/office/drawing/2014/main" id="{9969ED8E-5F00-4485-A3F6-7E6CFDD53EE7}"/>
               </a:ext>
             </a:extLst>
           </p:cNvPr>
@@ -8861,7 +8861,7 @@
           <p:cNvPr id="7" name="core-label-0">
             <a:extLst xmlns:a="http://schemas.openxmlformats.org/drawingml/2006/main">
               <a:ext uri="{FF2B5EF4-FFF2-40B4-BE49-F238E27FC236}">
-                <a16:creationId xmlns:a16="http://schemas.microsoft.com/office/drawing/2014/main" id="{6226887D-9009-481A-940F-387C22E1B950}"/>
+                <a16:creationId xmlns:a16="http://schemas.microsoft.com/office/drawing/2014/main" id="{BB18CBBB-8BCA-4099-BD9E-F1EE8D5A36DC}"/>
               </a:ext>
             </a:extLst>
           </p:cNvPr>
@@ -8919,7 +8919,7 @@
           <p:cNvPr id="8" name="core-body-0">
             <a:extLst xmlns:a="http://schemas.openxmlformats.org/drawingml/2006/main">
               <a:ext uri="{FF2B5EF4-FFF2-40B4-BE49-F238E27FC236}">
-                <a16:creationId xmlns:a16="http://schemas.microsoft.com/office/drawing/2014/main" id="{FCE44152-AA56-4557-81DA-00CD59E2723E}"/>
+                <a16:creationId xmlns:a16="http://schemas.microsoft.com/office/drawing/2014/main" id="{B6CC1493-6C17-496F-850D-1D3481220567}"/>
               </a:ext>
             </a:extLst>
           </p:cNvPr>
@@ -8983,7 +8983,7 @@
           <p:cNvPr id="9" name="core-no-1">
             <a:extLst xmlns:a="http://schemas.openxmlformats.org/drawingml/2006/main">
               <a:ext uri="{FF2B5EF4-FFF2-40B4-BE49-F238E27FC236}">
-                <a16:creationId xmlns:a16="http://schemas.microsoft.com/office/drawing/2014/main" id="{0D7D143B-98F3-4BB3-9FBC-6EA6F2CD6D58}"/>
+                <a16:creationId xmlns:a16="http://schemas.microsoft.com/office/drawing/2014/main" id="{4CA5E7B9-6A8F-432F-882A-B7B1CFA3355C}"/>
               </a:ext>
             </a:extLst>
           </p:cNvPr>
@@ -9041,7 +9041,7 @@
           <p:cNvPr id="10" name="core-body-1">
             <a:extLst xmlns:a="http://schemas.openxmlformats.org/drawingml/2006/main">
               <a:ext uri="{FF2B5EF4-FFF2-40B4-BE49-F238E27FC236}">
-                <a16:creationId xmlns:a16="http://schemas.microsoft.com/office/drawing/2014/main" id="{9EBE3EF6-8146-4DB0-952F-813AA98431FC}"/>
+                <a16:creationId xmlns:a16="http://schemas.microsoft.com/office/drawing/2014/main" id="{1DF4C750-E9EF-4DA2-9FC3-1AB1CBCDDDBB}"/>
               </a:ext>
             </a:extLst>
           </p:cNvPr>
@@ -9105,7 +9105,7 @@
           <p:cNvPr id="11" name="s8-takeaway-rule">
             <a:extLst xmlns:a="http://schemas.openxmlformats.org/drawingml/2006/main">
               <a:ext uri="{FF2B5EF4-FFF2-40B4-BE49-F238E27FC236}">
-                <a16:creationId xmlns:a16="http://schemas.microsoft.com/office/drawing/2014/main" id="{59B2DB8E-BB84-42A6-A2C5-BC798A36F31A}"/>
+                <a16:creationId xmlns:a16="http://schemas.microsoft.com/office/drawing/2014/main" id="{32ABB573-8788-4C57-A143-5D1B32872A0B}"/>
               </a:ext>
             </a:extLst>
           </p:cNvPr>
@@ -9138,7 +9138,7 @@
           <p:cNvPr id="12" name="s8-takeaway">
             <a:extLst xmlns:a="http://schemas.openxmlformats.org/drawingml/2006/main">
               <a:ext uri="{FF2B5EF4-FFF2-40B4-BE49-F238E27FC236}">
-                <a16:creationId xmlns:a16="http://schemas.microsoft.com/office/drawing/2014/main" id="{CA6B9A50-FFC9-43E3-9F44-FB10B0F1DACD}"/>
+                <a16:creationId xmlns:a16="http://schemas.microsoft.com/office/drawing/2014/main" id="{FEBC00A1-3470-4518-A67F-711255D83841}"/>
               </a:ext>
             </a:extLst>
           </p:cNvPr>
@@ -9194,7 +9194,7 @@
     </p:spTree>
     <p:extLst>
       <p:ext uri="{BB962C8B-B14F-4D97-AF65-F5344CB8AC3E}">
-        <p14:creationId xmlns:p14="http://schemas.microsoft.com/office/powerpoint/2010/main" val="1874230097"/>
+        <p14:creationId xmlns:p14="http://schemas.microsoft.com/office/powerpoint/2010/main" val="869975315"/>
       </p:ext>
     </p:extLst>
   </p:cSld>
@@ -9225,7 +9225,7 @@
           <p:cNvPr id="1" name="s9-rule">
             <a:extLst xmlns:a="http://schemas.openxmlformats.org/drawingml/2006/main">
               <a:ext uri="{FF2B5EF4-FFF2-40B4-BE49-F238E27FC236}">
-                <a16:creationId xmlns:a16="http://schemas.microsoft.com/office/drawing/2014/main" id="{0772B381-DC1E-46CE-A772-2A064C43CD98}"/>
+                <a16:creationId xmlns:a16="http://schemas.microsoft.com/office/drawing/2014/main" id="{9C70DA60-04D3-44DD-AC47-0A6E9FD14EA5}"/>
               </a:ext>
             </a:extLst>
           </p:cNvPr>
@@ -9258,7 +9258,7 @@
           <p:cNvPr id="2" name="s9-eyebrow">
             <a:extLst xmlns:a="http://schemas.openxmlformats.org/drawingml/2006/main">
               <a:ext uri="{FF2B5EF4-FFF2-40B4-BE49-F238E27FC236}">
-                <a16:creationId xmlns:a16="http://schemas.microsoft.com/office/drawing/2014/main" id="{9C4CA37E-8A05-4011-B333-8249BACB80BE}"/>
+                <a16:creationId xmlns:a16="http://schemas.microsoft.com/office/drawing/2014/main" id="{67514A70-DC86-4134-BC5C-3E81E3EFEE70}"/>
               </a:ext>
             </a:extLst>
           </p:cNvPr>
@@ -9316,7 +9316,7 @@
           <p:cNvPr id="3" name="s9-title">
             <a:extLst xmlns:a="http://schemas.openxmlformats.org/drawingml/2006/main">
               <a:ext uri="{FF2B5EF4-FFF2-40B4-BE49-F238E27FC236}">
-                <a16:creationId xmlns:a16="http://schemas.microsoft.com/office/drawing/2014/main" id="{2F855107-E97A-47B6-B07D-8C1A16DFC9A5}"/>
+                <a16:creationId xmlns:a16="http://schemas.microsoft.com/office/drawing/2014/main" id="{B30CF63C-0243-4EC8-913F-FF6F2A5C7342}"/>
               </a:ext>
             </a:extLst>
           </p:cNvPr>
@@ -9374,7 +9374,7 @@
           <p:cNvPr id="4" name="s9-footer">
             <a:extLst xmlns:a="http://schemas.openxmlformats.org/drawingml/2006/main">
               <a:ext uri="{FF2B5EF4-FFF2-40B4-BE49-F238E27FC236}">
-                <a16:creationId xmlns:a16="http://schemas.microsoft.com/office/drawing/2014/main" id="{4E6B4808-4E37-4E01-AA33-470D1DAE78DA}"/>
+                <a16:creationId xmlns:a16="http://schemas.microsoft.com/office/drawing/2014/main" id="{A4FC882B-5402-4FF9-870B-408C81A2ABD7}"/>
               </a:ext>
             </a:extLst>
           </p:cNvPr>
@@ -9405,7 +9405,7 @@
           <p:cNvPr id="5" name="s9-identity">
             <a:extLst xmlns:a="http://schemas.openxmlformats.org/drawingml/2006/main">
               <a:ext uri="{FF2B5EF4-FFF2-40B4-BE49-F238E27FC236}">
-                <a16:creationId xmlns:a16="http://schemas.microsoft.com/office/drawing/2014/main" id="{7F601639-6D4B-4EC3-A003-A8F61CFE62FB}"/>
+                <a16:creationId xmlns:a16="http://schemas.microsoft.com/office/drawing/2014/main" id="{85EF2012-6011-4252-90D6-FFE640438222}"/>
               </a:ext>
             </a:extLst>
           </p:cNvPr>
@@ -9463,7 +9463,7 @@
           <p:cNvPr id="6" name="case-title">
             <a:extLst xmlns:a="http://schemas.openxmlformats.org/drawingml/2006/main">
               <a:ext uri="{FF2B5EF4-FFF2-40B4-BE49-F238E27FC236}">
-                <a16:creationId xmlns:a16="http://schemas.microsoft.com/office/drawing/2014/main" id="{1318C648-1FFA-4839-99C9-1E826BC438BF}"/>
+                <a16:creationId xmlns:a16="http://schemas.microsoft.com/office/drawing/2014/main" id="{EAB4DBAA-9610-4419-A38C-D26641408A2D}"/>
               </a:ext>
             </a:extLst>
           </p:cNvPr>
@@ -9527,7 +9527,7 @@
           <p:cNvPr id="7" name="case-row-0">
             <a:extLst xmlns:a="http://schemas.openxmlformats.org/drawingml/2006/main">
               <a:ext uri="{FF2B5EF4-FFF2-40B4-BE49-F238E27FC236}">
-                <a16:creationId xmlns:a16="http://schemas.microsoft.com/office/drawing/2014/main" id="{90505CC3-8DB5-42F8-88FA-CFE3431433AF}"/>
+                <a16:creationId xmlns:a16="http://schemas.microsoft.com/office/drawing/2014/main" id="{06502195-7301-44B9-9271-EB49B04AD364}"/>
               </a:ext>
             </a:extLst>
           </p:cNvPr>
@@ -9591,7 +9591,7 @@
           <p:cNvPr id="8" name="case-row-1">
             <a:extLst xmlns:a="http://schemas.openxmlformats.org/drawingml/2006/main">
               <a:ext uri="{FF2B5EF4-FFF2-40B4-BE49-F238E27FC236}">
-                <a16:creationId xmlns:a16="http://schemas.microsoft.com/office/drawing/2014/main" id="{296E7BAB-78D5-486A-A594-4076A6A8CE93}"/>
+                <a16:creationId xmlns:a16="http://schemas.microsoft.com/office/drawing/2014/main" id="{16798724-25E4-442F-8959-41AE653F176C}"/>
               </a:ext>
             </a:extLst>
           </p:cNvPr>
@@ -9655,7 +9655,7 @@
           <p:cNvPr id="9" name="case-row-2">
             <a:extLst xmlns:a="http://schemas.openxmlformats.org/drawingml/2006/main">
               <a:ext uri="{FF2B5EF4-FFF2-40B4-BE49-F238E27FC236}">
-                <a16:creationId xmlns:a16="http://schemas.microsoft.com/office/drawing/2014/main" id="{890CA103-6390-4474-8E85-C8C13916C246}"/>
+                <a16:creationId xmlns:a16="http://schemas.microsoft.com/office/drawing/2014/main" id="{6080BAD4-EC6B-4AC4-A482-9C7AF0CD1066}"/>
               </a:ext>
             </a:extLst>
           </p:cNvPr>
@@ -9719,7 +9719,7 @@
           <p:cNvPr id="10" name="case-row-3">
             <a:extLst xmlns:a="http://schemas.openxmlformats.org/drawingml/2006/main">
               <a:ext uri="{FF2B5EF4-FFF2-40B4-BE49-F238E27FC236}">
-                <a16:creationId xmlns:a16="http://schemas.microsoft.com/office/drawing/2014/main" id="{C717DE60-5918-405C-BD82-F6CDA230595F}"/>
+                <a16:creationId xmlns:a16="http://schemas.microsoft.com/office/drawing/2014/main" id="{C9F7AA73-AA4F-4D75-91D1-6E95C3551EC8}"/>
               </a:ext>
             </a:extLst>
           </p:cNvPr>
@@ -9783,7 +9783,7 @@
           <p:cNvPr id="11" name="case-row-4">
             <a:extLst xmlns:a="http://schemas.openxmlformats.org/drawingml/2006/main">
               <a:ext uri="{FF2B5EF4-FFF2-40B4-BE49-F238E27FC236}">
-                <a16:creationId xmlns:a16="http://schemas.microsoft.com/office/drawing/2014/main" id="{96090E86-FA3C-4795-85B9-90415764239F}"/>
+                <a16:creationId xmlns:a16="http://schemas.microsoft.com/office/drawing/2014/main" id="{7684B081-E85C-42A5-837E-36860215B738}"/>
               </a:ext>
             </a:extLst>
           </p:cNvPr>
@@ -9847,7 +9847,7 @@
           <p:cNvPr id="12" name="s9-takeaway-rule">
             <a:extLst xmlns:a="http://schemas.openxmlformats.org/drawingml/2006/main">
               <a:ext uri="{FF2B5EF4-FFF2-40B4-BE49-F238E27FC236}">
-                <a16:creationId xmlns:a16="http://schemas.microsoft.com/office/drawing/2014/main" id="{0C4172A9-1983-4312-A4CD-814B1BB416C8}"/>
+                <a16:creationId xmlns:a16="http://schemas.microsoft.com/office/drawing/2014/main" id="{6C4CF72C-40F9-41B9-9AD1-333F285BDFD5}"/>
               </a:ext>
             </a:extLst>
           </p:cNvPr>
@@ -9880,7 +9880,7 @@
           <p:cNvPr id="13" name="s9-takeaway">
             <a:extLst xmlns:a="http://schemas.openxmlformats.org/drawingml/2006/main">
               <a:ext uri="{FF2B5EF4-FFF2-40B4-BE49-F238E27FC236}">
-                <a16:creationId xmlns:a16="http://schemas.microsoft.com/office/drawing/2014/main" id="{390F3FC8-C483-4A12-A1E4-F68FFFFE6397}"/>
+                <a16:creationId xmlns:a16="http://schemas.microsoft.com/office/drawing/2014/main" id="{6D998187-CA00-461E-860A-144D5C34800A}"/>
               </a:ext>
             </a:extLst>
           </p:cNvPr>
@@ -9936,7 +9936,7 @@
     </p:spTree>
     <p:extLst>
       <p:ext uri="{BB962C8B-B14F-4D97-AF65-F5344CB8AC3E}">
-        <p14:creationId xmlns:p14="http://schemas.microsoft.com/office/powerpoint/2010/main" val="741690800"/>
+        <p14:creationId xmlns:p14="http://schemas.microsoft.com/office/powerpoint/2010/main" val="1187881015"/>
       </p:ext>
     </p:extLst>
   </p:cSld>
